--- a/Звіт/Диплом/Презентація/Презентація_диплом_Ніколаєв.pptx
+++ b/Звіт/Диплом/Презентація/Презентація_диплом_Ніколаєв.pptx
@@ -327,7 +327,7 @@
           <a:p>
             <a:fld id="{5BCAD085-E8A6-8845-BD4E-CB4CCA059FC4}" type="datetimeFigureOut">
               <a:rPr lang="en-US" smtClean="0"/>
-              <a:t>6/1/2026</a:t>
+              <a:t>6/2/2026</a:t>
             </a:fld>
             <a:endParaRPr lang="en-US"/>
           </a:p>
@@ -495,7 +495,7 @@
           <a:p>
             <a:fld id="{5BCAD085-E8A6-8845-BD4E-CB4CCA059FC4}" type="datetimeFigureOut">
               <a:rPr lang="en-US" smtClean="0"/>
-              <a:t>6/1/2026</a:t>
+              <a:t>6/2/2026</a:t>
             </a:fld>
             <a:endParaRPr lang="en-US"/>
           </a:p>
@@ -673,7 +673,7 @@
           <a:p>
             <a:fld id="{5BCAD085-E8A6-8845-BD4E-CB4CCA059FC4}" type="datetimeFigureOut">
               <a:rPr lang="en-US" smtClean="0"/>
-              <a:t>6/1/2026</a:t>
+              <a:t>6/2/2026</a:t>
             </a:fld>
             <a:endParaRPr lang="en-US"/>
           </a:p>
@@ -841,7 +841,7 @@
           <a:p>
             <a:fld id="{5BCAD085-E8A6-8845-BD4E-CB4CCA059FC4}" type="datetimeFigureOut">
               <a:rPr lang="en-US" smtClean="0"/>
-              <a:t>6/1/2026</a:t>
+              <a:t>6/2/2026</a:t>
             </a:fld>
             <a:endParaRPr lang="en-US"/>
           </a:p>
@@ -1086,7 +1086,7 @@
           <a:p>
             <a:fld id="{5BCAD085-E8A6-8845-BD4E-CB4CCA059FC4}" type="datetimeFigureOut">
               <a:rPr lang="en-US" smtClean="0"/>
-              <a:t>6/1/2026</a:t>
+              <a:t>6/2/2026</a:t>
             </a:fld>
             <a:endParaRPr lang="en-US"/>
           </a:p>
@@ -1371,7 +1371,7 @@
           <a:p>
             <a:fld id="{5BCAD085-E8A6-8845-BD4E-CB4CCA059FC4}" type="datetimeFigureOut">
               <a:rPr lang="en-US" smtClean="0"/>
-              <a:t>6/1/2026</a:t>
+              <a:t>6/2/2026</a:t>
             </a:fld>
             <a:endParaRPr lang="en-US"/>
           </a:p>
@@ -1790,7 +1790,7 @@
           <a:p>
             <a:fld id="{5BCAD085-E8A6-8845-BD4E-CB4CCA059FC4}" type="datetimeFigureOut">
               <a:rPr lang="en-US" smtClean="0"/>
-              <a:t>6/1/2026</a:t>
+              <a:t>6/2/2026</a:t>
             </a:fld>
             <a:endParaRPr lang="en-US"/>
           </a:p>
@@ -1907,7 +1907,7 @@
           <a:p>
             <a:fld id="{5BCAD085-E8A6-8845-BD4E-CB4CCA059FC4}" type="datetimeFigureOut">
               <a:rPr lang="en-US" smtClean="0"/>
-              <a:t>6/1/2026</a:t>
+              <a:t>6/2/2026</a:t>
             </a:fld>
             <a:endParaRPr lang="en-US"/>
           </a:p>
@@ -2002,7 +2002,7 @@
           <a:p>
             <a:fld id="{5BCAD085-E8A6-8845-BD4E-CB4CCA059FC4}" type="datetimeFigureOut">
               <a:rPr lang="en-US" smtClean="0"/>
-              <a:t>6/1/2026</a:t>
+              <a:t>6/2/2026</a:t>
             </a:fld>
             <a:endParaRPr lang="en-US"/>
           </a:p>
@@ -2277,7 +2277,7 @@
           <a:p>
             <a:fld id="{5BCAD085-E8A6-8845-BD4E-CB4CCA059FC4}" type="datetimeFigureOut">
               <a:rPr lang="en-US" smtClean="0"/>
-              <a:t>6/1/2026</a:t>
+              <a:t>6/2/2026</a:t>
             </a:fld>
             <a:endParaRPr lang="en-US"/>
           </a:p>
@@ -2529,7 +2529,7 @@
           <a:p>
             <a:fld id="{5BCAD085-E8A6-8845-BD4E-CB4CCA059FC4}" type="datetimeFigureOut">
               <a:rPr lang="en-US" smtClean="0"/>
-              <a:t>6/1/2026</a:t>
+              <a:t>6/2/2026</a:t>
             </a:fld>
             <a:endParaRPr lang="en-US"/>
           </a:p>
@@ -2740,7 +2740,7 @@
           <a:p>
             <a:fld id="{5BCAD085-E8A6-8845-BD4E-CB4CCA059FC4}" type="datetimeFigureOut">
               <a:rPr lang="en-US" smtClean="0"/>
-              <a:t>6/1/2026</a:t>
+              <a:t>6/2/2026</a:t>
             </a:fld>
             <a:endParaRPr lang="en-US"/>
           </a:p>
@@ -3913,7 +3913,7 @@
         </p:nvSpPr>
         <p:spPr>
           <a:xfrm>
-            <a:off x="0" y="4023360"/>
+            <a:off x="0" y="5091545"/>
             <a:ext cx="9144000" cy="36576"/>
           </a:xfrm>
           <a:prstGeom prst="rect">
@@ -4153,7 +4153,7 @@
         <p:spPr>
           <a:xfrm>
             <a:off x="640080" y="1828800"/>
-            <a:ext cx="2468880" cy="804672"/>
+            <a:ext cx="2468880" cy="461665"/>
           </a:xfrm>
           <a:prstGeom prst="rect">
             <a:avLst/>
@@ -4168,13 +4168,94 @@
           <a:p>
             <a:pPr algn="l"/>
             <a:r>
-              <a:rPr sz="1000" b="0" i="0">
-                <a:solidFill>
-                  <a:srgbClr val="1E293B"/>
-                </a:solidFill>
-                <a:latin typeface="Calibri"/>
-              </a:rPr>
-              <a:t>Центральний контролер, сесійний стан, вкладки TSP / VRP / DB</a:t>
+              <a:rPr sz="1200" b="0" i="0" dirty="0" err="1">
+                <a:solidFill>
+                  <a:srgbClr val="1E293B"/>
+                </a:solidFill>
+                <a:latin typeface="Calibri"/>
+              </a:rPr>
+              <a:t>Центральний</a:t>
+            </a:r>
+            <a:r>
+              <a:rPr sz="1200" b="0" i="0" dirty="0">
+                <a:solidFill>
+                  <a:srgbClr val="1E293B"/>
+                </a:solidFill>
+                <a:latin typeface="Calibri"/>
+              </a:rPr>
+              <a:t> </a:t>
+            </a:r>
+            <a:r>
+              <a:rPr sz="1200" b="0" i="0" dirty="0" err="1">
+                <a:solidFill>
+                  <a:srgbClr val="1E293B"/>
+                </a:solidFill>
+                <a:latin typeface="Calibri"/>
+              </a:rPr>
+              <a:t>контролер</a:t>
+            </a:r>
+            <a:r>
+              <a:rPr sz="1200" b="0" i="0" dirty="0">
+                <a:solidFill>
+                  <a:srgbClr val="1E293B"/>
+                </a:solidFill>
+                <a:latin typeface="Calibri"/>
+              </a:rPr>
+              <a:t>, </a:t>
+            </a:r>
+            <a:r>
+              <a:rPr sz="1200" b="0" i="0" dirty="0" err="1">
+                <a:solidFill>
+                  <a:srgbClr val="1E293B"/>
+                </a:solidFill>
+                <a:latin typeface="Calibri"/>
+              </a:rPr>
+              <a:t>сесійний</a:t>
+            </a:r>
+            <a:r>
+              <a:rPr sz="1200" b="0" i="0" dirty="0">
+                <a:solidFill>
+                  <a:srgbClr val="1E293B"/>
+                </a:solidFill>
+                <a:latin typeface="Calibri"/>
+              </a:rPr>
+              <a:t> </a:t>
+            </a:r>
+            <a:r>
+              <a:rPr sz="1200" b="0" i="0" dirty="0" err="1">
+                <a:solidFill>
+                  <a:srgbClr val="1E293B"/>
+                </a:solidFill>
+                <a:latin typeface="Calibri"/>
+              </a:rPr>
+              <a:t>стан</a:t>
+            </a:r>
+            <a:r>
+              <a:rPr sz="1200" b="0" i="0" dirty="0">
+                <a:solidFill>
+                  <a:srgbClr val="1E293B"/>
+                </a:solidFill>
+                <a:latin typeface="Calibri"/>
+              </a:rPr>
+              <a:t>, </a:t>
+            </a:r>
+            <a:r>
+              <a:rPr sz="1200" b="0" i="0" dirty="0" err="1">
+                <a:solidFill>
+                  <a:srgbClr val="1E293B"/>
+                </a:solidFill>
+                <a:latin typeface="Calibri"/>
+              </a:rPr>
+              <a:t>вкладки</a:t>
+            </a:r>
+            <a:r>
+              <a:rPr sz="1200" b="0" i="0" dirty="0">
+                <a:solidFill>
+                  <a:srgbClr val="1E293B"/>
+                </a:solidFill>
+                <a:latin typeface="Calibri"/>
+              </a:rPr>
+              <a:t> TSP / VRP / DB</a:t>
             </a:r>
           </a:p>
         </p:txBody>
@@ -4346,7 +4427,7 @@
         <p:spPr>
           <a:xfrm>
             <a:off x="3566160" y="1828800"/>
-            <a:ext cx="2468880" cy="804672"/>
+            <a:ext cx="2468880" cy="461665"/>
           </a:xfrm>
           <a:prstGeom prst="rect">
             <a:avLst/>
@@ -4361,7 +4442,7 @@
           <a:p>
             <a:pPr algn="l"/>
             <a:r>
-              <a:rPr sz="1000" b="0" i="0">
+              <a:rPr sz="1200" b="0" i="0">
                 <a:solidFill>
                   <a:srgbClr val="1E293B"/>
                 </a:solidFill>
@@ -4539,7 +4620,7 @@
         <p:spPr>
           <a:xfrm>
             <a:off x="6492240" y="1828800"/>
-            <a:ext cx="2468880" cy="804672"/>
+            <a:ext cx="2468880" cy="461665"/>
           </a:xfrm>
           <a:prstGeom prst="rect">
             <a:avLst/>
@@ -4554,7 +4635,7 @@
           <a:p>
             <a:pPr algn="l"/>
             <a:r>
-              <a:rPr sz="1000" b="0" i="0">
+              <a:rPr sz="1200" b="0" i="0">
                 <a:solidFill>
                   <a:srgbClr val="1E293B"/>
                 </a:solidFill>
@@ -4732,7 +4813,7 @@
         <p:spPr>
           <a:xfrm>
             <a:off x="640080" y="3566159"/>
-            <a:ext cx="2468880" cy="804672"/>
+            <a:ext cx="2468880" cy="461665"/>
           </a:xfrm>
           <a:prstGeom prst="rect">
             <a:avLst/>
@@ -4747,14 +4828,47 @@
           <a:p>
             <a:pPr algn="l"/>
             <a:r>
-              <a:rPr sz="1000" b="0" i="0">
-                <a:solidFill>
-                  <a:srgbClr val="1E293B"/>
-                </a:solidFill>
-                <a:latin typeface="Calibri"/>
-              </a:rPr>
-              <a:t>TSP: NN / 2-opt / GA / Christofides, авто-вибір</a:t>
-            </a:r>
+              <a:rPr sz="1200" b="0" i="0" dirty="0">
+                <a:solidFill>
+                  <a:srgbClr val="1E293B"/>
+                </a:solidFill>
+                <a:latin typeface="Calibri"/>
+              </a:rPr>
+              <a:t>TSP: NN / 2-opt / GA / </a:t>
+            </a:r>
+            <a:r>
+              <a:rPr sz="1200" b="0" i="0" dirty="0" err="1">
+                <a:solidFill>
+                  <a:srgbClr val="1E293B"/>
+                </a:solidFill>
+                <a:latin typeface="Calibri"/>
+              </a:rPr>
+              <a:t>Christofides</a:t>
+            </a:r>
+            <a:r>
+              <a:rPr sz="1200" b="0" i="0" dirty="0">
+                <a:solidFill>
+                  <a:srgbClr val="1E293B"/>
+                </a:solidFill>
+                <a:latin typeface="Calibri"/>
+              </a:rPr>
+              <a:t>, </a:t>
+            </a:r>
+            <a:r>
+              <a:rPr sz="1200" b="0" i="0" dirty="0" err="1">
+                <a:solidFill>
+                  <a:srgbClr val="1E293B"/>
+                </a:solidFill>
+                <a:latin typeface="Calibri"/>
+              </a:rPr>
+              <a:t>авто-вибір</a:t>
+            </a:r>
+            <a:endParaRPr sz="1200" b="0" i="0" dirty="0">
+              <a:solidFill>
+                <a:srgbClr val="1E293B"/>
+              </a:solidFill>
+              <a:latin typeface="Calibri"/>
+            </a:endParaRPr>
           </a:p>
         </p:txBody>
       </p:sp>
@@ -4925,7 +5039,7 @@
         <p:spPr>
           <a:xfrm>
             <a:off x="3566160" y="3566159"/>
-            <a:ext cx="2468880" cy="804672"/>
+            <a:ext cx="2468880" cy="461665"/>
           </a:xfrm>
           <a:prstGeom prst="rect">
             <a:avLst/>
@@ -4940,7 +5054,7 @@
           <a:p>
             <a:pPr algn="l"/>
             <a:r>
-              <a:rPr sz="1000" b="0" i="0">
+              <a:rPr sz="1200" b="0" i="0">
                 <a:solidFill>
                   <a:srgbClr val="1E293B"/>
                 </a:solidFill>
@@ -5118,7 +5232,7 @@
         <p:spPr>
           <a:xfrm>
             <a:off x="6492240" y="3566159"/>
-            <a:ext cx="2468880" cy="804672"/>
+            <a:ext cx="2468880" cy="461665"/>
           </a:xfrm>
           <a:prstGeom prst="rect">
             <a:avLst/>
@@ -5133,7 +5247,7 @@
           <a:p>
             <a:pPr algn="l"/>
             <a:r>
-              <a:rPr sz="1000" b="0" i="0">
+              <a:rPr sz="1200" b="0" i="0">
                 <a:solidFill>
                   <a:srgbClr val="1E293B"/>
                 </a:solidFill>
@@ -5365,7 +5479,7 @@
         </p:nvSpPr>
         <p:spPr>
           <a:xfrm>
-            <a:off x="0" y="4023360"/>
+            <a:off x="0" y="4597908"/>
             <a:ext cx="9144000" cy="36576"/>
           </a:xfrm>
           <a:prstGeom prst="rect">
@@ -5605,7 +5719,7 @@
         <p:spPr>
           <a:xfrm>
             <a:off x="1051560" y="1508760"/>
-            <a:ext cx="3474720" cy="530352"/>
+            <a:ext cx="3474720" cy="461665"/>
           </a:xfrm>
           <a:prstGeom prst="rect">
             <a:avLst/>
@@ -5620,13 +5734,121 @@
           <a:p>
             <a:pPr algn="l"/>
             <a:r>
-              <a:rPr sz="1050" b="0" i="0">
-                <a:solidFill>
-                  <a:srgbClr val="1E293B"/>
-                </a:solidFill>
-                <a:latin typeface="Calibri"/>
-              </a:rPr>
-              <a:t>50 хромосом: 1 жадібна (найбл. сусід) + 49 випадкових. Кодування: giant tour.</a:t>
+              <a:rPr sz="1200" b="0" i="0" dirty="0">
+                <a:solidFill>
+                  <a:srgbClr val="1E293B"/>
+                </a:solidFill>
+                <a:latin typeface="Calibri"/>
+              </a:rPr>
+              <a:t>50 </a:t>
+            </a:r>
+            <a:r>
+              <a:rPr sz="1200" b="0" i="0" dirty="0" err="1">
+                <a:solidFill>
+                  <a:srgbClr val="1E293B"/>
+                </a:solidFill>
+                <a:latin typeface="Calibri"/>
+              </a:rPr>
+              <a:t>хромосом</a:t>
+            </a:r>
+            <a:r>
+              <a:rPr sz="1200" b="0" i="0" dirty="0">
+                <a:solidFill>
+                  <a:srgbClr val="1E293B"/>
+                </a:solidFill>
+                <a:latin typeface="Calibri"/>
+              </a:rPr>
+              <a:t>: 1 </a:t>
+            </a:r>
+            <a:r>
+              <a:rPr sz="1200" b="0" i="0" dirty="0" err="1">
+                <a:solidFill>
+                  <a:srgbClr val="1E293B"/>
+                </a:solidFill>
+                <a:latin typeface="Calibri"/>
+              </a:rPr>
+              <a:t>жадібна</a:t>
+            </a:r>
+            <a:r>
+              <a:rPr sz="1200" b="0" i="0" dirty="0">
+                <a:solidFill>
+                  <a:srgbClr val="1E293B"/>
+                </a:solidFill>
+                <a:latin typeface="Calibri"/>
+              </a:rPr>
+              <a:t> (</a:t>
+            </a:r>
+            <a:r>
+              <a:rPr sz="1200" b="0" i="0" dirty="0" err="1">
+                <a:solidFill>
+                  <a:srgbClr val="1E293B"/>
+                </a:solidFill>
+                <a:latin typeface="Calibri"/>
+              </a:rPr>
+              <a:t>найбл</a:t>
+            </a:r>
+            <a:r>
+              <a:rPr sz="1200" b="0" i="0" dirty="0">
+                <a:solidFill>
+                  <a:srgbClr val="1E293B"/>
+                </a:solidFill>
+                <a:latin typeface="Calibri"/>
+              </a:rPr>
+              <a:t>. </a:t>
+            </a:r>
+            <a:r>
+              <a:rPr sz="1200" b="0" i="0" dirty="0" err="1">
+                <a:solidFill>
+                  <a:srgbClr val="1E293B"/>
+                </a:solidFill>
+                <a:latin typeface="Calibri"/>
+              </a:rPr>
+              <a:t>сусід</a:t>
+            </a:r>
+            <a:r>
+              <a:rPr sz="1200" b="0" i="0" dirty="0">
+                <a:solidFill>
+                  <a:srgbClr val="1E293B"/>
+                </a:solidFill>
+                <a:latin typeface="Calibri"/>
+              </a:rPr>
+              <a:t>) + 49 </a:t>
+            </a:r>
+            <a:r>
+              <a:rPr sz="1200" b="0" i="0" dirty="0" err="1">
+                <a:solidFill>
+                  <a:srgbClr val="1E293B"/>
+                </a:solidFill>
+                <a:latin typeface="Calibri"/>
+              </a:rPr>
+              <a:t>випадкових</a:t>
+            </a:r>
+            <a:r>
+              <a:rPr sz="1200" b="0" i="0" dirty="0">
+                <a:solidFill>
+                  <a:srgbClr val="1E293B"/>
+                </a:solidFill>
+                <a:latin typeface="Calibri"/>
+              </a:rPr>
+              <a:t>. </a:t>
+            </a:r>
+            <a:r>
+              <a:rPr sz="1200" b="0" i="0" dirty="0" err="1">
+                <a:solidFill>
+                  <a:srgbClr val="1E293B"/>
+                </a:solidFill>
+                <a:latin typeface="Calibri"/>
+              </a:rPr>
+              <a:t>Кодування</a:t>
+            </a:r>
+            <a:r>
+              <a:rPr sz="1200" b="0" i="0" dirty="0">
+                <a:solidFill>
+                  <a:srgbClr val="1E293B"/>
+                </a:solidFill>
+                <a:latin typeface="Calibri"/>
+              </a:rPr>
+              <a:t>: giant tour.</a:t>
             </a:r>
           </a:p>
         </p:txBody>
@@ -5798,7 +6020,7 @@
         <p:spPr>
           <a:xfrm>
             <a:off x="5349240" y="1508760"/>
-            <a:ext cx="3474720" cy="530352"/>
+            <a:ext cx="3474720" cy="461665"/>
           </a:xfrm>
           <a:prstGeom prst="rect">
             <a:avLst/>
@@ -5813,7 +6035,7 @@
           <a:p>
             <a:pPr algn="l"/>
             <a:r>
-              <a:rPr sz="1050" b="0" i="0">
+              <a:rPr sz="1200" b="0" i="0">
                 <a:solidFill>
                   <a:srgbClr val="1E293B"/>
                 </a:solidFill>
@@ -5991,7 +6213,7 @@
         <p:spPr>
           <a:xfrm>
             <a:off x="1051560" y="2697480"/>
-            <a:ext cx="3474720" cy="530352"/>
+            <a:ext cx="3474720" cy="461665"/>
           </a:xfrm>
           <a:prstGeom prst="rect">
             <a:avLst/>
@@ -6006,13 +6228,103 @@
           <a:p>
             <a:pPr algn="l"/>
             <a:r>
-              <a:rPr sz="1050" b="0" i="0">
-                <a:solidFill>
-                  <a:srgbClr val="1E293B"/>
-                </a:solidFill>
-                <a:latin typeface="Calibri"/>
-              </a:rPr>
-              <a:t>F = A·T_total + B·K + P·|U|  — штраф за нерозподілених клієнтів.</a:t>
+              <a:rPr sz="1200" b="0" i="0" dirty="0">
+                <a:solidFill>
+                  <a:srgbClr val="1E293B"/>
+                </a:solidFill>
+                <a:latin typeface="Calibri"/>
+              </a:rPr>
+              <a:t>F = </a:t>
+            </a:r>
+            <a:r>
+              <a:rPr sz="1200" b="0" i="0" dirty="0" err="1">
+                <a:solidFill>
+                  <a:srgbClr val="1E293B"/>
+                </a:solidFill>
+                <a:latin typeface="Calibri"/>
+              </a:rPr>
+              <a:t>A·T_total</a:t>
+            </a:r>
+            <a:r>
+              <a:rPr sz="1200" b="0" i="0" dirty="0">
+                <a:solidFill>
+                  <a:srgbClr val="1E293B"/>
+                </a:solidFill>
+                <a:latin typeface="Calibri"/>
+              </a:rPr>
+              <a:t> + B·K + P·|U|  — </a:t>
+            </a:r>
+            <a:r>
+              <a:rPr sz="1200" b="0" i="0" dirty="0" err="1">
+                <a:solidFill>
+                  <a:srgbClr val="1E293B"/>
+                </a:solidFill>
+                <a:latin typeface="Calibri"/>
+              </a:rPr>
+              <a:t>штраф</a:t>
+            </a:r>
+            <a:r>
+              <a:rPr sz="1200" b="0" i="0" dirty="0">
+                <a:solidFill>
+                  <a:srgbClr val="1E293B"/>
+                </a:solidFill>
+                <a:latin typeface="Calibri"/>
+              </a:rPr>
+              <a:t> </a:t>
+            </a:r>
+            <a:r>
+              <a:rPr sz="1200" b="0" i="0" dirty="0" err="1">
+                <a:solidFill>
+                  <a:srgbClr val="1E293B"/>
+                </a:solidFill>
+                <a:latin typeface="Calibri"/>
+              </a:rPr>
+              <a:t>за</a:t>
+            </a:r>
+            <a:r>
+              <a:rPr sz="1200" b="0" i="0" dirty="0">
+                <a:solidFill>
+                  <a:srgbClr val="1E293B"/>
+                </a:solidFill>
+                <a:latin typeface="Calibri"/>
+              </a:rPr>
+              <a:t> </a:t>
+            </a:r>
+            <a:r>
+              <a:rPr sz="1200" b="0" i="0" dirty="0" err="1">
+                <a:solidFill>
+                  <a:srgbClr val="1E293B"/>
+                </a:solidFill>
+                <a:latin typeface="Calibri"/>
+              </a:rPr>
+              <a:t>нерозподілених</a:t>
+            </a:r>
+            <a:r>
+              <a:rPr sz="1200" b="0" i="0" dirty="0">
+                <a:solidFill>
+                  <a:srgbClr val="1E293B"/>
+                </a:solidFill>
+                <a:latin typeface="Calibri"/>
+              </a:rPr>
+              <a:t> </a:t>
+            </a:r>
+            <a:r>
+              <a:rPr sz="1200" b="0" i="0" dirty="0" err="1">
+                <a:solidFill>
+                  <a:srgbClr val="1E293B"/>
+                </a:solidFill>
+                <a:latin typeface="Calibri"/>
+              </a:rPr>
+              <a:t>клієнтів</a:t>
+            </a:r>
+            <a:r>
+              <a:rPr sz="1200" b="0" i="0" dirty="0">
+                <a:solidFill>
+                  <a:srgbClr val="1E293B"/>
+                </a:solidFill>
+                <a:latin typeface="Calibri"/>
+              </a:rPr>
+              <a:t>.</a:t>
             </a:r>
           </a:p>
         </p:txBody>
@@ -6184,7 +6496,7 @@
         <p:spPr>
           <a:xfrm>
             <a:off x="5349240" y="2697480"/>
-            <a:ext cx="3474720" cy="530352"/>
+            <a:ext cx="3474720" cy="461665"/>
           </a:xfrm>
           <a:prstGeom prst="rect">
             <a:avLst/>
@@ -6199,7 +6511,7 @@
           <a:p>
             <a:pPr algn="l"/>
             <a:r>
-              <a:rPr sz="1050" b="0" i="0">
+              <a:rPr sz="1200" b="0" i="0">
                 <a:solidFill>
                   <a:srgbClr val="1E293B"/>
                 </a:solidFill>
@@ -6377,7 +6689,7 @@
         <p:spPr>
           <a:xfrm>
             <a:off x="1051560" y="3886200"/>
-            <a:ext cx="3474720" cy="530352"/>
+            <a:ext cx="3474720" cy="461665"/>
           </a:xfrm>
           <a:prstGeom prst="rect">
             <a:avLst/>
@@ -6392,7 +6704,7 @@
           <a:p>
             <a:pPr algn="l"/>
             <a:r>
-              <a:rPr sz="1050" b="0" i="0">
+              <a:rPr sz="1200" b="0" i="0">
                 <a:solidFill>
                   <a:srgbClr val="1E293B"/>
                 </a:solidFill>
@@ -6570,7 +6882,7 @@
         <p:spPr>
           <a:xfrm>
             <a:off x="5349240" y="3886200"/>
-            <a:ext cx="3474720" cy="530352"/>
+            <a:ext cx="3474720" cy="461665"/>
           </a:xfrm>
           <a:prstGeom prst="rect">
             <a:avLst/>
@@ -6585,7 +6897,7 @@
           <a:p>
             <a:pPr algn="l"/>
             <a:r>
-              <a:rPr sz="1050" b="0" i="0">
+              <a:rPr sz="1200" b="0" i="0">
                 <a:solidFill>
                   <a:srgbClr val="1E293B"/>
                 </a:solidFill>
@@ -6762,7 +7074,7 @@
         </p:nvSpPr>
         <p:spPr>
           <a:xfrm>
-            <a:off x="0" y="4023360"/>
+            <a:off x="0" y="4809744"/>
             <a:ext cx="9144000" cy="36576"/>
           </a:xfrm>
           <a:prstGeom prst="rect">
@@ -6966,8 +7278,8 @@
         </p:nvSpPr>
         <p:spPr>
           <a:xfrm>
-            <a:off x="713232" y="1453895"/>
-            <a:ext cx="4754880" cy="384048"/>
+            <a:off x="713232" y="1378511"/>
+            <a:ext cx="4754880" cy="461665"/>
           </a:xfrm>
           <a:prstGeom prst="rect">
             <a:avLst/>
@@ -6982,13 +7294,148 @@
           <a:p>
             <a:pPr algn="l"/>
             <a:r>
-              <a:rPr sz="1050" b="0" i="0">
-                <a:solidFill>
-                  <a:srgbClr val="1E293B"/>
-                </a:solidFill>
-                <a:latin typeface="Calibri"/>
-              </a:rPr>
-              <a:t>Матриці відстаней та часових витрат між вузлами графа (drive / bike / walk)</a:t>
+              <a:rPr sz="1200" b="0" i="0" dirty="0" err="1">
+                <a:solidFill>
+                  <a:srgbClr val="1E293B"/>
+                </a:solidFill>
+                <a:latin typeface="Calibri"/>
+              </a:rPr>
+              <a:t>Матриці</a:t>
+            </a:r>
+            <a:r>
+              <a:rPr sz="1200" b="0" i="0" dirty="0">
+                <a:solidFill>
+                  <a:srgbClr val="1E293B"/>
+                </a:solidFill>
+                <a:latin typeface="Calibri"/>
+              </a:rPr>
+              <a:t> </a:t>
+            </a:r>
+            <a:r>
+              <a:rPr sz="1200" b="0" i="0" dirty="0" err="1">
+                <a:solidFill>
+                  <a:srgbClr val="1E293B"/>
+                </a:solidFill>
+                <a:latin typeface="Calibri"/>
+              </a:rPr>
+              <a:t>відстаней</a:t>
+            </a:r>
+            <a:r>
+              <a:rPr sz="1200" b="0" i="0" dirty="0">
+                <a:solidFill>
+                  <a:srgbClr val="1E293B"/>
+                </a:solidFill>
+                <a:latin typeface="Calibri"/>
+              </a:rPr>
+              <a:t> </a:t>
+            </a:r>
+            <a:r>
+              <a:rPr sz="1200" b="0" i="0" dirty="0" err="1">
+                <a:solidFill>
+                  <a:srgbClr val="1E293B"/>
+                </a:solidFill>
+                <a:latin typeface="Calibri"/>
+              </a:rPr>
+              <a:t>та</a:t>
+            </a:r>
+            <a:r>
+              <a:rPr sz="1200" b="0" i="0" dirty="0">
+                <a:solidFill>
+                  <a:srgbClr val="1E293B"/>
+                </a:solidFill>
+                <a:latin typeface="Calibri"/>
+              </a:rPr>
+              <a:t> </a:t>
+            </a:r>
+            <a:r>
+              <a:rPr sz="1200" b="0" i="0" dirty="0" err="1">
+                <a:solidFill>
+                  <a:srgbClr val="1E293B"/>
+                </a:solidFill>
+                <a:latin typeface="Calibri"/>
+              </a:rPr>
+              <a:t>часових</a:t>
+            </a:r>
+            <a:r>
+              <a:rPr sz="1200" b="0" i="0" dirty="0">
+                <a:solidFill>
+                  <a:srgbClr val="1E293B"/>
+                </a:solidFill>
+                <a:latin typeface="Calibri"/>
+              </a:rPr>
+              <a:t> </a:t>
+            </a:r>
+            <a:r>
+              <a:rPr sz="1200" b="0" i="0" dirty="0" err="1">
+                <a:solidFill>
+                  <a:srgbClr val="1E293B"/>
+                </a:solidFill>
+                <a:latin typeface="Calibri"/>
+              </a:rPr>
+              <a:t>витрат</a:t>
+            </a:r>
+            <a:r>
+              <a:rPr sz="1200" b="0" i="0" dirty="0">
+                <a:solidFill>
+                  <a:srgbClr val="1E293B"/>
+                </a:solidFill>
+                <a:latin typeface="Calibri"/>
+              </a:rPr>
+              <a:t> </a:t>
+            </a:r>
+            <a:r>
+              <a:rPr sz="1200" b="0" i="0" dirty="0" err="1">
+                <a:solidFill>
+                  <a:srgbClr val="1E293B"/>
+                </a:solidFill>
+                <a:latin typeface="Calibri"/>
+              </a:rPr>
+              <a:t>між</a:t>
+            </a:r>
+            <a:r>
+              <a:rPr sz="1200" b="0" i="0" dirty="0">
+                <a:solidFill>
+                  <a:srgbClr val="1E293B"/>
+                </a:solidFill>
+                <a:latin typeface="Calibri"/>
+              </a:rPr>
+              <a:t> </a:t>
+            </a:r>
+            <a:r>
+              <a:rPr sz="1200" b="0" i="0" dirty="0" err="1">
+                <a:solidFill>
+                  <a:srgbClr val="1E293B"/>
+                </a:solidFill>
+                <a:latin typeface="Calibri"/>
+              </a:rPr>
+              <a:t>вузлами</a:t>
+            </a:r>
+            <a:r>
+              <a:rPr sz="1200" b="0" i="0" dirty="0">
+                <a:solidFill>
+                  <a:srgbClr val="1E293B"/>
+                </a:solidFill>
+                <a:latin typeface="Calibri"/>
+              </a:rPr>
+              <a:t> </a:t>
+            </a:r>
+            <a:r>
+              <a:rPr sz="1200" b="0" i="0" dirty="0" err="1">
+                <a:solidFill>
+                  <a:srgbClr val="1E293B"/>
+                </a:solidFill>
+                <a:latin typeface="Calibri"/>
+              </a:rPr>
+              <a:t>графа</a:t>
+            </a:r>
+            <a:r>
+              <a:rPr sz="1200" b="0" i="0" dirty="0">
+                <a:solidFill>
+                  <a:srgbClr val="1E293B"/>
+                </a:solidFill>
+                <a:latin typeface="Calibri"/>
+              </a:rPr>
+              <a:t> (drive / bike / walk)</a:t>
             </a:r>
           </a:p>
         </p:txBody>
@@ -7124,8 +7571,8 @@
         </p:nvSpPr>
         <p:spPr>
           <a:xfrm>
-            <a:off x="713232" y="2414016"/>
-            <a:ext cx="4754880" cy="384048"/>
+            <a:off x="713232" y="2393788"/>
+            <a:ext cx="4754880" cy="276999"/>
           </a:xfrm>
           <a:prstGeom prst="rect">
             <a:avLst/>
@@ -7140,7 +7587,7 @@
           <a:p>
             <a:pPr algn="l"/>
             <a:r>
-              <a:rPr sz="1050" b="0" i="0">
+              <a:rPr sz="1200" b="0" i="0">
                 <a:solidFill>
                   <a:srgbClr val="1E293B"/>
                 </a:solidFill>
@@ -7282,8 +7729,8 @@
         </p:nvSpPr>
         <p:spPr>
           <a:xfrm>
-            <a:off x="713232" y="3374136"/>
-            <a:ext cx="4754880" cy="384048"/>
+            <a:off x="713232" y="3353908"/>
+            <a:ext cx="4754880" cy="276999"/>
           </a:xfrm>
           <a:prstGeom prst="rect">
             <a:avLst/>
@@ -7298,7 +7745,7 @@
           <a:p>
             <a:pPr algn="l"/>
             <a:r>
-              <a:rPr sz="1050" b="0" i="0">
+              <a:rPr sz="1200" b="0" i="0">
                 <a:solidFill>
                   <a:srgbClr val="1E293B"/>
                 </a:solidFill>
@@ -7440,8 +7887,8 @@
         </p:nvSpPr>
         <p:spPr>
           <a:xfrm>
-            <a:off x="713232" y="4334256"/>
-            <a:ext cx="4754880" cy="384048"/>
+            <a:off x="713232" y="4314028"/>
+            <a:ext cx="4754880" cy="276999"/>
           </a:xfrm>
           <a:prstGeom prst="rect">
             <a:avLst/>
@@ -7456,7 +7903,7 @@
           <a:p>
             <a:pPr algn="l"/>
             <a:r>
-              <a:rPr sz="1050" b="0" i="0">
+              <a:rPr sz="1200" b="0" i="0">
                 <a:solidFill>
                   <a:srgbClr val="1E293B"/>
                 </a:solidFill>
@@ -8438,7 +8885,7 @@
         </p:nvSpPr>
         <p:spPr>
           <a:xfrm>
-            <a:off x="0" y="4023360"/>
+            <a:off x="0" y="5055524"/>
             <a:ext cx="9144000" cy="36576"/>
           </a:xfrm>
           <a:prstGeom prst="rect">
@@ -8723,7 +9170,7 @@
         </p:nvSpPr>
         <p:spPr>
           <a:xfrm>
-            <a:off x="3566160" y="1737360"/>
+            <a:off x="3241550" y="1700784"/>
             <a:ext cx="4892040" cy="457200"/>
           </a:xfrm>
           <a:prstGeom prst="rect">
@@ -8739,14 +9186,182 @@
           <a:p>
             <a:pPr algn="l"/>
             <a:r>
-              <a:rPr sz="1050" b="0" i="0">
-                <a:solidFill>
-                  <a:srgbClr val="1E293B"/>
-                </a:solidFill>
-                <a:latin typeface="Calibri"/>
-              </a:rPr>
-              <a:t>Критичні утилітарні функції: кодування координат, зчитування матриці, перевірка часових вікон</a:t>
-            </a:r>
+              <a:rPr sz="1200" b="0" i="0" dirty="0" err="1">
+                <a:solidFill>
+                  <a:srgbClr val="1E293B"/>
+                </a:solidFill>
+                <a:latin typeface="Calibri"/>
+              </a:rPr>
+              <a:t>Критичні</a:t>
+            </a:r>
+            <a:r>
+              <a:rPr sz="1200" b="0" i="0" dirty="0">
+                <a:solidFill>
+                  <a:srgbClr val="1E293B"/>
+                </a:solidFill>
+                <a:latin typeface="Calibri"/>
+              </a:rPr>
+              <a:t> </a:t>
+            </a:r>
+            <a:r>
+              <a:rPr sz="1200" b="0" i="0" dirty="0" err="1">
+                <a:solidFill>
+                  <a:srgbClr val="1E293B"/>
+                </a:solidFill>
+                <a:latin typeface="Calibri"/>
+              </a:rPr>
+              <a:t>утилітарні</a:t>
+            </a:r>
+            <a:r>
+              <a:rPr sz="1200" b="0" i="0" dirty="0">
+                <a:solidFill>
+                  <a:srgbClr val="1E293B"/>
+                </a:solidFill>
+                <a:latin typeface="Calibri"/>
+              </a:rPr>
+              <a:t> </a:t>
+            </a:r>
+            <a:r>
+              <a:rPr sz="1200" b="0" i="0" dirty="0" err="1">
+                <a:solidFill>
+                  <a:srgbClr val="1E293B"/>
+                </a:solidFill>
+                <a:latin typeface="Calibri"/>
+              </a:rPr>
+              <a:t>функції</a:t>
+            </a:r>
+            <a:r>
+              <a:rPr sz="1200" b="0" i="0" dirty="0">
+                <a:solidFill>
+                  <a:srgbClr val="1E293B"/>
+                </a:solidFill>
+                <a:latin typeface="Calibri"/>
+              </a:rPr>
+              <a:t>: </a:t>
+            </a:r>
+            <a:r>
+              <a:rPr sz="1200" b="0" i="0" dirty="0" err="1">
+                <a:solidFill>
+                  <a:srgbClr val="1E293B"/>
+                </a:solidFill>
+                <a:latin typeface="Calibri"/>
+              </a:rPr>
+              <a:t>кодування</a:t>
+            </a:r>
+            <a:r>
+              <a:rPr sz="1200" b="0" i="0" dirty="0">
+                <a:solidFill>
+                  <a:srgbClr val="1E293B"/>
+                </a:solidFill>
+                <a:latin typeface="Calibri"/>
+              </a:rPr>
+              <a:t> </a:t>
+            </a:r>
+            <a:r>
+              <a:rPr sz="1200" b="0" i="0" dirty="0" err="1">
+                <a:solidFill>
+                  <a:srgbClr val="1E293B"/>
+                </a:solidFill>
+                <a:latin typeface="Calibri"/>
+              </a:rPr>
+              <a:t>координат</a:t>
+            </a:r>
+            <a:r>
+              <a:rPr sz="1200" b="0" i="0" dirty="0">
+                <a:solidFill>
+                  <a:srgbClr val="1E293B"/>
+                </a:solidFill>
+                <a:latin typeface="Calibri"/>
+              </a:rPr>
+              <a:t>, </a:t>
+            </a:r>
+            <a:r>
+              <a:rPr sz="1200" b="0" i="0" dirty="0" err="1">
+                <a:solidFill>
+                  <a:srgbClr val="1E293B"/>
+                </a:solidFill>
+                <a:latin typeface="Calibri"/>
+              </a:rPr>
+              <a:t>зчитування</a:t>
+            </a:r>
+            <a:r>
+              <a:rPr sz="1200" b="0" i="0" dirty="0">
+                <a:solidFill>
+                  <a:srgbClr val="1E293B"/>
+                </a:solidFill>
+                <a:latin typeface="Calibri"/>
+              </a:rPr>
+              <a:t> </a:t>
+            </a:r>
+            <a:r>
+              <a:rPr sz="1200" b="0" i="0" dirty="0" err="1">
+                <a:solidFill>
+                  <a:srgbClr val="1E293B"/>
+                </a:solidFill>
+                <a:latin typeface="Calibri"/>
+              </a:rPr>
+              <a:t>матриці</a:t>
+            </a:r>
+            <a:r>
+              <a:rPr sz="1200" b="0" i="0" dirty="0">
+                <a:solidFill>
+                  <a:srgbClr val="1E293B"/>
+                </a:solidFill>
+                <a:latin typeface="Calibri"/>
+              </a:rPr>
+              <a:t>, </a:t>
+            </a:r>
+            <a:r>
+              <a:rPr sz="1200" b="0" i="0" dirty="0" err="1">
+                <a:solidFill>
+                  <a:srgbClr val="1E293B"/>
+                </a:solidFill>
+                <a:latin typeface="Calibri"/>
+              </a:rPr>
+              <a:t>перевірка</a:t>
+            </a:r>
+            <a:r>
+              <a:rPr sz="1200" b="0" i="0" dirty="0">
+                <a:solidFill>
+                  <a:srgbClr val="1E293B"/>
+                </a:solidFill>
+                <a:latin typeface="Calibri"/>
+              </a:rPr>
+              <a:t> </a:t>
+            </a:r>
+            <a:r>
+              <a:rPr sz="1200" b="0" i="0" dirty="0" err="1">
+                <a:solidFill>
+                  <a:srgbClr val="1E293B"/>
+                </a:solidFill>
+                <a:latin typeface="Calibri"/>
+              </a:rPr>
+              <a:t>часових</a:t>
+            </a:r>
+            <a:r>
+              <a:rPr sz="1200" b="0" i="0" dirty="0">
+                <a:solidFill>
+                  <a:srgbClr val="1E293B"/>
+                </a:solidFill>
+                <a:latin typeface="Calibri"/>
+              </a:rPr>
+              <a:t> </a:t>
+            </a:r>
+            <a:r>
+              <a:rPr sz="1200" b="0" i="0" dirty="0" err="1">
+                <a:solidFill>
+                  <a:srgbClr val="1E293B"/>
+                </a:solidFill>
+                <a:latin typeface="Calibri"/>
+              </a:rPr>
+              <a:t>вікон</a:t>
+            </a:r>
+            <a:endParaRPr sz="1200" b="0" i="0" dirty="0">
+              <a:solidFill>
+                <a:srgbClr val="1E293B"/>
+              </a:solidFill>
+              <a:latin typeface="Calibri"/>
+            </a:endParaRPr>
           </a:p>
         </p:txBody>
       </p:sp>
@@ -8881,7 +9496,7 @@
         </p:nvSpPr>
         <p:spPr>
           <a:xfrm>
-            <a:off x="3566160" y="2450592"/>
+            <a:off x="3241550" y="2414016"/>
             <a:ext cx="4892040" cy="457200"/>
           </a:xfrm>
           <a:prstGeom prst="rect">
@@ -8897,14 +9512,146 @@
           <a:p>
             <a:pPr algn="l"/>
             <a:r>
-              <a:rPr sz="1050" b="0" i="0">
-                <a:solidFill>
-                  <a:srgbClr val="1E293B"/>
-                </a:solidFill>
-                <a:latin typeface="Calibri"/>
-              </a:rPr>
-              <a:t>Повний цикл TSP + VRP на реальних адресах м. Дніпро. Сценарії 5–50 замовлень</a:t>
-            </a:r>
+              <a:rPr sz="1200" b="0" i="0" dirty="0" err="1">
+                <a:solidFill>
+                  <a:srgbClr val="1E293B"/>
+                </a:solidFill>
+                <a:latin typeface="Calibri"/>
+              </a:rPr>
+              <a:t>Повний</a:t>
+            </a:r>
+            <a:r>
+              <a:rPr sz="1200" b="0" i="0" dirty="0">
+                <a:solidFill>
+                  <a:srgbClr val="1E293B"/>
+                </a:solidFill>
+                <a:latin typeface="Calibri"/>
+              </a:rPr>
+              <a:t> </a:t>
+            </a:r>
+            <a:r>
+              <a:rPr sz="1200" b="0" i="0" dirty="0" err="1">
+                <a:solidFill>
+                  <a:srgbClr val="1E293B"/>
+                </a:solidFill>
+                <a:latin typeface="Calibri"/>
+              </a:rPr>
+              <a:t>цикл</a:t>
+            </a:r>
+            <a:r>
+              <a:rPr sz="1200" b="0" i="0" dirty="0">
+                <a:solidFill>
+                  <a:srgbClr val="1E293B"/>
+                </a:solidFill>
+                <a:latin typeface="Calibri"/>
+              </a:rPr>
+              <a:t> TSP + VRP </a:t>
+            </a:r>
+            <a:r>
+              <a:rPr sz="1200" b="0" i="0" dirty="0" err="1">
+                <a:solidFill>
+                  <a:srgbClr val="1E293B"/>
+                </a:solidFill>
+                <a:latin typeface="Calibri"/>
+              </a:rPr>
+              <a:t>на</a:t>
+            </a:r>
+            <a:r>
+              <a:rPr sz="1200" b="0" i="0" dirty="0">
+                <a:solidFill>
+                  <a:srgbClr val="1E293B"/>
+                </a:solidFill>
+                <a:latin typeface="Calibri"/>
+              </a:rPr>
+              <a:t> </a:t>
+            </a:r>
+            <a:r>
+              <a:rPr sz="1200" b="0" i="0" dirty="0" err="1">
+                <a:solidFill>
+                  <a:srgbClr val="1E293B"/>
+                </a:solidFill>
+                <a:latin typeface="Calibri"/>
+              </a:rPr>
+              <a:t>реальних</a:t>
+            </a:r>
+            <a:r>
+              <a:rPr sz="1200" b="0" i="0" dirty="0">
+                <a:solidFill>
+                  <a:srgbClr val="1E293B"/>
+                </a:solidFill>
+                <a:latin typeface="Calibri"/>
+              </a:rPr>
+              <a:t> </a:t>
+            </a:r>
+            <a:r>
+              <a:rPr sz="1200" b="0" i="0" dirty="0" err="1">
+                <a:solidFill>
+                  <a:srgbClr val="1E293B"/>
+                </a:solidFill>
+                <a:latin typeface="Calibri"/>
+              </a:rPr>
+              <a:t>адресах</a:t>
+            </a:r>
+            <a:r>
+              <a:rPr sz="1200" b="0" i="0" dirty="0">
+                <a:solidFill>
+                  <a:srgbClr val="1E293B"/>
+                </a:solidFill>
+                <a:latin typeface="Calibri"/>
+              </a:rPr>
+              <a:t> м. </a:t>
+            </a:r>
+            <a:r>
+              <a:rPr sz="1200" b="0" i="0" dirty="0" err="1">
+                <a:solidFill>
+                  <a:srgbClr val="1E293B"/>
+                </a:solidFill>
+                <a:latin typeface="Calibri"/>
+              </a:rPr>
+              <a:t>Дніпро</a:t>
+            </a:r>
+            <a:r>
+              <a:rPr sz="1200" b="0" i="0" dirty="0">
+                <a:solidFill>
+                  <a:srgbClr val="1E293B"/>
+                </a:solidFill>
+                <a:latin typeface="Calibri"/>
+              </a:rPr>
+              <a:t>. </a:t>
+            </a:r>
+            <a:r>
+              <a:rPr sz="1200" b="0" i="0" dirty="0" err="1">
+                <a:solidFill>
+                  <a:srgbClr val="1E293B"/>
+                </a:solidFill>
+                <a:latin typeface="Calibri"/>
+              </a:rPr>
+              <a:t>Сценарії</a:t>
+            </a:r>
+            <a:r>
+              <a:rPr sz="1200" b="0" i="0" dirty="0">
+                <a:solidFill>
+                  <a:srgbClr val="1E293B"/>
+                </a:solidFill>
+                <a:latin typeface="Calibri"/>
+              </a:rPr>
+              <a:t> 5–50 </a:t>
+            </a:r>
+            <a:r>
+              <a:rPr sz="1200" b="0" i="0" dirty="0" err="1">
+                <a:solidFill>
+                  <a:srgbClr val="1E293B"/>
+                </a:solidFill>
+                <a:latin typeface="Calibri"/>
+              </a:rPr>
+              <a:t>замовлень</a:t>
+            </a:r>
+            <a:endParaRPr sz="1200" b="0" i="0" dirty="0">
+              <a:solidFill>
+                <a:srgbClr val="1E293B"/>
+              </a:solidFill>
+              <a:latin typeface="Calibri"/>
+            </a:endParaRPr>
           </a:p>
         </p:txBody>
       </p:sp>
@@ -9039,8 +9786,8 @@
         </p:nvSpPr>
         <p:spPr>
           <a:xfrm>
-            <a:off x="3566160" y="3163824"/>
-            <a:ext cx="4892040" cy="457200"/>
+            <a:off x="3241550" y="3210377"/>
+            <a:ext cx="4892040" cy="276999"/>
           </a:xfrm>
           <a:prstGeom prst="rect">
             <a:avLst/>
@@ -9055,13 +9802,112 @@
           <a:p>
             <a:pPr algn="l"/>
             <a:r>
-              <a:rPr sz="1050" b="0" i="0">
-                <a:solidFill>
-                  <a:srgbClr val="1E293B"/>
-                </a:solidFill>
-                <a:latin typeface="Calibri"/>
-              </a:rPr>
-              <a:t>Відповідність діаграмі прецедентів та математичній моделі CVRPTW</a:t>
+              <a:rPr sz="1200" b="0" i="0" dirty="0" err="1">
+                <a:solidFill>
+                  <a:srgbClr val="1E293B"/>
+                </a:solidFill>
+                <a:latin typeface="Calibri"/>
+              </a:rPr>
+              <a:t>Відповідність</a:t>
+            </a:r>
+            <a:r>
+              <a:rPr sz="1200" b="0" i="0" dirty="0">
+                <a:solidFill>
+                  <a:srgbClr val="1E293B"/>
+                </a:solidFill>
+                <a:latin typeface="Calibri"/>
+              </a:rPr>
+              <a:t> </a:t>
+            </a:r>
+            <a:r>
+              <a:rPr sz="1200" b="0" i="0" dirty="0" err="1">
+                <a:solidFill>
+                  <a:srgbClr val="1E293B"/>
+                </a:solidFill>
+                <a:latin typeface="Calibri"/>
+              </a:rPr>
+              <a:t>діаграмі</a:t>
+            </a:r>
+            <a:r>
+              <a:rPr sz="1200" b="0" i="0" dirty="0">
+                <a:solidFill>
+                  <a:srgbClr val="1E293B"/>
+                </a:solidFill>
+                <a:latin typeface="Calibri"/>
+              </a:rPr>
+              <a:t> </a:t>
+            </a:r>
+            <a:r>
+              <a:rPr sz="1200" b="0" i="0" dirty="0" err="1">
+                <a:solidFill>
+                  <a:srgbClr val="1E293B"/>
+                </a:solidFill>
+                <a:latin typeface="Calibri"/>
+              </a:rPr>
+              <a:t>прецедентів</a:t>
+            </a:r>
+            <a:r>
+              <a:rPr sz="1200" b="0" i="0" dirty="0">
+                <a:solidFill>
+                  <a:srgbClr val="1E293B"/>
+                </a:solidFill>
+                <a:latin typeface="Calibri"/>
+              </a:rPr>
+              <a:t> </a:t>
+            </a:r>
+            <a:r>
+              <a:rPr sz="1200" b="0" i="0" dirty="0" err="1">
+                <a:solidFill>
+                  <a:srgbClr val="1E293B"/>
+                </a:solidFill>
+                <a:latin typeface="Calibri"/>
+              </a:rPr>
+              <a:t>та</a:t>
+            </a:r>
+            <a:r>
+              <a:rPr sz="1200" b="0" i="0" dirty="0">
+                <a:solidFill>
+                  <a:srgbClr val="1E293B"/>
+                </a:solidFill>
+                <a:latin typeface="Calibri"/>
+              </a:rPr>
+              <a:t> </a:t>
+            </a:r>
+            <a:r>
+              <a:rPr sz="1200" b="0" i="0" dirty="0" err="1">
+                <a:solidFill>
+                  <a:srgbClr val="1E293B"/>
+                </a:solidFill>
+                <a:latin typeface="Calibri"/>
+              </a:rPr>
+              <a:t>математичній</a:t>
+            </a:r>
+            <a:r>
+              <a:rPr sz="1200" b="0" i="0" dirty="0">
+                <a:solidFill>
+                  <a:srgbClr val="1E293B"/>
+                </a:solidFill>
+                <a:latin typeface="Calibri"/>
+              </a:rPr>
+              <a:t> </a:t>
+            </a:r>
+            <a:r>
+              <a:rPr sz="1200" b="0" i="0" dirty="0" err="1">
+                <a:solidFill>
+                  <a:srgbClr val="1E293B"/>
+                </a:solidFill>
+                <a:latin typeface="Calibri"/>
+              </a:rPr>
+              <a:t>моделі</a:t>
+            </a:r>
+            <a:r>
+              <a:rPr sz="1200" b="0" i="0" dirty="0">
+                <a:solidFill>
+                  <a:srgbClr val="1E293B"/>
+                </a:solidFill>
+                <a:latin typeface="Calibri"/>
+              </a:rPr>
+              <a:t> CVRPTW</a:t>
             </a:r>
           </a:p>
         </p:txBody>
@@ -9197,7 +10043,7 @@
         </p:nvSpPr>
         <p:spPr>
           <a:xfrm>
-            <a:off x="3566160" y="3877055"/>
+            <a:off x="3241550" y="3840479"/>
             <a:ext cx="4892040" cy="457200"/>
           </a:xfrm>
           <a:prstGeom prst="rect">
@@ -9213,7 +10059,7 @@
           <a:p>
             <a:pPr algn="l"/>
             <a:r>
-              <a:rPr sz="1050" b="0" i="0">
+              <a:rPr sz="1200" b="0" i="0">
                 <a:solidFill>
                   <a:srgbClr val="1E293B"/>
                 </a:solidFill>
@@ -9623,7 +10469,7 @@
         </p:nvSpPr>
         <p:spPr>
           <a:xfrm>
-            <a:off x="0" y="4023360"/>
+            <a:off x="0" y="4809744"/>
             <a:ext cx="9144000" cy="36576"/>
           </a:xfrm>
           <a:prstGeom prst="rect">
@@ -9792,7 +10638,7 @@
         </p:nvSpPr>
         <p:spPr>
           <a:xfrm>
-            <a:off x="1737360" y="1161288"/>
+            <a:off x="1005840" y="1181679"/>
             <a:ext cx="2286000" cy="347472"/>
           </a:xfrm>
           <a:prstGeom prst="rect">
@@ -9827,8 +10673,8 @@
         </p:nvSpPr>
         <p:spPr>
           <a:xfrm>
-            <a:off x="1737360" y="1508760"/>
-            <a:ext cx="6675120" cy="502920"/>
+            <a:off x="1005840" y="1529151"/>
+            <a:ext cx="6675120" cy="276999"/>
           </a:xfrm>
           <a:prstGeom prst="rect">
             <a:avLst/>
@@ -9843,14 +10689,146 @@
           <a:p>
             <a:pPr algn="l"/>
             <a:r>
-              <a:rPr sz="1150" b="0" i="0">
-                <a:solidFill>
-                  <a:srgbClr val="1E293B"/>
-                </a:solidFill>
-                <a:latin typeface="Calibri"/>
-              </a:rPr>
-              <a:t>Проблема розподілу та доставки вантажів у мультимодальній транспортній мережі</a:t>
-            </a:r>
+              <a:rPr sz="1200" b="0" i="0" dirty="0" err="1">
+                <a:solidFill>
+                  <a:srgbClr val="1E293B"/>
+                </a:solidFill>
+                <a:latin typeface="Calibri"/>
+              </a:rPr>
+              <a:t>Проблема</a:t>
+            </a:r>
+            <a:r>
+              <a:rPr sz="1200" b="0" i="0" dirty="0">
+                <a:solidFill>
+                  <a:srgbClr val="1E293B"/>
+                </a:solidFill>
+                <a:latin typeface="Calibri"/>
+              </a:rPr>
+              <a:t> </a:t>
+            </a:r>
+            <a:r>
+              <a:rPr sz="1200" b="0" i="0" dirty="0" err="1">
+                <a:solidFill>
+                  <a:srgbClr val="1E293B"/>
+                </a:solidFill>
+                <a:latin typeface="Calibri"/>
+              </a:rPr>
+              <a:t>розподілу</a:t>
+            </a:r>
+            <a:r>
+              <a:rPr sz="1200" b="0" i="0" dirty="0">
+                <a:solidFill>
+                  <a:srgbClr val="1E293B"/>
+                </a:solidFill>
+                <a:latin typeface="Calibri"/>
+              </a:rPr>
+              <a:t> </a:t>
+            </a:r>
+            <a:r>
+              <a:rPr sz="1200" b="0" i="0" dirty="0" err="1">
+                <a:solidFill>
+                  <a:srgbClr val="1E293B"/>
+                </a:solidFill>
+                <a:latin typeface="Calibri"/>
+              </a:rPr>
+              <a:t>та</a:t>
+            </a:r>
+            <a:r>
+              <a:rPr sz="1200" b="0" i="0" dirty="0">
+                <a:solidFill>
+                  <a:srgbClr val="1E293B"/>
+                </a:solidFill>
+                <a:latin typeface="Calibri"/>
+              </a:rPr>
+              <a:t> </a:t>
+            </a:r>
+            <a:r>
+              <a:rPr sz="1200" b="0" i="0" dirty="0" err="1">
+                <a:solidFill>
+                  <a:srgbClr val="1E293B"/>
+                </a:solidFill>
+                <a:latin typeface="Calibri"/>
+              </a:rPr>
+              <a:t>доставки</a:t>
+            </a:r>
+            <a:r>
+              <a:rPr sz="1200" b="0" i="0" dirty="0">
+                <a:solidFill>
+                  <a:srgbClr val="1E293B"/>
+                </a:solidFill>
+                <a:latin typeface="Calibri"/>
+              </a:rPr>
+              <a:t> </a:t>
+            </a:r>
+            <a:r>
+              <a:rPr sz="1200" b="0" i="0" dirty="0" err="1">
+                <a:solidFill>
+                  <a:srgbClr val="1E293B"/>
+                </a:solidFill>
+                <a:latin typeface="Calibri"/>
+              </a:rPr>
+              <a:t>вантажів</a:t>
+            </a:r>
+            <a:r>
+              <a:rPr sz="1200" b="0" i="0" dirty="0">
+                <a:solidFill>
+                  <a:srgbClr val="1E293B"/>
+                </a:solidFill>
+                <a:latin typeface="Calibri"/>
+              </a:rPr>
+              <a:t> у </a:t>
+            </a:r>
+            <a:r>
+              <a:rPr sz="1200" b="0" i="0" dirty="0" err="1">
+                <a:solidFill>
+                  <a:srgbClr val="1E293B"/>
+                </a:solidFill>
+                <a:latin typeface="Calibri"/>
+              </a:rPr>
+              <a:t>мультимодальній</a:t>
+            </a:r>
+            <a:r>
+              <a:rPr sz="1200" b="0" i="0" dirty="0">
+                <a:solidFill>
+                  <a:srgbClr val="1E293B"/>
+                </a:solidFill>
+                <a:latin typeface="Calibri"/>
+              </a:rPr>
+              <a:t> </a:t>
+            </a:r>
+            <a:r>
+              <a:rPr sz="1200" b="0" i="0" dirty="0" err="1">
+                <a:solidFill>
+                  <a:srgbClr val="1E293B"/>
+                </a:solidFill>
+                <a:latin typeface="Calibri"/>
+              </a:rPr>
+              <a:t>транспортній</a:t>
+            </a:r>
+            <a:r>
+              <a:rPr sz="1200" b="0" i="0" dirty="0">
+                <a:solidFill>
+                  <a:srgbClr val="1E293B"/>
+                </a:solidFill>
+                <a:latin typeface="Calibri"/>
+              </a:rPr>
+              <a:t> </a:t>
+            </a:r>
+            <a:r>
+              <a:rPr sz="1200" b="0" i="0" dirty="0" err="1">
+                <a:solidFill>
+                  <a:srgbClr val="1E293B"/>
+                </a:solidFill>
+                <a:latin typeface="Calibri"/>
+              </a:rPr>
+              <a:t>мережі</a:t>
+            </a:r>
+            <a:endParaRPr sz="1200" b="0" i="0" dirty="0">
+              <a:solidFill>
+                <a:srgbClr val="1E293B"/>
+              </a:solidFill>
+              <a:latin typeface="Calibri"/>
+            </a:endParaRPr>
           </a:p>
         </p:txBody>
       </p:sp>
@@ -9950,7 +10928,7 @@
         </p:nvSpPr>
         <p:spPr>
           <a:xfrm>
-            <a:off x="1737360" y="2212847"/>
+            <a:off x="1005840" y="2199159"/>
             <a:ext cx="2286000" cy="347472"/>
           </a:xfrm>
           <a:prstGeom prst="rect">
@@ -9985,8 +10963,8 @@
         </p:nvSpPr>
         <p:spPr>
           <a:xfrm>
-            <a:off x="1737360" y="2560320"/>
-            <a:ext cx="6675120" cy="269304"/>
+            <a:off x="1005840" y="2580409"/>
+            <a:ext cx="6675120" cy="276999"/>
           </a:xfrm>
           <a:prstGeom prst="rect">
             <a:avLst/>
@@ -10001,7 +10979,7 @@
           <a:p>
             <a:pPr algn="l"/>
             <a:r>
-              <a:rPr lang="ru-RU" sz="1150" b="0" i="0" dirty="0">
+              <a:rPr lang="ru-RU" sz="1200" b="0" i="0" dirty="0">
                 <a:solidFill>
                   <a:srgbClr val="1E293B"/>
                 </a:solidFill>
@@ -10010,7 +10988,7 @@
               <a:t>Математичні моделі та ев</a:t>
             </a:r>
             <a:r>
-              <a:rPr lang="uk-UA" sz="1150" b="0" i="0" dirty="0">
+              <a:rPr lang="uk-UA" sz="1200" b="0" i="0" dirty="0">
                 <a:solidFill>
                   <a:srgbClr val="1E293B"/>
                 </a:solidFill>
@@ -10019,7 +10997,7 @@
               <a:t>олюційн</a:t>
             </a:r>
             <a:r>
-              <a:rPr lang="ru-RU" sz="1150" b="0" i="0" dirty="0">
+              <a:rPr lang="ru-RU" sz="1200" b="0" i="0" dirty="0">
                 <a:solidFill>
                   <a:srgbClr val="1E293B"/>
                 </a:solidFill>
@@ -10126,7 +11104,7 @@
         </p:nvSpPr>
         <p:spPr>
           <a:xfrm>
-            <a:off x="1737360" y="3264408"/>
+            <a:off x="1005840" y="3247948"/>
             <a:ext cx="2286000" cy="347472"/>
           </a:xfrm>
           <a:prstGeom prst="rect">
@@ -10161,8 +11139,8 @@
         </p:nvSpPr>
         <p:spPr>
           <a:xfrm>
-            <a:off x="1737360" y="3611880"/>
-            <a:ext cx="6675120" cy="446276"/>
+            <a:off x="1005840" y="3595420"/>
+            <a:ext cx="6675120" cy="461665"/>
           </a:xfrm>
           <a:prstGeom prst="rect">
             <a:avLst/>
@@ -10177,7 +11155,7 @@
           <a:p>
             <a:pPr algn="l"/>
             <a:r>
-              <a:rPr sz="1150" b="0" i="0" dirty="0" err="1">
+              <a:rPr sz="1200" b="0" i="0" dirty="0" err="1">
                 <a:solidFill>
                   <a:srgbClr val="1E293B"/>
                 </a:solidFill>
@@ -10186,7 +11164,7 @@
               <a:t>Розробка</a:t>
             </a:r>
             <a:r>
-              <a:rPr sz="1150" b="0" i="0" dirty="0">
+              <a:rPr sz="1200" b="0" i="0" dirty="0">
                 <a:solidFill>
                   <a:srgbClr val="1E293B"/>
                 </a:solidFill>
@@ -10195,7 +11173,7 @@
               <a:t> </a:t>
             </a:r>
             <a:r>
-              <a:rPr sz="1150" b="0" i="0" dirty="0" err="1">
+              <a:rPr sz="1200" b="0" i="0" dirty="0" err="1">
                 <a:solidFill>
                   <a:srgbClr val="1E293B"/>
                 </a:solidFill>
@@ -10204,7 +11182,7 @@
               <a:t>та</a:t>
             </a:r>
             <a:r>
-              <a:rPr sz="1150" b="0" i="0" dirty="0">
+              <a:rPr sz="1200" b="0" i="0" dirty="0">
                 <a:solidFill>
                   <a:srgbClr val="1E293B"/>
                 </a:solidFill>
@@ -10213,7 +11191,7 @@
               <a:t> </a:t>
             </a:r>
             <a:r>
-              <a:rPr sz="1150" b="0" i="0" dirty="0" err="1">
+              <a:rPr sz="1200" b="0" i="0" dirty="0" err="1">
                 <a:solidFill>
                   <a:srgbClr val="1E293B"/>
                 </a:solidFill>
@@ -10222,7 +11200,7 @@
               <a:t>програмна</a:t>
             </a:r>
             <a:r>
-              <a:rPr sz="1150" b="0" i="0" dirty="0">
+              <a:rPr sz="1200" b="0" i="0" dirty="0">
                 <a:solidFill>
                   <a:srgbClr val="1E293B"/>
                 </a:solidFill>
@@ -10231,7 +11209,7 @@
               <a:t> </a:t>
             </a:r>
             <a:r>
-              <a:rPr sz="1150" b="0" i="0" dirty="0" err="1">
+              <a:rPr sz="1200" b="0" i="0" dirty="0" err="1">
                 <a:solidFill>
                   <a:srgbClr val="1E293B"/>
                 </a:solidFill>
@@ -10240,7 +11218,7 @@
               <a:t>реалізація</a:t>
             </a:r>
             <a:r>
-              <a:rPr sz="1150" b="0" i="0" dirty="0">
+              <a:rPr sz="1200" b="0" i="0" dirty="0">
                 <a:solidFill>
                   <a:srgbClr val="1E293B"/>
                 </a:solidFill>
@@ -10249,7 +11227,7 @@
               <a:t> </a:t>
             </a:r>
             <a:r>
-              <a:rPr sz="1150" b="0" i="0" dirty="0" err="1">
+              <a:rPr sz="1200" b="0" i="0" dirty="0" err="1">
                 <a:solidFill>
                   <a:srgbClr val="1E293B"/>
                 </a:solidFill>
@@ -10258,7 +11236,7 @@
               <a:t>алгоритму</a:t>
             </a:r>
             <a:r>
-              <a:rPr sz="1150" b="0" i="0" dirty="0">
+              <a:rPr sz="1200" b="0" i="0" dirty="0">
                 <a:solidFill>
                   <a:srgbClr val="1E293B"/>
                 </a:solidFill>
@@ -10267,7 +11245,7 @@
               <a:t> </a:t>
             </a:r>
             <a:r>
-              <a:rPr sz="1150" b="0" i="0" dirty="0" err="1">
+              <a:rPr sz="1200" b="0" i="0" dirty="0" err="1">
                 <a:solidFill>
                   <a:srgbClr val="1E293B"/>
                 </a:solidFill>
@@ -10276,7 +11254,7 @@
               <a:t>оптимізації</a:t>
             </a:r>
             <a:r>
-              <a:rPr sz="1150" b="0" i="0" dirty="0">
+              <a:rPr sz="1200" b="0" i="0" dirty="0">
                 <a:solidFill>
                   <a:srgbClr val="1E293B"/>
                 </a:solidFill>
@@ -10285,7 +11263,7 @@
               <a:t> </a:t>
             </a:r>
             <a:r>
-              <a:rPr sz="1150" b="0" i="0" dirty="0" err="1">
+              <a:rPr sz="1200" b="0" i="0" dirty="0" err="1">
                 <a:solidFill>
                   <a:srgbClr val="1E293B"/>
                 </a:solidFill>
@@ -10294,7 +11272,7 @@
               <a:t>маршрутів</a:t>
             </a:r>
             <a:r>
-              <a:rPr sz="1150" b="0" i="0" dirty="0">
+              <a:rPr sz="1200" b="0" i="0" dirty="0">
                 <a:solidFill>
                   <a:srgbClr val="1E293B"/>
                 </a:solidFill>
@@ -10303,7 +11281,7 @@
               <a:t> </a:t>
             </a:r>
             <a:r>
-              <a:rPr sz="1150" b="0" i="0" dirty="0" err="1">
+              <a:rPr sz="1200" b="0" i="0" dirty="0" err="1">
                 <a:solidFill>
                   <a:srgbClr val="1E293B"/>
                 </a:solidFill>
@@ -10312,7 +11290,7 @@
               <a:t>доставки</a:t>
             </a:r>
             <a:r>
-              <a:rPr sz="1150" b="0" i="0" dirty="0">
+              <a:rPr sz="1200" b="0" i="0" dirty="0">
                 <a:solidFill>
                   <a:srgbClr val="1E293B"/>
                 </a:solidFill>
@@ -10321,7 +11299,7 @@
               <a:t> </a:t>
             </a:r>
             <a:r>
-              <a:rPr sz="1150" b="0" i="0" dirty="0" err="1">
+              <a:rPr sz="1200" b="0" i="0" dirty="0" err="1">
                 <a:solidFill>
                   <a:srgbClr val="1E293B"/>
                 </a:solidFill>
@@ -10330,7 +11308,7 @@
               <a:t>для</a:t>
             </a:r>
             <a:r>
-              <a:rPr sz="1150" b="0" i="0" dirty="0">
+              <a:rPr sz="1200" b="0" i="0" dirty="0">
                 <a:solidFill>
                   <a:srgbClr val="1E293B"/>
                 </a:solidFill>
@@ -10339,7 +11317,7 @@
               <a:t> </a:t>
             </a:r>
             <a:r>
-              <a:rPr sz="1150" b="0" i="0" dirty="0" err="1">
+              <a:rPr sz="1200" b="0" i="0" dirty="0" err="1">
                 <a:solidFill>
                   <a:srgbClr val="1E293B"/>
                 </a:solidFill>
@@ -10348,7 +11326,7 @@
               <a:t>мінімізації</a:t>
             </a:r>
             <a:r>
-              <a:rPr sz="1150" b="0" i="0" dirty="0">
+              <a:rPr sz="1200" b="0" i="0" dirty="0">
                 <a:solidFill>
                   <a:srgbClr val="1E293B"/>
                 </a:solidFill>
@@ -10357,7 +11335,7 @@
               <a:t> </a:t>
             </a:r>
             <a:r>
-              <a:rPr sz="1150" b="0" i="0" dirty="0" err="1">
+              <a:rPr sz="1200" b="0" i="0" dirty="0" err="1">
                 <a:solidFill>
                   <a:srgbClr val="1E293B"/>
                 </a:solidFill>
@@ -10366,7 +11344,7 @@
               <a:t>сумарного</a:t>
             </a:r>
             <a:r>
-              <a:rPr sz="1150" b="0" i="0" dirty="0">
+              <a:rPr sz="1200" b="0" i="0" dirty="0">
                 <a:solidFill>
                   <a:srgbClr val="1E293B"/>
                 </a:solidFill>
@@ -10375,7 +11353,7 @@
               <a:t> </a:t>
             </a:r>
             <a:r>
-              <a:rPr sz="1150" b="0" i="0" dirty="0" err="1">
+              <a:rPr sz="1200" b="0" i="0" dirty="0" err="1">
                 <a:solidFill>
                   <a:srgbClr val="1E293B"/>
                 </a:solidFill>
@@ -10384,7 +11362,7 @@
               <a:t>часу</a:t>
             </a:r>
             <a:r>
-              <a:rPr sz="1150" b="0" i="0" dirty="0">
+              <a:rPr sz="1200" b="0" i="0" dirty="0">
                 <a:solidFill>
                   <a:srgbClr val="1E293B"/>
                 </a:solidFill>
@@ -10393,7 +11371,7 @@
               <a:t> </a:t>
             </a:r>
             <a:r>
-              <a:rPr sz="1150" b="0" i="0" dirty="0" err="1">
+              <a:rPr sz="1200" b="0" i="0" dirty="0" err="1">
                 <a:solidFill>
                   <a:srgbClr val="1E293B"/>
                 </a:solidFill>
@@ -10402,7 +11380,7 @@
               <a:t>переїздів</a:t>
             </a:r>
             <a:r>
-              <a:rPr sz="1150" b="0" i="0" dirty="0">
+              <a:rPr sz="1200" b="0" i="0" dirty="0">
                 <a:solidFill>
                   <a:srgbClr val="1E293B"/>
                 </a:solidFill>
@@ -10411,7 +11389,7 @@
               <a:t> </a:t>
             </a:r>
             <a:r>
-              <a:rPr sz="1150" b="0" i="0" dirty="0" err="1">
+              <a:rPr sz="1200" b="0" i="0" dirty="0" err="1">
                 <a:solidFill>
                   <a:srgbClr val="1E293B"/>
                 </a:solidFill>
@@ -10420,7 +11398,7 @@
               <a:t>та</a:t>
             </a:r>
             <a:r>
-              <a:rPr sz="1150" b="0" i="0" dirty="0">
+              <a:rPr sz="1200" b="0" i="0" dirty="0">
                 <a:solidFill>
                   <a:srgbClr val="1E293B"/>
                 </a:solidFill>
@@ -10429,7 +11407,7 @@
               <a:t> </a:t>
             </a:r>
             <a:r>
-              <a:rPr sz="1150" b="0" i="0" dirty="0" err="1">
+              <a:rPr sz="1200" b="0" i="0" dirty="0" err="1">
                 <a:solidFill>
                   <a:srgbClr val="1E293B"/>
                 </a:solidFill>
@@ -10438,7 +11416,7 @@
               <a:t>кількості</a:t>
             </a:r>
             <a:r>
-              <a:rPr sz="1150" b="0" i="0" dirty="0">
+              <a:rPr sz="1200" b="0" i="0" dirty="0">
                 <a:solidFill>
                   <a:srgbClr val="1E293B"/>
                 </a:solidFill>
@@ -10447,7 +11425,7 @@
               <a:t> </a:t>
             </a:r>
             <a:r>
-              <a:rPr sz="1150" b="0" i="0" dirty="0" err="1">
+              <a:rPr sz="1200" b="0" i="0" dirty="0" err="1">
                 <a:solidFill>
                   <a:srgbClr val="1E293B"/>
                 </a:solidFill>
@@ -10456,7 +11434,7 @@
               <a:t>задіяних</a:t>
             </a:r>
             <a:r>
-              <a:rPr lang="uk-UA" sz="1150" dirty="0">
+              <a:rPr lang="uk-UA" sz="1200" dirty="0">
                 <a:solidFill>
                   <a:srgbClr val="1E293B"/>
                 </a:solidFill>
@@ -10464,7 +11442,7 @@
               </a:rPr>
               <a:t> транспортних засобів</a:t>
             </a:r>
-            <a:endParaRPr sz="1150" b="0" i="0" dirty="0">
+            <a:endParaRPr sz="1200" b="0" i="0" dirty="0">
               <a:solidFill>
                 <a:srgbClr val="1E293B"/>
               </a:solidFill>
@@ -10481,7 +11459,7 @@
         </p:nvSpPr>
         <p:spPr>
           <a:xfrm>
-            <a:off x="548640" y="4846320"/>
+            <a:off x="283187" y="4846320"/>
             <a:ext cx="2743200" cy="256032"/>
           </a:xfrm>
           <a:prstGeom prst="rect">
@@ -10525,7 +11503,7 @@
         </p:nvSpPr>
         <p:spPr>
           <a:xfrm>
-            <a:off x="548640" y="4846320"/>
+            <a:off x="292608" y="4846320"/>
             <a:ext cx="2743200" cy="256032"/>
           </a:xfrm>
           <a:prstGeom prst="rect">
@@ -10541,14 +11519,38 @@
           <a:p>
             <a:pPr algn="ctr"/>
             <a:r>
-              <a:rPr sz="900" b="0" i="0">
+              <a:rPr sz="900" b="0" i="0" dirty="0" err="1">
                 <a:solidFill>
                   <a:srgbClr val="FFFFFF"/>
                 </a:solidFill>
                 <a:latin typeface="Calibri"/>
               </a:rPr>
-              <a:t>Теорія графів</a:t>
-            </a:r>
+              <a:t>Теорія</a:t>
+            </a:r>
+            <a:r>
+              <a:rPr sz="900" b="0" i="0" dirty="0">
+                <a:solidFill>
+                  <a:srgbClr val="FFFFFF"/>
+                </a:solidFill>
+                <a:latin typeface="Calibri"/>
+              </a:rPr>
+              <a:t> </a:t>
+            </a:r>
+            <a:r>
+              <a:rPr sz="900" b="0" i="0" dirty="0" err="1">
+                <a:solidFill>
+                  <a:srgbClr val="FFFFFF"/>
+                </a:solidFill>
+                <a:latin typeface="Calibri"/>
+              </a:rPr>
+              <a:t>графів</a:t>
+            </a:r>
+            <a:endParaRPr sz="900" b="0" i="0" dirty="0">
+              <a:solidFill>
+                <a:srgbClr val="FFFFFF"/>
+              </a:solidFill>
+              <a:latin typeface="Calibri"/>
+            </a:endParaRPr>
           </a:p>
         </p:txBody>
       </p:sp>
@@ -10560,7 +11562,7 @@
         </p:nvSpPr>
         <p:spPr>
           <a:xfrm>
-            <a:off x="3474720" y="4846320"/>
+            <a:off x="3310128" y="4846320"/>
             <a:ext cx="2743200" cy="256032"/>
           </a:xfrm>
           <a:prstGeom prst="rect">
@@ -10604,7 +11606,7 @@
         </p:nvSpPr>
         <p:spPr>
           <a:xfrm>
-            <a:off x="3474720" y="4846320"/>
+            <a:off x="3310128" y="4846320"/>
             <a:ext cx="2743200" cy="256032"/>
           </a:xfrm>
           <a:prstGeom prst="rect">
@@ -10620,14 +11622,38 @@
           <a:p>
             <a:pPr algn="ctr"/>
             <a:r>
-              <a:rPr sz="900" b="0" i="0">
+              <a:rPr sz="900" b="0" i="0" dirty="0" err="1">
                 <a:solidFill>
                   <a:srgbClr val="FFFFFF"/>
                 </a:solidFill>
                 <a:latin typeface="Calibri"/>
               </a:rPr>
-              <a:t>Математичне моделювання</a:t>
-            </a:r>
+              <a:t>Математичне</a:t>
+            </a:r>
+            <a:r>
+              <a:rPr sz="900" b="0" i="0" dirty="0">
+                <a:solidFill>
+                  <a:srgbClr val="FFFFFF"/>
+                </a:solidFill>
+                <a:latin typeface="Calibri"/>
+              </a:rPr>
+              <a:t> </a:t>
+            </a:r>
+            <a:r>
+              <a:rPr sz="900" b="0" i="0" dirty="0" err="1">
+                <a:solidFill>
+                  <a:srgbClr val="FFFFFF"/>
+                </a:solidFill>
+                <a:latin typeface="Calibri"/>
+              </a:rPr>
+              <a:t>моделювання</a:t>
+            </a:r>
+            <a:endParaRPr sz="900" b="0" i="0" dirty="0">
+              <a:solidFill>
+                <a:srgbClr val="FFFFFF"/>
+              </a:solidFill>
+              <a:latin typeface="Calibri"/>
+            </a:endParaRPr>
           </a:p>
         </p:txBody>
       </p:sp>
@@ -10639,7 +11665,7 @@
         </p:nvSpPr>
         <p:spPr>
           <a:xfrm>
-            <a:off x="6400800" y="4846320"/>
+            <a:off x="6302987" y="4846320"/>
             <a:ext cx="2743200" cy="256032"/>
           </a:xfrm>
           <a:prstGeom prst="rect">
@@ -10683,7 +11709,7 @@
         </p:nvSpPr>
         <p:spPr>
           <a:xfrm>
-            <a:off x="6400800" y="4846320"/>
+            <a:off x="6302987" y="4846320"/>
             <a:ext cx="2743200" cy="256032"/>
           </a:xfrm>
           <a:prstGeom prst="rect">
@@ -11559,7 +12585,7 @@
         </p:nvSpPr>
         <p:spPr>
           <a:xfrm>
-            <a:off x="0" y="4023360"/>
+            <a:off x="0" y="4585716"/>
             <a:ext cx="9144000" cy="36576"/>
           </a:xfrm>
           <a:prstGeom prst="rect">
@@ -13748,6 +14774,58 @@
           </a:p>
         </p:txBody>
       </p:sp>
+      <p:sp>
+        <p:nvSpPr>
+          <p:cNvPr id="20" name="Rectangle 19">
+            <a:extLst>
+              <a:ext uri="{FF2B5EF4-FFF2-40B4-BE49-F238E27FC236}">
+                <a16:creationId xmlns:a16="http://schemas.microsoft.com/office/drawing/2014/main" id="{6A078F29-A7C2-B3E8-4117-BAA30B745EF3}"/>
+              </a:ext>
+            </a:extLst>
+          </p:cNvPr>
+          <p:cNvSpPr/>
+          <p:nvPr/>
+        </p:nvSpPr>
+        <p:spPr>
+          <a:xfrm>
+            <a:off x="0" y="4289367"/>
+            <a:ext cx="9144000" cy="36576"/>
+          </a:xfrm>
+          <a:prstGeom prst="rect">
+            <a:avLst/>
+          </a:prstGeom>
+          <a:solidFill>
+            <a:srgbClr val="1C7293">
+              <a:alpha val="50000"/>
+            </a:srgbClr>
+          </a:solidFill>
+          <a:ln>
+            <a:noFill/>
+          </a:ln>
+        </p:spPr>
+        <p:style>
+          <a:lnRef idx="1">
+            <a:schemeClr val="accent1"/>
+          </a:lnRef>
+          <a:fillRef idx="3">
+            <a:schemeClr val="accent1"/>
+          </a:fillRef>
+          <a:effectRef idx="2">
+            <a:schemeClr val="accent1"/>
+          </a:effectRef>
+          <a:fontRef idx="minor">
+            <a:schemeClr val="lt1"/>
+          </a:fontRef>
+        </p:style>
+        <p:txBody>
+          <a:bodyPr rtlCol="0" anchor="ctr"/>
+          <a:lstStyle/>
+          <a:p>
+            <a:pPr algn="ctr"/>
+            <a:endParaRPr/>
+          </a:p>
+        </p:txBody>
+      </p:sp>
     </p:spTree>
   </p:cSld>
   <p:clrMapOvr>
@@ -14061,8 +15139,8 @@
         </p:nvSpPr>
         <p:spPr>
           <a:xfrm>
-            <a:off x="681643" y="2362715"/>
-            <a:ext cx="2431473" cy="577081"/>
+            <a:off x="675269" y="2126273"/>
+            <a:ext cx="2431473" cy="1169551"/>
           </a:xfrm>
           <a:prstGeom prst="rect">
             <a:avLst/>
@@ -14076,7 +15154,7 @@
           <a:lstStyle/>
           <a:p>
             <a:r>
-              <a:rPr sz="1050" b="0" i="0" dirty="0" err="1">
+              <a:rPr sz="1400" b="0" i="0" dirty="0" err="1">
                 <a:solidFill>
                   <a:srgbClr val="1E293B"/>
                 </a:solidFill>
@@ -14085,7 +15163,7 @@
               <a:t>Витрати</a:t>
             </a:r>
             <a:r>
-              <a:rPr sz="1050" b="0" i="0" dirty="0">
+              <a:rPr sz="1400" b="0" i="0" dirty="0">
                 <a:solidFill>
                   <a:srgbClr val="1E293B"/>
                 </a:solidFill>
@@ -14094,7 +15172,7 @@
               <a:t> </a:t>
             </a:r>
             <a:r>
-              <a:rPr sz="1050" b="0" i="0" dirty="0" err="1">
+              <a:rPr sz="1400" b="0" i="0" dirty="0" err="1">
                 <a:solidFill>
                   <a:srgbClr val="1E293B"/>
                 </a:solidFill>
@@ -14103,7 +15181,7 @@
               <a:t>на</a:t>
             </a:r>
             <a:r>
-              <a:rPr sz="1050" b="0" i="0" dirty="0">
+              <a:rPr sz="1400" b="0" i="0" dirty="0">
                 <a:solidFill>
                   <a:srgbClr val="1E293B"/>
                 </a:solidFill>
@@ -14112,7 +15190,7 @@
               <a:t> </a:t>
             </a:r>
             <a:r>
-              <a:rPr sz="1050" b="0" i="0" dirty="0" err="1">
+              <a:rPr sz="1400" b="0" i="0" dirty="0" err="1">
                 <a:solidFill>
                   <a:srgbClr val="1E293B"/>
                 </a:solidFill>
@@ -14121,7 +15199,7 @@
               <a:t>логістику</a:t>
             </a:r>
             <a:r>
-              <a:rPr sz="1050" b="0" i="0" dirty="0">
+              <a:rPr sz="1400" b="0" i="0" dirty="0">
                 <a:solidFill>
                   <a:srgbClr val="1E293B"/>
                 </a:solidFill>
@@ -14130,7 +15208,7 @@
               <a:t> — </a:t>
             </a:r>
             <a:r>
-              <a:rPr sz="1050" b="0" i="0" dirty="0" err="1">
+              <a:rPr sz="1400" b="0" i="0" dirty="0" err="1">
                 <a:solidFill>
                   <a:srgbClr val="1E293B"/>
                 </a:solidFill>
@@ -14139,7 +15217,7 @@
               <a:t>до</a:t>
             </a:r>
             <a:r>
-              <a:rPr sz="1050" b="0" i="0" dirty="0">
+              <a:rPr sz="1400" b="0" i="0" dirty="0">
                 <a:solidFill>
                   <a:srgbClr val="1E293B"/>
                 </a:solidFill>
@@ -14148,7 +15226,7 @@
               <a:t> 17% </a:t>
             </a:r>
             <a:r>
-              <a:rPr sz="1050" b="0" i="0" dirty="0" err="1">
+              <a:rPr sz="1400" b="0" i="0" dirty="0" err="1">
                 <a:solidFill>
                   <a:srgbClr val="1E293B"/>
                 </a:solidFill>
@@ -14157,7 +15235,7 @@
               <a:t>вартості</a:t>
             </a:r>
             <a:r>
-              <a:rPr sz="1050" b="0" i="0" dirty="0">
+              <a:rPr sz="1400" b="0" i="0" dirty="0">
                 <a:solidFill>
                   <a:srgbClr val="1E293B"/>
                 </a:solidFill>
@@ -14166,7 +15244,7 @@
               <a:t> </a:t>
             </a:r>
             <a:r>
-              <a:rPr sz="1050" b="0" i="0" dirty="0" err="1">
+              <a:rPr sz="1400" b="0" i="0" dirty="0" err="1">
                 <a:solidFill>
                   <a:srgbClr val="1E293B"/>
                 </a:solidFill>
@@ -14175,7 +15253,7 @@
               <a:t>доставки</a:t>
             </a:r>
             <a:r>
-              <a:rPr sz="1050" b="0" i="0" dirty="0">
+              <a:rPr sz="1400" b="0" i="0" dirty="0">
                 <a:solidFill>
                   <a:srgbClr val="1E293B"/>
                 </a:solidFill>
@@ -14184,7 +15262,7 @@
               <a:t>. </a:t>
             </a:r>
             <a:r>
-              <a:rPr sz="1050" b="0" i="0" dirty="0" err="1">
+              <a:rPr sz="1400" b="0" i="0" dirty="0" err="1">
                 <a:solidFill>
                   <a:srgbClr val="1E293B"/>
                 </a:solidFill>
@@ -14193,7 +15271,7 @@
               <a:t>Оптимізація</a:t>
             </a:r>
             <a:r>
-              <a:rPr sz="1050" b="0" i="0" dirty="0">
+              <a:rPr sz="1400" b="0" i="0" dirty="0">
                 <a:solidFill>
                   <a:srgbClr val="1E293B"/>
                 </a:solidFill>
@@ -14202,7 +15280,7 @@
               <a:t> </a:t>
             </a:r>
             <a:r>
-              <a:rPr sz="1050" b="0" i="0" dirty="0" err="1">
+              <a:rPr sz="1400" b="0" i="0" dirty="0" err="1">
                 <a:solidFill>
                   <a:srgbClr val="1E293B"/>
                 </a:solidFill>
@@ -14211,7 +15289,7 @@
               <a:t>маршрутів</a:t>
             </a:r>
             <a:r>
-              <a:rPr sz="1050" b="0" i="0" dirty="0">
+              <a:rPr sz="1400" b="0" i="0" dirty="0">
                 <a:solidFill>
                   <a:srgbClr val="1E293B"/>
                 </a:solidFill>
@@ -14220,7 +15298,7 @@
               <a:t> </a:t>
             </a:r>
             <a:r>
-              <a:rPr sz="1050" b="0" i="0" dirty="0" err="1">
+              <a:rPr sz="1400" b="0" i="0" dirty="0" err="1">
                 <a:solidFill>
                   <a:srgbClr val="1E293B"/>
                 </a:solidFill>
@@ -14229,7 +15307,7 @@
               <a:t>дає</a:t>
             </a:r>
             <a:r>
-              <a:rPr sz="1050" b="0" i="0" dirty="0">
+              <a:rPr sz="1400" b="0" i="0" dirty="0">
                 <a:solidFill>
                   <a:srgbClr val="1E293B"/>
                 </a:solidFill>
@@ -14238,7 +15316,7 @@
               <a:t> </a:t>
             </a:r>
             <a:r>
-              <a:rPr sz="1050" b="0" i="0" dirty="0" err="1">
+              <a:rPr sz="1400" b="0" i="0" dirty="0" err="1">
                 <a:solidFill>
                   <a:srgbClr val="1E293B"/>
                 </a:solidFill>
@@ -14247,7 +15325,7 @@
               <a:t>значну</a:t>
             </a:r>
             <a:r>
-              <a:rPr sz="1050" b="0" i="0" dirty="0">
+              <a:rPr sz="1400" b="0" i="0" dirty="0">
                 <a:solidFill>
                   <a:srgbClr val="1E293B"/>
                 </a:solidFill>
@@ -14256,7 +15334,7 @@
               <a:t> </a:t>
             </a:r>
             <a:r>
-              <a:rPr sz="1050" b="0" i="0" dirty="0" err="1">
+              <a:rPr sz="1400" b="0" i="0" dirty="0" err="1">
                 <a:solidFill>
                   <a:srgbClr val="1E293B"/>
                 </a:solidFill>
@@ -14265,7 +15343,7 @@
               <a:t>економію</a:t>
             </a:r>
             <a:r>
-              <a:rPr sz="1050" b="0" i="0" dirty="0">
+              <a:rPr sz="1400" b="0" i="0" dirty="0">
                 <a:solidFill>
                   <a:srgbClr val="1E293B"/>
                 </a:solidFill>
@@ -14274,7 +15352,7 @@
               <a:t> </a:t>
             </a:r>
             <a:r>
-              <a:rPr sz="1050" b="0" i="0" dirty="0" err="1">
+              <a:rPr sz="1400" b="0" i="0" dirty="0" err="1">
                 <a:solidFill>
                   <a:srgbClr val="1E293B"/>
                 </a:solidFill>
@@ -14283,7 +15361,7 @@
               <a:t>палива</a:t>
             </a:r>
             <a:r>
-              <a:rPr sz="1050" b="0" i="0" dirty="0">
+              <a:rPr sz="1400" b="0" i="0" dirty="0">
                 <a:solidFill>
                   <a:srgbClr val="1E293B"/>
                 </a:solidFill>
@@ -14292,7 +15370,7 @@
               <a:t> </a:t>
             </a:r>
             <a:r>
-              <a:rPr sz="1050" b="0" i="0" dirty="0" err="1">
+              <a:rPr sz="1400" b="0" i="0" dirty="0" err="1">
                 <a:solidFill>
                   <a:srgbClr val="1E293B"/>
                 </a:solidFill>
@@ -14301,7 +15379,7 @@
               <a:t>та</a:t>
             </a:r>
             <a:r>
-              <a:rPr sz="1050" b="0" i="0" dirty="0">
+              <a:rPr sz="1400" b="0" i="0" dirty="0">
                 <a:solidFill>
                   <a:srgbClr val="1E293B"/>
                 </a:solidFill>
@@ -14310,7 +15388,7 @@
               <a:t> </a:t>
             </a:r>
             <a:r>
-              <a:rPr sz="1050" b="0" i="0" dirty="0" err="1">
+              <a:rPr sz="1400" b="0" i="0" dirty="0" err="1">
                 <a:solidFill>
                   <a:srgbClr val="1E293B"/>
                 </a:solidFill>
@@ -14319,7 +15397,7 @@
               <a:t>ресурсів</a:t>
             </a:r>
             <a:r>
-              <a:rPr sz="1050" b="0" i="0" dirty="0">
+              <a:rPr sz="1400" b="0" i="0" dirty="0">
                 <a:solidFill>
                   <a:srgbClr val="1E293B"/>
                 </a:solidFill>
@@ -14485,8 +15563,8 @@
         </p:nvSpPr>
         <p:spPr>
           <a:xfrm>
-            <a:off x="3727981" y="2279360"/>
-            <a:ext cx="2190958" cy="738664"/>
+            <a:off x="3704152" y="2088658"/>
+            <a:ext cx="2190958" cy="1169551"/>
           </a:xfrm>
           <a:prstGeom prst="rect">
             <a:avLst/>
@@ -14501,7 +15579,7 @@
           <a:p>
             <a:pPr algn="l"/>
             <a:r>
-              <a:rPr sz="1050" b="0" i="0" dirty="0" err="1">
+              <a:rPr sz="1400" b="0" i="0" dirty="0" err="1">
                 <a:solidFill>
                   <a:srgbClr val="1E293B"/>
                 </a:solidFill>
@@ -14510,7 +15588,7 @@
               <a:t>Часові</a:t>
             </a:r>
             <a:r>
-              <a:rPr sz="1050" b="0" i="0" dirty="0">
+              <a:rPr sz="1400" b="0" i="0" dirty="0">
                 <a:solidFill>
                   <a:srgbClr val="1E293B"/>
                 </a:solidFill>
@@ -14519,7 +15597,7 @@
               <a:t> </a:t>
             </a:r>
             <a:r>
-              <a:rPr sz="1050" b="0" i="0" dirty="0" err="1">
+              <a:rPr sz="1400" b="0" i="0" dirty="0" err="1">
                 <a:solidFill>
                   <a:srgbClr val="1E293B"/>
                 </a:solidFill>
@@ -14528,7 +15606,7 @@
               <a:t>вікна</a:t>
             </a:r>
             <a:r>
-              <a:rPr sz="1050" b="0" i="0" dirty="0">
+              <a:rPr sz="1400" b="0" i="0" dirty="0">
                 <a:solidFill>
                   <a:srgbClr val="1E293B"/>
                 </a:solidFill>
@@ -14537,7 +15615,7 @@
               <a:t> (VRPTW), </a:t>
             </a:r>
             <a:r>
-              <a:rPr sz="1050" b="0" i="0" dirty="0" err="1">
+              <a:rPr sz="1400" b="0" i="0" dirty="0" err="1">
                 <a:solidFill>
                   <a:srgbClr val="1E293B"/>
                 </a:solidFill>
@@ -14546,7 +15624,7 @@
               <a:t>обмеження</a:t>
             </a:r>
             <a:r>
-              <a:rPr sz="1050" b="0" i="0" dirty="0">
+              <a:rPr sz="1400" b="0" i="0" dirty="0">
                 <a:solidFill>
                   <a:srgbClr val="1E293B"/>
                 </a:solidFill>
@@ -14555,7 +15633,7 @@
               <a:t> </a:t>
             </a:r>
             <a:r>
-              <a:rPr sz="1050" b="0" i="0" dirty="0" err="1">
+              <a:rPr sz="1400" b="0" i="0" dirty="0" err="1">
                 <a:solidFill>
                   <a:srgbClr val="1E293B"/>
                 </a:solidFill>
@@ -14564,7 +15642,7 @@
               <a:t>вантажності</a:t>
             </a:r>
             <a:r>
-              <a:rPr sz="1050" b="0" i="0" dirty="0">
+              <a:rPr sz="1400" b="0" i="0" dirty="0">
                 <a:solidFill>
                   <a:srgbClr val="1E293B"/>
                 </a:solidFill>
@@ -14573,7 +15651,7 @@
               <a:t>, </a:t>
             </a:r>
             <a:r>
-              <a:rPr sz="1050" b="0" i="0" dirty="0" err="1">
+              <a:rPr sz="1400" b="0" i="0" dirty="0" err="1">
                 <a:solidFill>
                   <a:srgbClr val="1E293B"/>
                 </a:solidFill>
@@ -14582,7 +15660,7 @@
               <a:t>затори</a:t>
             </a:r>
             <a:r>
-              <a:rPr sz="1050" b="0" i="0" dirty="0">
+              <a:rPr sz="1400" b="0" i="0" dirty="0">
                 <a:solidFill>
                   <a:srgbClr val="1E293B"/>
                 </a:solidFill>
@@ -14591,7 +15669,7 @@
               <a:t> — </a:t>
             </a:r>
             <a:r>
-              <a:rPr sz="1050" b="0" i="0" dirty="0" err="1">
+              <a:rPr sz="1400" b="0" i="0" dirty="0" err="1">
                 <a:solidFill>
                   <a:srgbClr val="1E293B"/>
                 </a:solidFill>
@@ -14600,7 +15678,7 @@
               <a:t>потрібна</a:t>
             </a:r>
             <a:r>
-              <a:rPr sz="1050" b="0" i="0" dirty="0">
+              <a:rPr sz="1400" b="0" i="0" dirty="0">
                 <a:solidFill>
                   <a:srgbClr val="1E293B"/>
                 </a:solidFill>
@@ -14609,7 +15687,7 @@
               <a:t> </a:t>
             </a:r>
             <a:r>
-              <a:rPr sz="1050" b="0" i="0" dirty="0" err="1">
+              <a:rPr sz="1400" b="0" i="0" dirty="0" err="1">
                 <a:solidFill>
                   <a:srgbClr val="1E293B"/>
                 </a:solidFill>
@@ -14618,7 +15696,7 @@
               <a:t>адаптивна</a:t>
             </a:r>
             <a:r>
-              <a:rPr sz="1050" b="0" i="0" dirty="0">
+              <a:rPr sz="1400" b="0" i="0" dirty="0">
                 <a:solidFill>
                   <a:srgbClr val="1E293B"/>
                 </a:solidFill>
@@ -14627,7 +15705,7 @@
               <a:t> </a:t>
             </a:r>
             <a:r>
-              <a:rPr sz="1050" b="0" i="0" dirty="0" err="1">
+              <a:rPr sz="1400" b="0" i="0" dirty="0" err="1">
                 <a:solidFill>
                   <a:srgbClr val="1E293B"/>
                 </a:solidFill>
@@ -14636,7 +15714,7 @@
               <a:t>система</a:t>
             </a:r>
             <a:r>
-              <a:rPr sz="1050" b="0" i="0" dirty="0">
+              <a:rPr sz="1400" b="0" i="0" dirty="0">
                 <a:solidFill>
                   <a:srgbClr val="1E293B"/>
                 </a:solidFill>
@@ -14645,7 +15723,7 @@
               <a:t> в </a:t>
             </a:r>
             <a:r>
-              <a:rPr sz="1050" b="0" i="0" dirty="0" err="1">
+              <a:rPr sz="1400" b="0" i="0" dirty="0" err="1">
                 <a:solidFill>
                   <a:srgbClr val="1E293B"/>
                 </a:solidFill>
@@ -14654,7 +15732,7 @@
               <a:t>реальному</a:t>
             </a:r>
             <a:r>
-              <a:rPr sz="1050" b="0" i="0" dirty="0">
+              <a:rPr sz="1400" b="0" i="0" dirty="0">
                 <a:solidFill>
                   <a:srgbClr val="1E293B"/>
                 </a:solidFill>
@@ -14663,7 +15741,7 @@
               <a:t> </a:t>
             </a:r>
             <a:r>
-              <a:rPr sz="1050" b="0" i="0" dirty="0" err="1">
+              <a:rPr sz="1400" b="0" i="0" dirty="0" err="1">
                 <a:solidFill>
                   <a:srgbClr val="1E293B"/>
                 </a:solidFill>
@@ -14672,7 +15750,7 @@
               <a:t>часі</a:t>
             </a:r>
             <a:r>
-              <a:rPr sz="1050" b="0" i="0" dirty="0">
+              <a:rPr sz="1400" b="0" i="0" dirty="0">
                 <a:solidFill>
                   <a:srgbClr val="1E293B"/>
                 </a:solidFill>
@@ -14814,8 +15892,8 @@
         </p:nvSpPr>
         <p:spPr>
           <a:xfrm>
-            <a:off x="6446520" y="2279360"/>
-            <a:ext cx="2514600" cy="577081"/>
+            <a:off x="6472566" y="2101413"/>
+            <a:ext cx="2514600" cy="1169551"/>
           </a:xfrm>
           <a:prstGeom prst="rect">
             <a:avLst/>
@@ -14830,7 +15908,7 @@
           <a:p>
             <a:pPr algn="l"/>
             <a:r>
-              <a:rPr sz="1050" b="0" i="0" dirty="0" err="1">
+              <a:rPr sz="1400" b="0" i="0" dirty="0" err="1">
                 <a:solidFill>
                   <a:srgbClr val="1E293B"/>
                 </a:solidFill>
@@ -14839,7 +15917,7 @@
               <a:t>Класичні</a:t>
             </a:r>
             <a:r>
-              <a:rPr sz="1050" b="0" i="0" dirty="0">
+              <a:rPr sz="1400" b="0" i="0" dirty="0">
                 <a:solidFill>
                   <a:srgbClr val="1E293B"/>
                 </a:solidFill>
@@ -14848,7 +15926,7 @@
               <a:t> </a:t>
             </a:r>
             <a:r>
-              <a:rPr sz="1050" b="0" i="0" dirty="0" err="1">
+              <a:rPr sz="1400" b="0" i="0" dirty="0" err="1">
                 <a:solidFill>
                   <a:srgbClr val="1E293B"/>
                 </a:solidFill>
@@ -14857,7 +15935,7 @@
               <a:t>евристики</a:t>
             </a:r>
             <a:r>
-              <a:rPr sz="1050" b="0" i="0" dirty="0">
+              <a:rPr sz="1400" b="0" i="0" dirty="0">
                 <a:solidFill>
                   <a:srgbClr val="1E293B"/>
                 </a:solidFill>
@@ -14866,7 +15944,7 @@
               <a:t> </a:t>
             </a:r>
             <a:r>
-              <a:rPr sz="1050" b="0" i="0" dirty="0" err="1">
+              <a:rPr sz="1400" b="0" i="0" dirty="0" err="1">
                 <a:solidFill>
                   <a:srgbClr val="1E293B"/>
                 </a:solidFill>
@@ -14875,7 +15953,7 @@
               <a:t>застрягають</a:t>
             </a:r>
             <a:r>
-              <a:rPr sz="1050" b="0" i="0" dirty="0">
+              <a:rPr sz="1400" b="0" i="0" dirty="0">
                 <a:solidFill>
                   <a:srgbClr val="1E293B"/>
                 </a:solidFill>
@@ -14884,7 +15962,7 @@
               <a:t> у </a:t>
             </a:r>
             <a:r>
-              <a:rPr sz="1050" b="0" i="0" dirty="0" err="1">
+              <a:rPr sz="1400" b="0" i="0" dirty="0" err="1">
                 <a:solidFill>
                   <a:srgbClr val="1E293B"/>
                 </a:solidFill>
@@ -14893,7 +15971,7 @@
               <a:t>локальних</a:t>
             </a:r>
             <a:r>
-              <a:rPr sz="1050" b="0" i="0" dirty="0">
+              <a:rPr sz="1400" b="0" i="0" dirty="0">
                 <a:solidFill>
                   <a:srgbClr val="1E293B"/>
                 </a:solidFill>
@@ -14902,7 +15980,7 @@
               <a:t> </a:t>
             </a:r>
             <a:r>
-              <a:rPr sz="1050" b="0" i="0" dirty="0" err="1">
+              <a:rPr sz="1400" b="0" i="0" dirty="0" err="1">
                 <a:solidFill>
                   <a:srgbClr val="1E293B"/>
                 </a:solidFill>
@@ -14911,7 +15989,7 @@
               <a:t>оптимумах</a:t>
             </a:r>
             <a:r>
-              <a:rPr sz="1050" b="0" i="0" dirty="0">
+              <a:rPr sz="1400" b="0" i="0" dirty="0">
                 <a:solidFill>
                   <a:srgbClr val="1E293B"/>
                 </a:solidFill>
@@ -14920,7 +15998,7 @@
               <a:t>. ГА </a:t>
             </a:r>
             <a:r>
-              <a:rPr sz="1050" b="0" i="0" dirty="0" err="1">
+              <a:rPr sz="1400" b="0" i="0" dirty="0" err="1">
                 <a:solidFill>
                   <a:srgbClr val="1E293B"/>
                 </a:solidFill>
@@ -14929,7 +16007,7 @@
               <a:t>ефективн</a:t>
             </a:r>
             <a:r>
-              <a:rPr lang="uk-UA" sz="1050" b="0" i="0" dirty="0">
+              <a:rPr lang="uk-UA" sz="1400" b="0" i="0" dirty="0">
                 <a:solidFill>
                   <a:srgbClr val="1E293B"/>
                 </a:solidFill>
@@ -14938,7 +16016,7 @@
               <a:t>іше</a:t>
             </a:r>
             <a:r>
-              <a:rPr sz="1050" b="0" i="0" dirty="0">
+              <a:rPr sz="1400" b="0" i="0" dirty="0">
                 <a:solidFill>
                   <a:srgbClr val="1E293B"/>
                 </a:solidFill>
@@ -14947,7 +16025,7 @@
               <a:t> </a:t>
             </a:r>
             <a:r>
-              <a:rPr sz="1050" b="0" i="0" dirty="0" err="1">
+              <a:rPr sz="1400" b="0" i="0" dirty="0" err="1">
                 <a:solidFill>
                   <a:srgbClr val="1E293B"/>
                 </a:solidFill>
@@ -14956,7 +16034,7 @@
               <a:t>досліджує</a:t>
             </a:r>
             <a:r>
-              <a:rPr sz="1050" b="0" i="0" dirty="0">
+              <a:rPr sz="1400" b="0" i="0" dirty="0">
                 <a:solidFill>
                   <a:srgbClr val="1E293B"/>
                 </a:solidFill>
@@ -14965,7 +16043,7 @@
               <a:t> </a:t>
             </a:r>
             <a:r>
-              <a:rPr sz="1050" b="0" i="0" dirty="0" err="1">
+              <a:rPr sz="1400" b="0" i="0" dirty="0" err="1">
                 <a:solidFill>
                   <a:srgbClr val="1E293B"/>
                 </a:solidFill>
@@ -14974,7 +16052,7 @@
               <a:t>простір</a:t>
             </a:r>
             <a:r>
-              <a:rPr sz="1050" b="0" i="0" dirty="0">
+              <a:rPr sz="1400" b="0" i="0" dirty="0">
                 <a:solidFill>
                   <a:srgbClr val="1E293B"/>
                 </a:solidFill>
@@ -14983,7 +16061,7 @@
               <a:t> NP-</a:t>
             </a:r>
             <a:r>
-              <a:rPr sz="1050" b="0" i="0" dirty="0" err="1">
+              <a:rPr sz="1400" b="0" i="0" dirty="0" err="1">
                 <a:solidFill>
                   <a:srgbClr val="1E293B"/>
                 </a:solidFill>
@@ -14992,7 +16070,7 @@
               <a:t>складних</a:t>
             </a:r>
             <a:r>
-              <a:rPr sz="1050" b="0" i="0" dirty="0">
+              <a:rPr sz="1400" b="0" i="0" dirty="0">
                 <a:solidFill>
                   <a:srgbClr val="1E293B"/>
                 </a:solidFill>
@@ -15001,7 +16079,7 @@
               <a:t> </a:t>
             </a:r>
             <a:r>
-              <a:rPr sz="1050" b="0" i="0" dirty="0" err="1">
+              <a:rPr sz="1400" b="0" i="0" dirty="0" err="1">
                 <a:solidFill>
                   <a:srgbClr val="1E293B"/>
                 </a:solidFill>
@@ -15010,7 +16088,7 @@
               <a:t>задач</a:t>
             </a:r>
             <a:r>
-              <a:rPr sz="1050" b="0" i="0" dirty="0">
+              <a:rPr sz="1400" b="0" i="0" dirty="0">
                 <a:solidFill>
                   <a:srgbClr val="1E293B"/>
                 </a:solidFill>
@@ -15141,7 +16219,7 @@
         </p:nvSpPr>
         <p:spPr>
           <a:xfrm>
-            <a:off x="0" y="4023360"/>
+            <a:off x="22167" y="4325113"/>
             <a:ext cx="9144000" cy="36576"/>
           </a:xfrm>
           <a:prstGeom prst="rect">
@@ -15944,52 +17022,6 @@
       </p:sp>
       <p:sp>
         <p:nvSpPr>
-          <p:cNvPr id="3" name="Rectangle 2"/>
-          <p:cNvSpPr/>
-          <p:nvPr/>
-        </p:nvSpPr>
-        <p:spPr>
-          <a:xfrm>
-            <a:off x="0" y="4023360"/>
-            <a:ext cx="9144000" cy="36576"/>
-          </a:xfrm>
-          <a:prstGeom prst="rect">
-            <a:avLst/>
-          </a:prstGeom>
-          <a:solidFill>
-            <a:srgbClr val="1C7293">
-              <a:alpha val="50000"/>
-            </a:srgbClr>
-          </a:solidFill>
-          <a:ln>
-            <a:noFill/>
-          </a:ln>
-        </p:spPr>
-        <p:style>
-          <a:lnRef idx="1">
-            <a:schemeClr val="accent1"/>
-          </a:lnRef>
-          <a:fillRef idx="3">
-            <a:schemeClr val="accent1"/>
-          </a:fillRef>
-          <a:effectRef idx="2">
-            <a:schemeClr val="accent1"/>
-          </a:effectRef>
-          <a:fontRef idx="minor">
-            <a:schemeClr val="lt1"/>
-          </a:fontRef>
-        </p:style>
-        <p:txBody>
-          <a:bodyPr rtlCol="0" anchor="ctr"/>
-          <a:lstStyle/>
-          <a:p>
-            <a:pPr algn="ctr"/>
-            <a:endParaRPr/>
-          </a:p>
-        </p:txBody>
-      </p:sp>
-      <p:sp>
-        <p:nvSpPr>
           <p:cNvPr id="4" name="TextBox 3"/>
           <p:cNvSpPr txBox="1"/>
           <p:nvPr/>
@@ -16031,8 +17063,8 @@
         </p:nvSpPr>
         <p:spPr>
           <a:xfrm>
-            <a:off x="548640" y="1005840"/>
-            <a:ext cx="8046720" cy="502920"/>
+            <a:off x="637609" y="1563727"/>
+            <a:ext cx="1378527" cy="548640"/>
           </a:xfrm>
           <a:prstGeom prst="rect">
             <a:avLst/>
@@ -16075,8 +17107,8 @@
         </p:nvSpPr>
         <p:spPr>
           <a:xfrm>
-            <a:off x="685800" y="1033271"/>
-            <a:ext cx="7772400" cy="438912"/>
+            <a:off x="637609" y="1686473"/>
+            <a:ext cx="1378527" cy="477054"/>
           </a:xfrm>
           <a:prstGeom prst="rect">
             <a:avLst/>
@@ -16091,14 +17123,56 @@
           <a:p>
             <a:pPr algn="l"/>
             <a:r>
-              <a:rPr sz="1250" b="1" i="0">
+              <a:rPr sz="1250" b="1" i="0" dirty="0" err="1">
                 <a:solidFill>
                   <a:srgbClr val="FFFFFF"/>
                 </a:solidFill>
                 <a:latin typeface="Calibri"/>
               </a:rPr>
-              <a:t>Цільова функція:  F = A · T_total + B · K  —  мінімізація часу переїздів та кількості задіяних ТЗ</a:t>
-            </a:r>
+              <a:t>Цільова</a:t>
+            </a:r>
+            <a:r>
+              <a:rPr sz="1250" b="1" i="0" dirty="0">
+                <a:solidFill>
+                  <a:srgbClr val="FFFFFF"/>
+                </a:solidFill>
+                <a:latin typeface="Calibri"/>
+              </a:rPr>
+              <a:t> </a:t>
+            </a:r>
+            <a:r>
+              <a:rPr sz="1250" b="1" i="0" dirty="0" err="1">
+                <a:solidFill>
+                  <a:srgbClr val="FFFFFF"/>
+                </a:solidFill>
+                <a:latin typeface="Calibri"/>
+              </a:rPr>
+              <a:t>функція</a:t>
+            </a:r>
+            <a:r>
+              <a:rPr sz="1250" b="1" i="0" dirty="0">
+                <a:solidFill>
+                  <a:srgbClr val="FFFFFF"/>
+                </a:solidFill>
+                <a:latin typeface="Calibri"/>
+              </a:rPr>
+              <a:t>:</a:t>
+            </a:r>
+            <a:endParaRPr lang="en-US" sz="1250" b="1" i="0" dirty="0">
+              <a:solidFill>
+                <a:srgbClr val="FFFFFF"/>
+              </a:solidFill>
+              <a:latin typeface="Calibri"/>
+            </a:endParaRPr>
+          </a:p>
+          <a:p>
+            <a:pPr algn="l"/>
+            <a:endParaRPr sz="1250" b="1" i="0" dirty="0">
+              <a:solidFill>
+                <a:srgbClr val="FFFFFF"/>
+              </a:solidFill>
+              <a:latin typeface="Calibri"/>
+            </a:endParaRPr>
           </a:p>
         </p:txBody>
       </p:sp>
@@ -16110,7 +17184,7 @@
         </p:nvSpPr>
         <p:spPr>
           <a:xfrm>
-            <a:off x="548640" y="1645920"/>
+            <a:off x="548640" y="2843182"/>
             <a:ext cx="4114800" cy="347472"/>
           </a:xfrm>
           <a:prstGeom prst="rect">
@@ -16126,14 +17200,38 @@
           <a:p>
             <a:pPr algn="l"/>
             <a:r>
-              <a:rPr sz="1400" b="1" i="0">
+              <a:rPr sz="1400" b="1" i="0" dirty="0" err="1">
                 <a:solidFill>
                   <a:srgbClr val="FFFFFF"/>
                 </a:solidFill>
                 <a:latin typeface="Calibri"/>
               </a:rPr>
-              <a:t>Обмеження моделі</a:t>
-            </a:r>
+              <a:t>Обмеження</a:t>
+            </a:r>
+            <a:r>
+              <a:rPr sz="1400" b="1" i="0" dirty="0">
+                <a:solidFill>
+                  <a:srgbClr val="FFFFFF"/>
+                </a:solidFill>
+                <a:latin typeface="Calibri"/>
+              </a:rPr>
+              <a:t> </a:t>
+            </a:r>
+            <a:r>
+              <a:rPr sz="1400" b="1" i="0" dirty="0" err="1">
+                <a:solidFill>
+                  <a:srgbClr val="FFFFFF"/>
+                </a:solidFill>
+                <a:latin typeface="Calibri"/>
+              </a:rPr>
+              <a:t>моделі</a:t>
+            </a:r>
+            <a:endParaRPr sz="1400" b="1" i="0" dirty="0">
+              <a:solidFill>
+                <a:srgbClr val="FFFFFF"/>
+              </a:solidFill>
+              <a:latin typeface="Calibri"/>
+            </a:endParaRPr>
           </a:p>
         </p:txBody>
       </p:sp>
@@ -16145,7 +17243,7 @@
         </p:nvSpPr>
         <p:spPr>
           <a:xfrm>
-            <a:off x="548640" y="2057400"/>
+            <a:off x="548640" y="3231990"/>
             <a:ext cx="347472" cy="347472"/>
           </a:xfrm>
           <a:prstGeom prst="rect">
@@ -16189,7 +17287,7 @@
         </p:nvSpPr>
         <p:spPr>
           <a:xfrm>
-            <a:off x="548640" y="2057400"/>
+            <a:off x="548640" y="3251501"/>
             <a:ext cx="347472" cy="347472"/>
           </a:xfrm>
           <a:prstGeom prst="rect">
@@ -16205,7 +17303,7 @@
           <a:p>
             <a:pPr algn="ctr"/>
             <a:r>
-              <a:rPr sz="1400" b="1" i="0">
+              <a:rPr sz="1400" b="1" i="0" dirty="0">
                 <a:solidFill>
                   <a:srgbClr val="FFFFFF"/>
                 </a:solidFill>
@@ -16224,7 +17322,7 @@
         </p:nvSpPr>
         <p:spPr>
           <a:xfrm>
-            <a:off x="1005840" y="2057400"/>
+            <a:off x="1011936" y="3282074"/>
             <a:ext cx="1828800" cy="347472"/>
           </a:xfrm>
           <a:prstGeom prst="rect">
@@ -16240,7 +17338,7 @@
           <a:p>
             <a:pPr algn="l"/>
             <a:r>
-              <a:rPr sz="1150" b="1" i="0">
+              <a:rPr sz="1150" b="1" i="0" dirty="0" err="1">
                 <a:solidFill>
                   <a:srgbClr val="FFFFFF"/>
                 </a:solidFill>
@@ -16248,6 +17346,12 @@
               </a:rPr>
               <a:t>Місткість</a:t>
             </a:r>
+            <a:endParaRPr sz="1150" b="1" i="0" dirty="0">
+              <a:solidFill>
+                <a:srgbClr val="FFFFFF"/>
+              </a:solidFill>
+              <a:latin typeface="Calibri"/>
+            </a:endParaRPr>
           </a:p>
         </p:txBody>
       </p:sp>
@@ -16259,7 +17363,7 @@
         </p:nvSpPr>
         <p:spPr>
           <a:xfrm>
-            <a:off x="2926080" y="2057400"/>
+            <a:off x="2926080" y="3287268"/>
             <a:ext cx="5577840" cy="347472"/>
           </a:xfrm>
           <a:prstGeom prst="rect">
@@ -16275,13 +17379,94 @@
           <a:p>
             <a:pPr algn="l"/>
             <a:r>
-              <a:rPr sz="1100" b="0" i="0">
+              <a:rPr sz="1100" b="0" i="0" dirty="0" err="1">
                 <a:solidFill>
                   <a:srgbClr val="F1F5F9"/>
                 </a:solidFill>
                 <a:latin typeface="Calibri"/>
               </a:rPr>
-              <a:t>Сумарна вага вантажів у кожному ТЗ ≤ ліміт Q</a:t>
+              <a:t>Сумарна</a:t>
+            </a:r>
+            <a:r>
+              <a:rPr sz="1100" b="0" i="0" dirty="0">
+                <a:solidFill>
+                  <a:srgbClr val="F1F5F9"/>
+                </a:solidFill>
+                <a:latin typeface="Calibri"/>
+              </a:rPr>
+              <a:t> </a:t>
+            </a:r>
+            <a:r>
+              <a:rPr sz="1100" b="0" i="0" dirty="0" err="1">
+                <a:solidFill>
+                  <a:srgbClr val="F1F5F9"/>
+                </a:solidFill>
+                <a:latin typeface="Calibri"/>
+              </a:rPr>
+              <a:t>вага</a:t>
+            </a:r>
+            <a:r>
+              <a:rPr sz="1100" b="0" i="0" dirty="0">
+                <a:solidFill>
+                  <a:srgbClr val="F1F5F9"/>
+                </a:solidFill>
+                <a:latin typeface="Calibri"/>
+              </a:rPr>
+              <a:t> </a:t>
+            </a:r>
+            <a:r>
+              <a:rPr sz="1100" b="0" i="0" dirty="0" err="1">
+                <a:solidFill>
+                  <a:srgbClr val="F1F5F9"/>
+                </a:solidFill>
+                <a:latin typeface="Calibri"/>
+              </a:rPr>
+              <a:t>вантажів</a:t>
+            </a:r>
+            <a:r>
+              <a:rPr sz="1100" b="0" i="0" dirty="0">
+                <a:solidFill>
+                  <a:srgbClr val="F1F5F9"/>
+                </a:solidFill>
+                <a:latin typeface="Calibri"/>
+              </a:rPr>
+              <a:t> у </a:t>
+            </a:r>
+            <a:r>
+              <a:rPr sz="1100" b="0" i="0" dirty="0" err="1">
+                <a:solidFill>
+                  <a:srgbClr val="F1F5F9"/>
+                </a:solidFill>
+                <a:latin typeface="Calibri"/>
+              </a:rPr>
+              <a:t>кожному</a:t>
+            </a:r>
+            <a:r>
+              <a:rPr sz="1100" b="0" i="0" dirty="0">
+                <a:solidFill>
+                  <a:srgbClr val="F1F5F9"/>
+                </a:solidFill>
+                <a:latin typeface="Calibri"/>
+              </a:rPr>
+              <a:t> ТЗ ≤ </a:t>
+            </a:r>
+            <a:r>
+              <a:rPr sz="1100" b="0" i="0" dirty="0" err="1">
+                <a:solidFill>
+                  <a:srgbClr val="F1F5F9"/>
+                </a:solidFill>
+                <a:latin typeface="Calibri"/>
+              </a:rPr>
+              <a:t>ліміт</a:t>
+            </a:r>
+            <a:r>
+              <a:rPr sz="1100" b="0" i="0" dirty="0">
+                <a:solidFill>
+                  <a:srgbClr val="F1F5F9"/>
+                </a:solidFill>
+                <a:latin typeface="Calibri"/>
+              </a:rPr>
+              <a:t> Q</a:t>
             </a:r>
           </a:p>
         </p:txBody>
@@ -16294,7 +17479,7 @@
         </p:nvSpPr>
         <p:spPr>
           <a:xfrm>
-            <a:off x="548640" y="2697480"/>
+            <a:off x="548640" y="3665948"/>
             <a:ext cx="347472" cy="347472"/>
           </a:xfrm>
           <a:prstGeom prst="rect">
@@ -16338,7 +17523,7 @@
         </p:nvSpPr>
         <p:spPr>
           <a:xfrm>
-            <a:off x="548640" y="2697480"/>
+            <a:off x="548640" y="3687284"/>
             <a:ext cx="347472" cy="347472"/>
           </a:xfrm>
           <a:prstGeom prst="rect">
@@ -16354,7 +17539,7 @@
           <a:p>
             <a:pPr algn="ctr"/>
             <a:r>
-              <a:rPr sz="1400" b="1" i="0">
+              <a:rPr sz="1400" b="1" i="0" dirty="0">
                 <a:solidFill>
                   <a:srgbClr val="FFFFFF"/>
                 </a:solidFill>
@@ -16373,7 +17558,7 @@
         </p:nvSpPr>
         <p:spPr>
           <a:xfrm>
-            <a:off x="1005840" y="2697480"/>
+            <a:off x="1011936" y="3733212"/>
             <a:ext cx="1828800" cy="347472"/>
           </a:xfrm>
           <a:prstGeom prst="rect">
@@ -16389,14 +17574,38 @@
           <a:p>
             <a:pPr algn="l"/>
             <a:r>
-              <a:rPr sz="1150" b="1" i="0">
+              <a:rPr sz="1150" b="1" i="0" dirty="0" err="1">
                 <a:solidFill>
                   <a:srgbClr val="FFFFFF"/>
                 </a:solidFill>
                 <a:latin typeface="Calibri"/>
               </a:rPr>
-              <a:t>Часові вікна</a:t>
-            </a:r>
+              <a:t>Часові</a:t>
+            </a:r>
+            <a:r>
+              <a:rPr sz="1150" b="1" i="0" dirty="0">
+                <a:solidFill>
+                  <a:srgbClr val="FFFFFF"/>
+                </a:solidFill>
+                <a:latin typeface="Calibri"/>
+              </a:rPr>
+              <a:t> </a:t>
+            </a:r>
+            <a:r>
+              <a:rPr sz="1150" b="1" i="0" dirty="0" err="1">
+                <a:solidFill>
+                  <a:srgbClr val="FFFFFF"/>
+                </a:solidFill>
+                <a:latin typeface="Calibri"/>
+              </a:rPr>
+              <a:t>вікна</a:t>
+            </a:r>
+            <a:endParaRPr sz="1150" b="1" i="0" dirty="0">
+              <a:solidFill>
+                <a:srgbClr val="FFFFFF"/>
+              </a:solidFill>
+              <a:latin typeface="Calibri"/>
+            </a:endParaRPr>
           </a:p>
         </p:txBody>
       </p:sp>
@@ -16408,7 +17617,7 @@
         </p:nvSpPr>
         <p:spPr>
           <a:xfrm>
-            <a:off x="2926080" y="2697480"/>
+            <a:off x="2956560" y="3736902"/>
             <a:ext cx="5577840" cy="347472"/>
           </a:xfrm>
           <a:prstGeom prst="rect">
@@ -16443,7 +17652,7 @@
         </p:nvSpPr>
         <p:spPr>
           <a:xfrm>
-            <a:off x="548640" y="3337560"/>
+            <a:off x="548640" y="4113779"/>
             <a:ext cx="347472" cy="347472"/>
           </a:xfrm>
           <a:prstGeom prst="rect">
@@ -16487,7 +17696,7 @@
         </p:nvSpPr>
         <p:spPr>
           <a:xfrm>
-            <a:off x="548640" y="3337560"/>
+            <a:off x="548640" y="4135115"/>
             <a:ext cx="347472" cy="347472"/>
           </a:xfrm>
           <a:prstGeom prst="rect">
@@ -16522,7 +17731,7 @@
         </p:nvSpPr>
         <p:spPr>
           <a:xfrm>
-            <a:off x="1005840" y="3337560"/>
+            <a:off x="1005840" y="4184350"/>
             <a:ext cx="1828800" cy="347472"/>
           </a:xfrm>
           <a:prstGeom prst="rect">
@@ -16538,7 +17747,7 @@
           <a:p>
             <a:pPr algn="l"/>
             <a:r>
-              <a:rPr sz="1150" b="1" i="0">
+              <a:rPr sz="1150" b="1" i="0" dirty="0" err="1">
                 <a:solidFill>
                   <a:srgbClr val="FFFFFF"/>
                 </a:solidFill>
@@ -16546,6 +17755,12 @@
               </a:rPr>
               <a:t>Зв'язність</a:t>
             </a:r>
+            <a:endParaRPr sz="1150" b="1" i="0" dirty="0">
+              <a:solidFill>
+                <a:srgbClr val="FFFFFF"/>
+              </a:solidFill>
+              <a:latin typeface="Calibri"/>
+            </a:endParaRPr>
           </a:p>
         </p:txBody>
       </p:sp>
@@ -16557,7 +17772,7 @@
         </p:nvSpPr>
         <p:spPr>
           <a:xfrm>
-            <a:off x="2926080" y="3337560"/>
+            <a:off x="2926080" y="4183380"/>
             <a:ext cx="5577840" cy="347472"/>
           </a:xfrm>
           <a:prstGeom prst="rect">
@@ -16573,14 +17788,110 @@
           <a:p>
             <a:pPr algn="l"/>
             <a:r>
-              <a:rPr sz="1100" b="0" i="0">
+              <a:rPr sz="1100" b="0" i="0" dirty="0" err="1">
                 <a:solidFill>
                   <a:srgbClr val="F1F5F9"/>
                 </a:solidFill>
                 <a:latin typeface="Calibri"/>
               </a:rPr>
-              <a:t>Кожен клієнт відвіданий рівно один раз</a:t>
-            </a:r>
+              <a:t>Кожен</a:t>
+            </a:r>
+            <a:r>
+              <a:rPr sz="1100" b="0" i="0" dirty="0">
+                <a:solidFill>
+                  <a:srgbClr val="F1F5F9"/>
+                </a:solidFill>
+                <a:latin typeface="Calibri"/>
+              </a:rPr>
+              <a:t> </a:t>
+            </a:r>
+            <a:r>
+              <a:rPr sz="1100" b="0" i="0" dirty="0" err="1">
+                <a:solidFill>
+                  <a:srgbClr val="F1F5F9"/>
+                </a:solidFill>
+                <a:latin typeface="Calibri"/>
+              </a:rPr>
+              <a:t>клієнт</a:t>
+            </a:r>
+            <a:r>
+              <a:rPr sz="1100" b="0" i="0" dirty="0">
+                <a:solidFill>
+                  <a:srgbClr val="F1F5F9"/>
+                </a:solidFill>
+                <a:latin typeface="Calibri"/>
+              </a:rPr>
+              <a:t> </a:t>
+            </a:r>
+            <a:r>
+              <a:rPr sz="1100" b="0" i="0" dirty="0" err="1">
+                <a:solidFill>
+                  <a:srgbClr val="F1F5F9"/>
+                </a:solidFill>
+                <a:latin typeface="Calibri"/>
+              </a:rPr>
+              <a:t>відвіданий</a:t>
+            </a:r>
+            <a:r>
+              <a:rPr sz="1100" b="0" i="0" dirty="0">
+                <a:solidFill>
+                  <a:srgbClr val="F1F5F9"/>
+                </a:solidFill>
+                <a:latin typeface="Calibri"/>
+              </a:rPr>
+              <a:t> </a:t>
+            </a:r>
+            <a:r>
+              <a:rPr sz="1100" b="0" i="0" dirty="0" err="1">
+                <a:solidFill>
+                  <a:srgbClr val="F1F5F9"/>
+                </a:solidFill>
+                <a:latin typeface="Calibri"/>
+              </a:rPr>
+              <a:t>рівно</a:t>
+            </a:r>
+            <a:r>
+              <a:rPr sz="1100" b="0" i="0" dirty="0">
+                <a:solidFill>
+                  <a:srgbClr val="F1F5F9"/>
+                </a:solidFill>
+                <a:latin typeface="Calibri"/>
+              </a:rPr>
+              <a:t> </a:t>
+            </a:r>
+            <a:r>
+              <a:rPr sz="1100" b="0" i="0" dirty="0" err="1">
+                <a:solidFill>
+                  <a:srgbClr val="F1F5F9"/>
+                </a:solidFill>
+                <a:latin typeface="Calibri"/>
+              </a:rPr>
+              <a:t>один</a:t>
+            </a:r>
+            <a:r>
+              <a:rPr sz="1100" b="0" i="0" dirty="0">
+                <a:solidFill>
+                  <a:srgbClr val="F1F5F9"/>
+                </a:solidFill>
+                <a:latin typeface="Calibri"/>
+              </a:rPr>
+              <a:t> </a:t>
+            </a:r>
+            <a:r>
+              <a:rPr sz="1100" b="0" i="0" dirty="0" err="1">
+                <a:solidFill>
+                  <a:srgbClr val="F1F5F9"/>
+                </a:solidFill>
+                <a:latin typeface="Calibri"/>
+              </a:rPr>
+              <a:t>раз</a:t>
+            </a:r>
+            <a:endParaRPr sz="1100" b="0" i="0" dirty="0">
+              <a:solidFill>
+                <a:srgbClr val="F1F5F9"/>
+              </a:solidFill>
+              <a:latin typeface="Calibri"/>
+            </a:endParaRPr>
           </a:p>
         </p:txBody>
       </p:sp>
@@ -16592,7 +17903,7 @@
         </p:nvSpPr>
         <p:spPr>
           <a:xfrm>
-            <a:off x="548640" y="3977639"/>
+            <a:off x="548640" y="4604281"/>
             <a:ext cx="347472" cy="347472"/>
           </a:xfrm>
           <a:prstGeom prst="rect">
@@ -16636,7 +17947,7 @@
         </p:nvSpPr>
         <p:spPr>
           <a:xfrm>
-            <a:off x="548640" y="3977639"/>
+            <a:off x="548640" y="4635488"/>
             <a:ext cx="347472" cy="347472"/>
           </a:xfrm>
           <a:prstGeom prst="rect">
@@ -16671,7 +17982,7 @@
         </p:nvSpPr>
         <p:spPr>
           <a:xfrm>
-            <a:off x="1005840" y="3977639"/>
+            <a:off x="1005840" y="4635488"/>
             <a:ext cx="1828800" cy="347472"/>
           </a:xfrm>
           <a:prstGeom prst="rect">
@@ -16706,7 +18017,7 @@
         </p:nvSpPr>
         <p:spPr>
           <a:xfrm>
-            <a:off x="2926080" y="3977639"/>
+            <a:off x="2926080" y="4635488"/>
             <a:ext cx="5577840" cy="347472"/>
           </a:xfrm>
           <a:prstGeom prst="rect">
@@ -16733,6 +18044,36 @@
           </a:p>
         </p:txBody>
       </p:sp>
+      <p:pic>
+        <p:nvPicPr>
+          <p:cNvPr id="25" name="Picture 24">
+            <a:extLst>
+              <a:ext uri="{FF2B5EF4-FFF2-40B4-BE49-F238E27FC236}">
+                <a16:creationId xmlns:a16="http://schemas.microsoft.com/office/drawing/2014/main" id="{CD9A5600-48F2-C464-0054-B70220F2FBFF}"/>
+              </a:ext>
+            </a:extLst>
+          </p:cNvPr>
+          <p:cNvPicPr>
+            <a:picLocks noChangeAspect="1"/>
+          </p:cNvPicPr>
+          <p:nvPr/>
+        </p:nvPicPr>
+        <p:blipFill>
+          <a:blip r:embed="rId2"/>
+          <a:stretch>
+            <a:fillRect/>
+          </a:stretch>
+        </p:blipFill>
+        <p:spPr>
+          <a:xfrm>
+            <a:off x="2450361" y="912182"/>
+            <a:ext cx="5149364" cy="1888100"/>
+          </a:xfrm>
+          <a:prstGeom prst="rect">
+            <a:avLst/>
+          </a:prstGeom>
+        </p:spPr>
+      </p:pic>
     </p:spTree>
   </p:cSld>
   <p:clrMapOvr>
@@ -16818,7 +18159,7 @@
         </p:nvSpPr>
         <p:spPr>
           <a:xfrm>
-            <a:off x="0" y="4023360"/>
+            <a:off x="0" y="4815286"/>
             <a:ext cx="9144000" cy="36576"/>
           </a:xfrm>
           <a:prstGeom prst="rect">
@@ -17057,8 +18398,8 @@
         </p:nvSpPr>
         <p:spPr>
           <a:xfrm>
-            <a:off x="685800" y="1572768"/>
-            <a:ext cx="3840480" cy="457200"/>
+            <a:off x="685800" y="1480322"/>
+            <a:ext cx="3840480" cy="461665"/>
           </a:xfrm>
           <a:prstGeom prst="rect">
             <a:avLst/>
@@ -17073,7 +18414,7 @@
           <a:p>
             <a:pPr algn="l"/>
             <a:r>
-              <a:rPr sz="1000" b="0" i="0">
+              <a:rPr sz="1200" b="0" i="0">
                 <a:solidFill>
                   <a:srgbClr val="1E293B"/>
                 </a:solidFill>
@@ -17215,8 +18556,8 @@
         </p:nvSpPr>
         <p:spPr>
           <a:xfrm>
-            <a:off x="4983480" y="1572768"/>
-            <a:ext cx="3840480" cy="457200"/>
+            <a:off x="4983480" y="1480322"/>
+            <a:ext cx="3840480" cy="461665"/>
           </a:xfrm>
           <a:prstGeom prst="rect">
             <a:avLst/>
@@ -17231,7 +18572,7 @@
           <a:p>
             <a:pPr algn="l"/>
             <a:r>
-              <a:rPr sz="1000" b="0" i="0">
+              <a:rPr sz="1200" b="0" i="0">
                 <a:solidFill>
                   <a:srgbClr val="1E293B"/>
                 </a:solidFill>
@@ -17373,8 +18714,8 @@
         </p:nvSpPr>
         <p:spPr>
           <a:xfrm>
-            <a:off x="685800" y="2670048"/>
-            <a:ext cx="3840480" cy="457200"/>
+            <a:off x="685800" y="2577602"/>
+            <a:ext cx="3840480" cy="461665"/>
           </a:xfrm>
           <a:prstGeom prst="rect">
             <a:avLst/>
@@ -17389,7 +18730,7 @@
           <a:p>
             <a:pPr algn="l"/>
             <a:r>
-              <a:rPr sz="1000" b="0" i="0">
+              <a:rPr sz="1200" b="0" i="0">
                 <a:solidFill>
                   <a:srgbClr val="1E293B"/>
                 </a:solidFill>
@@ -17531,8 +18872,8 @@
         </p:nvSpPr>
         <p:spPr>
           <a:xfrm>
-            <a:off x="4983480" y="2670048"/>
-            <a:ext cx="3840480" cy="457200"/>
+            <a:off x="4983480" y="2577602"/>
+            <a:ext cx="3840480" cy="461665"/>
           </a:xfrm>
           <a:prstGeom prst="rect">
             <a:avLst/>
@@ -17547,7 +18888,7 @@
           <a:p>
             <a:pPr algn="l"/>
             <a:r>
-              <a:rPr sz="1000" b="0" i="0">
+              <a:rPr sz="1200" b="0" i="0">
                 <a:solidFill>
                   <a:srgbClr val="1E293B"/>
                 </a:solidFill>
@@ -17689,8 +19030,8 @@
         </p:nvSpPr>
         <p:spPr>
           <a:xfrm>
-            <a:off x="685800" y="3767328"/>
-            <a:ext cx="3840480" cy="457200"/>
+            <a:off x="685800" y="3674882"/>
+            <a:ext cx="3840480" cy="461665"/>
           </a:xfrm>
           <a:prstGeom prst="rect">
             <a:avLst/>
@@ -17705,7 +19046,7 @@
           <a:p>
             <a:pPr algn="l"/>
             <a:r>
-              <a:rPr sz="1000" b="0" i="0">
+              <a:rPr sz="1200" b="0" i="0">
                 <a:solidFill>
                   <a:srgbClr val="1E293B"/>
                 </a:solidFill>
@@ -17847,8 +19188,8 @@
         </p:nvSpPr>
         <p:spPr>
           <a:xfrm>
-            <a:off x="4983480" y="3767328"/>
-            <a:ext cx="3840480" cy="457200"/>
+            <a:off x="4983480" y="3674882"/>
+            <a:ext cx="3840480" cy="276999"/>
           </a:xfrm>
           <a:prstGeom prst="rect">
             <a:avLst/>
@@ -17863,7 +19204,7 @@
           <a:p>
             <a:pPr algn="l"/>
             <a:r>
-              <a:rPr sz="1000" b="0" i="0">
+              <a:rPr sz="1200" b="0" i="0">
                 <a:solidFill>
                   <a:srgbClr val="1E293B"/>
                 </a:solidFill>

--- a/Звіт/Диплом/Презентація/Презентація_диплом_Ніколаєв.pptx
+++ b/Звіт/Диплом/Презентація/Презентація_диплом_Ніколаєв.pptx
@@ -1,9 +1,15 @@
 
 <file path=ppt/presentation.xml><?xml version="1.0" encoding="utf-8"?>
-<p:presentation xmlns:a="http://schemas.openxmlformats.org/drawingml/2006/main" xmlns:r="http://schemas.openxmlformats.org/officeDocument/2006/relationships" xmlns:p="http://schemas.openxmlformats.org/presentationml/2006/main" saveSubsetFonts="1" autoCompressPictures="0">
+<p:presentation xmlns:a="http://schemas.openxmlformats.org/drawingml/2006/main" xmlns:r="http://schemas.openxmlformats.org/officeDocument/2006/relationships" xmlns:p="http://schemas.openxmlformats.org/presentationml/2006/main" showSpecialPlsOnTitleSld="0" saveSubsetFonts="1" autoCompressPictures="0">
   <p:sldMasterIdLst>
     <p:sldMasterId id="2147483648" r:id="rId1"/>
   </p:sldMasterIdLst>
+  <p:notesMasterIdLst>
+    <p:notesMasterId r:id="rId28"/>
+  </p:notesMasterIdLst>
+  <p:handoutMasterIdLst>
+    <p:handoutMasterId r:id="rId29"/>
+  </p:handoutMasterIdLst>
   <p:sldIdLst>
     <p:sldId id="256" r:id="rId2"/>
     <p:sldId id="257" r:id="rId3"/>
@@ -148,6 +154,546 @@
 </p:presentation>
 </file>
 
+<file path=ppt/handoutMasters/handoutMaster1.xml><?xml version="1.0" encoding="utf-8"?>
+<p:handoutMaster xmlns:a="http://schemas.openxmlformats.org/drawingml/2006/main" xmlns:r="http://schemas.openxmlformats.org/officeDocument/2006/relationships" xmlns:p="http://schemas.openxmlformats.org/presentationml/2006/main">
+  <p:cSld>
+    <p:bg>
+      <p:bgRef idx="1001">
+        <a:schemeClr val="bg1"/>
+      </p:bgRef>
+    </p:bg>
+    <p:spTree>
+      <p:nvGrpSpPr>
+        <p:cNvPr id="1" name=""/>
+        <p:cNvGrpSpPr/>
+        <p:nvPr/>
+      </p:nvGrpSpPr>
+      <p:grpSpPr>
+        <a:xfrm>
+          <a:off x="0" y="0"/>
+          <a:ext cx="0" cy="0"/>
+          <a:chOff x="0" y="0"/>
+          <a:chExt cx="0" cy="0"/>
+        </a:xfrm>
+      </p:grpSpPr>
+      <p:sp>
+        <p:nvSpPr>
+          <p:cNvPr id="2" name="Header Placeholder 1">
+            <a:extLst>
+              <a:ext uri="{FF2B5EF4-FFF2-40B4-BE49-F238E27FC236}">
+                <a16:creationId xmlns:a16="http://schemas.microsoft.com/office/drawing/2014/main" id="{D9167ADC-587A-FF7E-8289-08EA898B6DAB}"/>
+              </a:ext>
+            </a:extLst>
+          </p:cNvPr>
+          <p:cNvSpPr>
+            <a:spLocks noGrp="1"/>
+          </p:cNvSpPr>
+          <p:nvPr>
+            <p:ph type="hdr" sz="quarter"/>
+          </p:nvPr>
+        </p:nvSpPr>
+        <p:spPr>
+          <a:xfrm>
+            <a:off x="0" y="0"/>
+            <a:ext cx="2971800" cy="458788"/>
+          </a:xfrm>
+          <a:prstGeom prst="rect">
+            <a:avLst/>
+          </a:prstGeom>
+        </p:spPr>
+        <p:txBody>
+          <a:bodyPr vert="horz" lIns="91440" tIns="45720" rIns="91440" bIns="45720" rtlCol="0"/>
+          <a:lstStyle>
+            <a:lvl1pPr algn="l">
+              <a:defRPr sz="1200"/>
+            </a:lvl1pPr>
+          </a:lstStyle>
+          <a:p>
+            <a:endParaRPr lang="en-US"/>
+          </a:p>
+        </p:txBody>
+      </p:sp>
+      <p:sp>
+        <p:nvSpPr>
+          <p:cNvPr id="3" name="Date Placeholder 2">
+            <a:extLst>
+              <a:ext uri="{FF2B5EF4-FFF2-40B4-BE49-F238E27FC236}">
+                <a16:creationId xmlns:a16="http://schemas.microsoft.com/office/drawing/2014/main" id="{AEFADAE1-00E5-54DE-E506-736F38CACB3A}"/>
+              </a:ext>
+            </a:extLst>
+          </p:cNvPr>
+          <p:cNvSpPr>
+            <a:spLocks noGrp="1"/>
+          </p:cNvSpPr>
+          <p:nvPr>
+            <p:ph type="dt" sz="quarter" idx="1"/>
+          </p:nvPr>
+        </p:nvSpPr>
+        <p:spPr>
+          <a:xfrm>
+            <a:off x="3884613" y="0"/>
+            <a:ext cx="2971800" cy="458788"/>
+          </a:xfrm>
+          <a:prstGeom prst="rect">
+            <a:avLst/>
+          </a:prstGeom>
+        </p:spPr>
+        <p:txBody>
+          <a:bodyPr vert="horz" lIns="91440" tIns="45720" rIns="91440" bIns="45720" rtlCol="0"/>
+          <a:lstStyle>
+            <a:lvl1pPr algn="r">
+              <a:defRPr sz="1200"/>
+            </a:lvl1pPr>
+          </a:lstStyle>
+          <a:p>
+            <a:fld id="{86538AE5-C6A3-47E9-8146-192446ACA407}" type="datetime1">
+              <a:rPr lang="en-US" smtClean="0"/>
+              <a:t>6/2/2026</a:t>
+            </a:fld>
+            <a:endParaRPr lang="en-US"/>
+          </a:p>
+        </p:txBody>
+      </p:sp>
+      <p:sp>
+        <p:nvSpPr>
+          <p:cNvPr id="4" name="Footer Placeholder 3">
+            <a:extLst>
+              <a:ext uri="{FF2B5EF4-FFF2-40B4-BE49-F238E27FC236}">
+                <a16:creationId xmlns:a16="http://schemas.microsoft.com/office/drawing/2014/main" id="{B3768AC1-2854-07F5-D113-D81AF2ED2884}"/>
+              </a:ext>
+            </a:extLst>
+          </p:cNvPr>
+          <p:cNvSpPr>
+            <a:spLocks noGrp="1"/>
+          </p:cNvSpPr>
+          <p:nvPr>
+            <p:ph type="ftr" sz="quarter" idx="2"/>
+          </p:nvPr>
+        </p:nvSpPr>
+        <p:spPr>
+          <a:xfrm>
+            <a:off x="0" y="8685213"/>
+            <a:ext cx="2971800" cy="458787"/>
+          </a:xfrm>
+          <a:prstGeom prst="rect">
+            <a:avLst/>
+          </a:prstGeom>
+        </p:spPr>
+        <p:txBody>
+          <a:bodyPr vert="horz" lIns="91440" tIns="45720" rIns="91440" bIns="45720" rtlCol="0" anchor="b"/>
+          <a:lstStyle>
+            <a:lvl1pPr algn="l">
+              <a:defRPr sz="1200"/>
+            </a:lvl1pPr>
+          </a:lstStyle>
+          <a:p>
+            <a:endParaRPr lang="en-US"/>
+          </a:p>
+        </p:txBody>
+      </p:sp>
+      <p:sp>
+        <p:nvSpPr>
+          <p:cNvPr id="5" name="Slide Number Placeholder 4">
+            <a:extLst>
+              <a:ext uri="{FF2B5EF4-FFF2-40B4-BE49-F238E27FC236}">
+                <a16:creationId xmlns:a16="http://schemas.microsoft.com/office/drawing/2014/main" id="{EF81F967-8C7B-C204-BB2D-5F903C946E5D}"/>
+              </a:ext>
+            </a:extLst>
+          </p:cNvPr>
+          <p:cNvSpPr>
+            <a:spLocks noGrp="1"/>
+          </p:cNvSpPr>
+          <p:nvPr>
+            <p:ph type="sldNum" sz="quarter" idx="3"/>
+          </p:nvPr>
+        </p:nvSpPr>
+        <p:spPr>
+          <a:xfrm>
+            <a:off x="3884613" y="8685213"/>
+            <a:ext cx="2971800" cy="458787"/>
+          </a:xfrm>
+          <a:prstGeom prst="rect">
+            <a:avLst/>
+          </a:prstGeom>
+        </p:spPr>
+        <p:txBody>
+          <a:bodyPr vert="horz" lIns="91440" tIns="45720" rIns="91440" bIns="45720" rtlCol="0" anchor="b"/>
+          <a:lstStyle>
+            <a:lvl1pPr algn="r">
+              <a:defRPr sz="1200"/>
+            </a:lvl1pPr>
+          </a:lstStyle>
+          <a:p>
+            <a:fld id="{B9E358DD-87B7-40B1-B4E7-C083A3B578EB}" type="slidenum">
+              <a:rPr lang="en-US" smtClean="0"/>
+              <a:t>‹#›</a:t>
+            </a:fld>
+            <a:endParaRPr lang="en-US"/>
+          </a:p>
+        </p:txBody>
+      </p:sp>
+    </p:spTree>
+    <p:extLst>
+      <p:ext uri="{BB962C8B-B14F-4D97-AF65-F5344CB8AC3E}">
+        <p14:creationId xmlns:p14="http://schemas.microsoft.com/office/powerpoint/2010/main" val="3832817063"/>
+      </p:ext>
+    </p:extLst>
+  </p:cSld>
+  <p:clrMap bg1="lt1" tx1="dk1" bg2="lt2" tx2="dk2" accent1="accent1" accent2="accent2" accent3="accent3" accent4="accent4" accent5="accent5" accent6="accent6" hlink="hlink" folHlink="folHlink"/>
+  <p:hf hdr="0" ftr="0" dt="0"/>
+</p:handoutMaster>
+</file>
+
+<file path=ppt/notesMasters/notesMaster1.xml><?xml version="1.0" encoding="utf-8"?>
+<p:notesMaster xmlns:a="http://schemas.openxmlformats.org/drawingml/2006/main" xmlns:r="http://schemas.openxmlformats.org/officeDocument/2006/relationships" xmlns:p="http://schemas.openxmlformats.org/presentationml/2006/main">
+  <p:cSld>
+    <p:bg>
+      <p:bgRef idx="1001">
+        <a:schemeClr val="bg1"/>
+      </p:bgRef>
+    </p:bg>
+    <p:spTree>
+      <p:nvGrpSpPr>
+        <p:cNvPr id="1" name=""/>
+        <p:cNvGrpSpPr/>
+        <p:nvPr/>
+      </p:nvGrpSpPr>
+      <p:grpSpPr>
+        <a:xfrm>
+          <a:off x="0" y="0"/>
+          <a:ext cx="0" cy="0"/>
+          <a:chOff x="0" y="0"/>
+          <a:chExt cx="0" cy="0"/>
+        </a:xfrm>
+      </p:grpSpPr>
+      <p:sp>
+        <p:nvSpPr>
+          <p:cNvPr id="2" name="Header Placeholder 1"/>
+          <p:cNvSpPr>
+            <a:spLocks noGrp="1"/>
+          </p:cNvSpPr>
+          <p:nvPr>
+            <p:ph type="hdr" sz="quarter"/>
+          </p:nvPr>
+        </p:nvSpPr>
+        <p:spPr>
+          <a:xfrm>
+            <a:off x="0" y="0"/>
+            <a:ext cx="2971800" cy="458788"/>
+          </a:xfrm>
+          <a:prstGeom prst="rect">
+            <a:avLst/>
+          </a:prstGeom>
+        </p:spPr>
+        <p:txBody>
+          <a:bodyPr vert="horz" lIns="91440" tIns="45720" rIns="91440" bIns="45720" rtlCol="0"/>
+          <a:lstStyle>
+            <a:lvl1pPr algn="l">
+              <a:defRPr sz="1200"/>
+            </a:lvl1pPr>
+          </a:lstStyle>
+          <a:p>
+            <a:endParaRPr lang="en-US"/>
+          </a:p>
+        </p:txBody>
+      </p:sp>
+      <p:sp>
+        <p:nvSpPr>
+          <p:cNvPr id="3" name="Date Placeholder 2"/>
+          <p:cNvSpPr>
+            <a:spLocks noGrp="1"/>
+          </p:cNvSpPr>
+          <p:nvPr>
+            <p:ph type="dt" idx="1"/>
+          </p:nvPr>
+        </p:nvSpPr>
+        <p:spPr>
+          <a:xfrm>
+            <a:off x="3884613" y="0"/>
+            <a:ext cx="2971800" cy="458788"/>
+          </a:xfrm>
+          <a:prstGeom prst="rect">
+            <a:avLst/>
+          </a:prstGeom>
+        </p:spPr>
+        <p:txBody>
+          <a:bodyPr vert="horz" lIns="91440" tIns="45720" rIns="91440" bIns="45720" rtlCol="0"/>
+          <a:lstStyle>
+            <a:lvl1pPr algn="r">
+              <a:defRPr sz="1200"/>
+            </a:lvl1pPr>
+          </a:lstStyle>
+          <a:p>
+            <a:fld id="{91E602C1-FD39-474B-8E9E-3C82FC4D49CF}" type="datetime1">
+              <a:rPr lang="en-US" smtClean="0"/>
+              <a:t>6/2/2026</a:t>
+            </a:fld>
+            <a:endParaRPr lang="en-US"/>
+          </a:p>
+        </p:txBody>
+      </p:sp>
+      <p:sp>
+        <p:nvSpPr>
+          <p:cNvPr id="4" name="Slide Image Placeholder 3"/>
+          <p:cNvSpPr>
+            <a:spLocks noGrp="1" noRot="1" noChangeAspect="1"/>
+          </p:cNvSpPr>
+          <p:nvPr>
+            <p:ph type="sldImg" idx="2"/>
+          </p:nvPr>
+        </p:nvSpPr>
+        <p:spPr>
+          <a:xfrm>
+            <a:off x="685800" y="1143000"/>
+            <a:ext cx="5486400" cy="3086100"/>
+          </a:xfrm>
+          <a:prstGeom prst="rect">
+            <a:avLst/>
+          </a:prstGeom>
+          <a:noFill/>
+          <a:ln w="12700">
+            <a:solidFill>
+              <a:prstClr val="black"/>
+            </a:solidFill>
+          </a:ln>
+        </p:spPr>
+        <p:txBody>
+          <a:bodyPr vert="horz" lIns="91440" tIns="45720" rIns="91440" bIns="45720" rtlCol="0" anchor="ctr"/>
+          <a:lstStyle/>
+          <a:p>
+            <a:endParaRPr lang="en-US"/>
+          </a:p>
+        </p:txBody>
+      </p:sp>
+      <p:sp>
+        <p:nvSpPr>
+          <p:cNvPr id="5" name="Notes Placeholder 4"/>
+          <p:cNvSpPr>
+            <a:spLocks noGrp="1"/>
+          </p:cNvSpPr>
+          <p:nvPr>
+            <p:ph type="body" sz="quarter" idx="3"/>
+          </p:nvPr>
+        </p:nvSpPr>
+        <p:spPr>
+          <a:xfrm>
+            <a:off x="685800" y="4400550"/>
+            <a:ext cx="5486400" cy="3600450"/>
+          </a:xfrm>
+          <a:prstGeom prst="rect">
+            <a:avLst/>
+          </a:prstGeom>
+        </p:spPr>
+        <p:txBody>
+          <a:bodyPr vert="horz" lIns="91440" tIns="45720" rIns="91440" bIns="45720" rtlCol="0"/>
+          <a:lstStyle/>
+          <a:p>
+            <a:pPr lvl="0"/>
+            <a:r>
+              <a:rPr lang="en-US"/>
+              <a:t>Click to edit Master text styles</a:t>
+            </a:r>
+          </a:p>
+          <a:p>
+            <a:pPr lvl="1"/>
+            <a:r>
+              <a:rPr lang="en-US"/>
+              <a:t>Second level</a:t>
+            </a:r>
+          </a:p>
+          <a:p>
+            <a:pPr lvl="2"/>
+            <a:r>
+              <a:rPr lang="en-US"/>
+              <a:t>Third level</a:t>
+            </a:r>
+          </a:p>
+          <a:p>
+            <a:pPr lvl="3"/>
+            <a:r>
+              <a:rPr lang="en-US"/>
+              <a:t>Fourth level</a:t>
+            </a:r>
+          </a:p>
+          <a:p>
+            <a:pPr lvl="4"/>
+            <a:r>
+              <a:rPr lang="en-US"/>
+              <a:t>Fifth level</a:t>
+            </a:r>
+          </a:p>
+        </p:txBody>
+      </p:sp>
+      <p:sp>
+        <p:nvSpPr>
+          <p:cNvPr id="6" name="Footer Placeholder 5"/>
+          <p:cNvSpPr>
+            <a:spLocks noGrp="1"/>
+          </p:cNvSpPr>
+          <p:nvPr>
+            <p:ph type="ftr" sz="quarter" idx="4"/>
+          </p:nvPr>
+        </p:nvSpPr>
+        <p:spPr>
+          <a:xfrm>
+            <a:off x="0" y="8685213"/>
+            <a:ext cx="2971800" cy="458787"/>
+          </a:xfrm>
+          <a:prstGeom prst="rect">
+            <a:avLst/>
+          </a:prstGeom>
+        </p:spPr>
+        <p:txBody>
+          <a:bodyPr vert="horz" lIns="91440" tIns="45720" rIns="91440" bIns="45720" rtlCol="0" anchor="b"/>
+          <a:lstStyle>
+            <a:lvl1pPr algn="l">
+              <a:defRPr sz="1200"/>
+            </a:lvl1pPr>
+          </a:lstStyle>
+          <a:p>
+            <a:endParaRPr lang="en-US"/>
+          </a:p>
+        </p:txBody>
+      </p:sp>
+      <p:sp>
+        <p:nvSpPr>
+          <p:cNvPr id="7" name="Slide Number Placeholder 6"/>
+          <p:cNvSpPr>
+            <a:spLocks noGrp="1"/>
+          </p:cNvSpPr>
+          <p:nvPr>
+            <p:ph type="sldNum" sz="quarter" idx="5"/>
+          </p:nvPr>
+        </p:nvSpPr>
+        <p:spPr>
+          <a:xfrm>
+            <a:off x="3884613" y="8685213"/>
+            <a:ext cx="2971800" cy="458787"/>
+          </a:xfrm>
+          <a:prstGeom prst="rect">
+            <a:avLst/>
+          </a:prstGeom>
+        </p:spPr>
+        <p:txBody>
+          <a:bodyPr vert="horz" lIns="91440" tIns="45720" rIns="91440" bIns="45720" rtlCol="0" anchor="b"/>
+          <a:lstStyle>
+            <a:lvl1pPr algn="r">
+              <a:defRPr sz="1200"/>
+            </a:lvl1pPr>
+          </a:lstStyle>
+          <a:p>
+            <a:fld id="{322181BD-61E0-402A-A10D-C20849929C11}" type="slidenum">
+              <a:rPr lang="en-US" smtClean="0"/>
+              <a:t>‹#›</a:t>
+            </a:fld>
+            <a:endParaRPr lang="en-US"/>
+          </a:p>
+        </p:txBody>
+      </p:sp>
+    </p:spTree>
+    <p:extLst>
+      <p:ext uri="{BB962C8B-B14F-4D97-AF65-F5344CB8AC3E}">
+        <p14:creationId xmlns:p14="http://schemas.microsoft.com/office/powerpoint/2010/main" val="3444678100"/>
+      </p:ext>
+    </p:extLst>
+  </p:cSld>
+  <p:clrMap bg1="lt1" tx1="dk1" bg2="lt2" tx2="dk2" accent1="accent1" accent2="accent2" accent3="accent3" accent4="accent4" accent5="accent5" accent6="accent6" hlink="hlink" folHlink="folHlink"/>
+  <p:hf hdr="0" ftr="0" dt="0"/>
+  <p:notesStyle>
+    <a:lvl1pPr marL="0" algn="l" defTabSz="914400" rtl="0" eaLnBrk="1" latinLnBrk="0" hangingPunct="1">
+      <a:defRPr sz="1200" kern="1200">
+        <a:solidFill>
+          <a:schemeClr val="tx1"/>
+        </a:solidFill>
+        <a:latin typeface="+mn-lt"/>
+        <a:ea typeface="+mn-ea"/>
+        <a:cs typeface="+mn-cs"/>
+      </a:defRPr>
+    </a:lvl1pPr>
+    <a:lvl2pPr marL="457200" algn="l" defTabSz="914400" rtl="0" eaLnBrk="1" latinLnBrk="0" hangingPunct="1">
+      <a:defRPr sz="1200" kern="1200">
+        <a:solidFill>
+          <a:schemeClr val="tx1"/>
+        </a:solidFill>
+        <a:latin typeface="+mn-lt"/>
+        <a:ea typeface="+mn-ea"/>
+        <a:cs typeface="+mn-cs"/>
+      </a:defRPr>
+    </a:lvl2pPr>
+    <a:lvl3pPr marL="914400" algn="l" defTabSz="914400" rtl="0" eaLnBrk="1" latinLnBrk="0" hangingPunct="1">
+      <a:defRPr sz="1200" kern="1200">
+        <a:solidFill>
+          <a:schemeClr val="tx1"/>
+        </a:solidFill>
+        <a:latin typeface="+mn-lt"/>
+        <a:ea typeface="+mn-ea"/>
+        <a:cs typeface="+mn-cs"/>
+      </a:defRPr>
+    </a:lvl3pPr>
+    <a:lvl4pPr marL="1371600" algn="l" defTabSz="914400" rtl="0" eaLnBrk="1" latinLnBrk="0" hangingPunct="1">
+      <a:defRPr sz="1200" kern="1200">
+        <a:solidFill>
+          <a:schemeClr val="tx1"/>
+        </a:solidFill>
+        <a:latin typeface="+mn-lt"/>
+        <a:ea typeface="+mn-ea"/>
+        <a:cs typeface="+mn-cs"/>
+      </a:defRPr>
+    </a:lvl4pPr>
+    <a:lvl5pPr marL="1828800" algn="l" defTabSz="914400" rtl="0" eaLnBrk="1" latinLnBrk="0" hangingPunct="1">
+      <a:defRPr sz="1200" kern="1200">
+        <a:solidFill>
+          <a:schemeClr val="tx1"/>
+        </a:solidFill>
+        <a:latin typeface="+mn-lt"/>
+        <a:ea typeface="+mn-ea"/>
+        <a:cs typeface="+mn-cs"/>
+      </a:defRPr>
+    </a:lvl5pPr>
+    <a:lvl6pPr marL="2286000" algn="l" defTabSz="914400" rtl="0" eaLnBrk="1" latinLnBrk="0" hangingPunct="1">
+      <a:defRPr sz="1200" kern="1200">
+        <a:solidFill>
+          <a:schemeClr val="tx1"/>
+        </a:solidFill>
+        <a:latin typeface="+mn-lt"/>
+        <a:ea typeface="+mn-ea"/>
+        <a:cs typeface="+mn-cs"/>
+      </a:defRPr>
+    </a:lvl6pPr>
+    <a:lvl7pPr marL="2743200" algn="l" defTabSz="914400" rtl="0" eaLnBrk="1" latinLnBrk="0" hangingPunct="1">
+      <a:defRPr sz="1200" kern="1200">
+        <a:solidFill>
+          <a:schemeClr val="tx1"/>
+        </a:solidFill>
+        <a:latin typeface="+mn-lt"/>
+        <a:ea typeface="+mn-ea"/>
+        <a:cs typeface="+mn-cs"/>
+      </a:defRPr>
+    </a:lvl7pPr>
+    <a:lvl8pPr marL="3200400" algn="l" defTabSz="914400" rtl="0" eaLnBrk="1" latinLnBrk="0" hangingPunct="1">
+      <a:defRPr sz="1200" kern="1200">
+        <a:solidFill>
+          <a:schemeClr val="tx1"/>
+        </a:solidFill>
+        <a:latin typeface="+mn-lt"/>
+        <a:ea typeface="+mn-ea"/>
+        <a:cs typeface="+mn-cs"/>
+      </a:defRPr>
+    </a:lvl8pPr>
+    <a:lvl9pPr marL="3657600" algn="l" defTabSz="914400" rtl="0" eaLnBrk="1" latinLnBrk="0" hangingPunct="1">
+      <a:defRPr sz="1200" kern="1200">
+        <a:solidFill>
+          <a:schemeClr val="tx1"/>
+        </a:solidFill>
+        <a:latin typeface="+mn-lt"/>
+        <a:ea typeface="+mn-ea"/>
+        <a:cs typeface="+mn-cs"/>
+      </a:defRPr>
+    </a:lvl9pPr>
+  </p:notesStyle>
+</p:notesMaster>
+</file>
+
 <file path=ppt/slideLayouts/slideLayout1.xml><?xml version="1.0" encoding="utf-8"?>
 <p:sldLayout xmlns:a="http://schemas.openxmlformats.org/drawingml/2006/main" xmlns:r="http://schemas.openxmlformats.org/officeDocument/2006/relationships" xmlns:p="http://schemas.openxmlformats.org/presentationml/2006/main" type="title" preserve="1">
   <p:cSld name="Title Slide">
@@ -325,7 +871,7 @@
           <a:bodyPr/>
           <a:lstStyle/>
           <a:p>
-            <a:fld id="{5BCAD085-E8A6-8845-BD4E-CB4CCA059FC4}" type="datetimeFigureOut">
+            <a:fld id="{DBBAC57F-4FCA-491A-82FB-556EC55060BC}" type="datetime1">
               <a:rPr lang="en-US" smtClean="0"/>
               <a:t>6/2/2026</a:t>
             </a:fld>
@@ -362,7 +908,15 @@
             <p:ph type="sldNum" sz="quarter" idx="12"/>
           </p:nvPr>
         </p:nvSpPr>
-        <p:spPr/>
+        <p:spPr>
+          <a:xfrm>
+            <a:off x="6553200" y="6356350"/>
+            <a:ext cx="2133600" cy="365125"/>
+          </a:xfrm>
+          <a:prstGeom prst="rect">
+            <a:avLst/>
+          </a:prstGeom>
+        </p:spPr>
         <p:txBody>
           <a:bodyPr/>
           <a:lstStyle/>
@@ -493,7 +1047,7 @@
           <a:bodyPr/>
           <a:lstStyle/>
           <a:p>
-            <a:fld id="{5BCAD085-E8A6-8845-BD4E-CB4CCA059FC4}" type="datetimeFigureOut">
+            <a:fld id="{B322F70C-7C27-44A3-A6D7-82F017C5F749}" type="datetime1">
               <a:rPr lang="en-US" smtClean="0"/>
               <a:t>6/2/2026</a:t>
             </a:fld>
@@ -530,7 +1084,15 @@
             <p:ph type="sldNum" sz="quarter" idx="12"/>
           </p:nvPr>
         </p:nvSpPr>
-        <p:spPr/>
+        <p:spPr>
+          <a:xfrm>
+            <a:off x="6553200" y="6356350"/>
+            <a:ext cx="2133600" cy="365125"/>
+          </a:xfrm>
+          <a:prstGeom prst="rect">
+            <a:avLst/>
+          </a:prstGeom>
+        </p:spPr>
         <p:txBody>
           <a:bodyPr/>
           <a:lstStyle/>
@@ -671,7 +1233,7 @@
           <a:bodyPr/>
           <a:lstStyle/>
           <a:p>
-            <a:fld id="{5BCAD085-E8A6-8845-BD4E-CB4CCA059FC4}" type="datetimeFigureOut">
+            <a:fld id="{13FFD299-4B9E-416E-9560-408B60443B50}" type="datetime1">
               <a:rPr lang="en-US" smtClean="0"/>
               <a:t>6/2/2026</a:t>
             </a:fld>
@@ -708,7 +1270,15 @@
             <p:ph type="sldNum" sz="quarter" idx="12"/>
           </p:nvPr>
         </p:nvSpPr>
-        <p:spPr/>
+        <p:spPr>
+          <a:xfrm>
+            <a:off x="6553200" y="6356350"/>
+            <a:ext cx="2133600" cy="365125"/>
+          </a:xfrm>
+          <a:prstGeom prst="rect">
+            <a:avLst/>
+          </a:prstGeom>
+        </p:spPr>
         <p:txBody>
           <a:bodyPr/>
           <a:lstStyle/>
@@ -839,7 +1409,7 @@
           <a:bodyPr/>
           <a:lstStyle/>
           <a:p>
-            <a:fld id="{5BCAD085-E8A6-8845-BD4E-CB4CCA059FC4}" type="datetimeFigureOut">
+            <a:fld id="{5496A48F-2C65-4B23-BCFE-03C0E5AD78F3}" type="datetime1">
               <a:rPr lang="en-US" smtClean="0"/>
               <a:t>6/2/2026</a:t>
             </a:fld>
@@ -876,7 +1446,15 @@
             <p:ph type="sldNum" sz="quarter" idx="12"/>
           </p:nvPr>
         </p:nvSpPr>
-        <p:spPr/>
+        <p:spPr>
+          <a:xfrm>
+            <a:off x="6553200" y="6356350"/>
+            <a:ext cx="2133600" cy="365125"/>
+          </a:xfrm>
+          <a:prstGeom prst="rect">
+            <a:avLst/>
+          </a:prstGeom>
+        </p:spPr>
         <p:txBody>
           <a:bodyPr/>
           <a:lstStyle/>
@@ -1084,7 +1662,7 @@
           <a:bodyPr/>
           <a:lstStyle/>
           <a:p>
-            <a:fld id="{5BCAD085-E8A6-8845-BD4E-CB4CCA059FC4}" type="datetimeFigureOut">
+            <a:fld id="{92E9A1EC-4414-4954-8B8E-79607052AB91}" type="datetime1">
               <a:rPr lang="en-US" smtClean="0"/>
               <a:t>6/2/2026</a:t>
             </a:fld>
@@ -1121,7 +1699,15 @@
             <p:ph type="sldNum" sz="quarter" idx="12"/>
           </p:nvPr>
         </p:nvSpPr>
-        <p:spPr/>
+        <p:spPr>
+          <a:xfrm>
+            <a:off x="6553200" y="6356350"/>
+            <a:ext cx="2133600" cy="365125"/>
+          </a:xfrm>
+          <a:prstGeom prst="rect">
+            <a:avLst/>
+          </a:prstGeom>
+        </p:spPr>
         <p:txBody>
           <a:bodyPr/>
           <a:lstStyle/>
@@ -1369,7 +1955,7 @@
           <a:bodyPr/>
           <a:lstStyle/>
           <a:p>
-            <a:fld id="{5BCAD085-E8A6-8845-BD4E-CB4CCA059FC4}" type="datetimeFigureOut">
+            <a:fld id="{57C53034-A422-490F-87BB-C1B26810D76C}" type="datetime1">
               <a:rPr lang="en-US" smtClean="0"/>
               <a:t>6/2/2026</a:t>
             </a:fld>
@@ -1406,7 +1992,15 @@
             <p:ph type="sldNum" sz="quarter" idx="12"/>
           </p:nvPr>
         </p:nvSpPr>
-        <p:spPr/>
+        <p:spPr>
+          <a:xfrm>
+            <a:off x="6553200" y="6356350"/>
+            <a:ext cx="2133600" cy="365125"/>
+          </a:xfrm>
+          <a:prstGeom prst="rect">
+            <a:avLst/>
+          </a:prstGeom>
+        </p:spPr>
         <p:txBody>
           <a:bodyPr/>
           <a:lstStyle/>
@@ -1788,7 +2382,7 @@
           <a:bodyPr/>
           <a:lstStyle/>
           <a:p>
-            <a:fld id="{5BCAD085-E8A6-8845-BD4E-CB4CCA059FC4}" type="datetimeFigureOut">
+            <a:fld id="{26C1EA4C-E199-4B03-ADEB-24B992B8EA05}" type="datetime1">
               <a:rPr lang="en-US" smtClean="0"/>
               <a:t>6/2/2026</a:t>
             </a:fld>
@@ -1825,7 +2419,15 @@
             <p:ph type="sldNum" sz="quarter" idx="12"/>
           </p:nvPr>
         </p:nvSpPr>
-        <p:spPr/>
+        <p:spPr>
+          <a:xfrm>
+            <a:off x="6553200" y="6356350"/>
+            <a:ext cx="2133600" cy="365125"/>
+          </a:xfrm>
+          <a:prstGeom prst="rect">
+            <a:avLst/>
+          </a:prstGeom>
+        </p:spPr>
         <p:txBody>
           <a:bodyPr/>
           <a:lstStyle/>
@@ -1905,7 +2507,7 @@
           <a:bodyPr/>
           <a:lstStyle/>
           <a:p>
-            <a:fld id="{5BCAD085-E8A6-8845-BD4E-CB4CCA059FC4}" type="datetimeFigureOut">
+            <a:fld id="{6A5E25AB-CC8A-4B57-8557-C3DD5219E309}" type="datetime1">
               <a:rPr lang="en-US" smtClean="0"/>
               <a:t>6/2/2026</a:t>
             </a:fld>
@@ -1928,29 +2530,6 @@
           <a:bodyPr/>
           <a:lstStyle/>
           <a:p>
-            <a:endParaRPr lang="en-US"/>
-          </a:p>
-        </p:txBody>
-      </p:sp>
-      <p:sp>
-        <p:nvSpPr>
-          <p:cNvPr id="5" name="Slide Number Placeholder 4"/>
-          <p:cNvSpPr>
-            <a:spLocks noGrp="1"/>
-          </p:cNvSpPr>
-          <p:nvPr>
-            <p:ph type="sldNum" sz="quarter" idx="12"/>
-          </p:nvPr>
-        </p:nvSpPr>
-        <p:spPr/>
-        <p:txBody>
-          <a:bodyPr/>
-          <a:lstStyle/>
-          <a:p>
-            <a:fld id="{C1FF6DA9-008F-8B48-92A6-B652298478BF}" type="slidenum">
-              <a:rPr lang="en-US" smtClean="0"/>
-              <a:t>‹#›</a:t>
-            </a:fld>
             <a:endParaRPr lang="en-US"/>
           </a:p>
         </p:txBody>
@@ -1987,6 +2566,53 @@
       </p:grpSpPr>
       <p:sp>
         <p:nvSpPr>
+          <p:cNvPr id="5" name="Oval 4">
+            <a:extLst>
+              <a:ext uri="{FF2B5EF4-FFF2-40B4-BE49-F238E27FC236}">
+                <a16:creationId xmlns:a16="http://schemas.microsoft.com/office/drawing/2014/main" id="{335DC333-F6D0-00C2-5031-F8E984B44497}"/>
+              </a:ext>
+            </a:extLst>
+          </p:cNvPr>
+          <p:cNvSpPr/>
+          <p:nvPr userDrawn="1"/>
+        </p:nvSpPr>
+        <p:spPr>
+          <a:xfrm>
+            <a:off x="8679180" y="290512"/>
+            <a:ext cx="375920" cy="365125"/>
+          </a:xfrm>
+          <a:prstGeom prst="ellipse">
+            <a:avLst/>
+          </a:prstGeom>
+          <a:solidFill>
+            <a:srgbClr val="002060"/>
+          </a:solidFill>
+        </p:spPr>
+        <p:style>
+          <a:lnRef idx="1">
+            <a:schemeClr val="accent1"/>
+          </a:lnRef>
+          <a:fillRef idx="3">
+            <a:schemeClr val="accent1"/>
+          </a:fillRef>
+          <a:effectRef idx="2">
+            <a:schemeClr val="accent1"/>
+          </a:effectRef>
+          <a:fontRef idx="minor">
+            <a:schemeClr val="lt1"/>
+          </a:fontRef>
+        </p:style>
+        <p:txBody>
+          <a:bodyPr rtlCol="0" anchor="ctr"/>
+          <a:lstStyle/>
+          <a:p>
+            <a:pPr algn="ctr"/>
+            <a:endParaRPr lang="en-US"/>
+          </a:p>
+        </p:txBody>
+      </p:sp>
+      <p:sp>
+        <p:nvSpPr>
           <p:cNvPr id="2" name="Date Placeholder 1"/>
           <p:cNvSpPr>
             <a:spLocks noGrp="1"/>
@@ -2000,7 +2626,7 @@
           <a:bodyPr/>
           <a:lstStyle/>
           <a:p>
-            <a:fld id="{5BCAD085-E8A6-8845-BD4E-CB4CCA059FC4}" type="datetimeFigureOut">
+            <a:fld id="{AEB9A11C-4C4D-443A-9EDE-122E473CB155}" type="datetime1">
               <a:rPr lang="en-US" smtClean="0"/>
               <a:t>6/2/2026</a:t>
             </a:fld>
@@ -2037,16 +2663,29 @@
             <p:ph type="sldNum" sz="quarter" idx="12"/>
           </p:nvPr>
         </p:nvSpPr>
-        <p:spPr/>
+        <p:spPr>
+          <a:xfrm>
+            <a:off x="8679180" y="290512"/>
+            <a:ext cx="375920" cy="365125"/>
+          </a:xfrm>
+          <a:prstGeom prst="rect">
+            <a:avLst/>
+          </a:prstGeom>
+        </p:spPr>
         <p:txBody>
           <a:bodyPr/>
-          <a:lstStyle/>
+          <a:lstStyle>
+            <a:lvl1pPr algn="ctr">
+              <a:defRPr/>
+            </a:lvl1pPr>
+          </a:lstStyle>
           <a:p>
             <a:fld id="{C1FF6DA9-008F-8B48-92A6-B652298478BF}" type="slidenum">
               <a:rPr lang="en-US" smtClean="0"/>
+              <a:pPr/>
               <a:t>‹#›</a:t>
             </a:fld>
-            <a:endParaRPr lang="en-US"/>
+            <a:endParaRPr lang="en-US" dirty="0"/>
           </a:p>
         </p:txBody>
       </p:sp>
@@ -2275,7 +2914,7 @@
           <a:bodyPr/>
           <a:lstStyle/>
           <a:p>
-            <a:fld id="{5BCAD085-E8A6-8845-BD4E-CB4CCA059FC4}" type="datetimeFigureOut">
+            <a:fld id="{6B0074C2-2F64-4AC7-B94D-579EE27CEDBB}" type="datetime1">
               <a:rPr lang="en-US" smtClean="0"/>
               <a:t>6/2/2026</a:t>
             </a:fld>
@@ -2312,7 +2951,15 @@
             <p:ph type="sldNum" sz="quarter" idx="12"/>
           </p:nvPr>
         </p:nvSpPr>
-        <p:spPr/>
+        <p:spPr>
+          <a:xfrm>
+            <a:off x="6553200" y="6356350"/>
+            <a:ext cx="2133600" cy="365125"/>
+          </a:xfrm>
+          <a:prstGeom prst="rect">
+            <a:avLst/>
+          </a:prstGeom>
+        </p:spPr>
         <p:txBody>
           <a:bodyPr/>
           <a:lstStyle/>
@@ -2527,7 +3174,7 @@
           <a:bodyPr/>
           <a:lstStyle/>
           <a:p>
-            <a:fld id="{5BCAD085-E8A6-8845-BD4E-CB4CCA059FC4}" type="datetimeFigureOut">
+            <a:fld id="{9248E289-03AF-4763-A847-3AE97CFA1361}" type="datetime1">
               <a:rPr lang="en-US" smtClean="0"/>
               <a:t>6/2/2026</a:t>
             </a:fld>
@@ -2564,7 +3211,15 @@
             <p:ph type="sldNum" sz="quarter" idx="12"/>
           </p:nvPr>
         </p:nvSpPr>
-        <p:spPr/>
+        <p:spPr>
+          <a:xfrm>
+            <a:off x="7010400" y="66675"/>
+            <a:ext cx="2133600" cy="365125"/>
+          </a:xfrm>
+          <a:prstGeom prst="rect">
+            <a:avLst/>
+          </a:prstGeom>
+        </p:spPr>
         <p:txBody>
           <a:bodyPr/>
           <a:lstStyle/>
@@ -2656,8 +3311,8 @@
         </p:nvSpPr>
         <p:spPr>
           <a:xfrm>
-            <a:off x="457200" y="1600200"/>
-            <a:ext cx="8229600" cy="4525963"/>
+            <a:off x="457200" y="1600201"/>
+            <a:ext cx="8229600" cy="2857500"/>
           </a:xfrm>
           <a:prstGeom prst="rect">
             <a:avLst/>
@@ -2717,7 +3372,7 @@
         </p:nvSpPr>
         <p:spPr>
           <a:xfrm>
-            <a:off x="457200" y="6356350"/>
+            <a:off x="457200" y="4640264"/>
             <a:ext cx="2133600" cy="365125"/>
           </a:xfrm>
           <a:prstGeom prst="rect">
@@ -2738,7 +3393,7 @@
             </a:lvl1pPr>
           </a:lstStyle>
           <a:p>
-            <a:fld id="{5BCAD085-E8A6-8845-BD4E-CB4CCA059FC4}" type="datetimeFigureOut">
+            <a:fld id="{ADADDC00-00A2-4CD0-9FF4-A62C33463821}" type="datetime1">
               <a:rPr lang="en-US" smtClean="0"/>
               <a:t>6/2/2026</a:t>
             </a:fld>
@@ -2758,7 +3413,7 @@
         </p:nvSpPr>
         <p:spPr>
           <a:xfrm>
-            <a:off x="3124200" y="6356350"/>
+            <a:off x="2870200" y="4640263"/>
             <a:ext cx="2895600" cy="365125"/>
           </a:xfrm>
           <a:prstGeom prst="rect">
@@ -2779,13 +3434,19 @@
             </a:lvl1pPr>
           </a:lstStyle>
           <a:p>
-            <a:endParaRPr lang="en-US"/>
-          </a:p>
-        </p:txBody>
-      </p:sp>
-      <p:sp>
-        <p:nvSpPr>
-          <p:cNvPr id="6" name="Slide Number Placeholder 5"/>
+            <a:endParaRPr lang="en-US" dirty="0"/>
+          </a:p>
+        </p:txBody>
+      </p:sp>
+      <p:sp>
+        <p:nvSpPr>
+          <p:cNvPr id="7" name="Slide Number Placeholder 6">
+            <a:extLst>
+              <a:ext uri="{FF2B5EF4-FFF2-40B4-BE49-F238E27FC236}">
+                <a16:creationId xmlns:a16="http://schemas.microsoft.com/office/drawing/2014/main" id="{6F6CC0CF-8796-FAE6-94EA-7ECBDDC1AA8A}"/>
+              </a:ext>
+            </a:extLst>
+          </p:cNvPr>
           <p:cNvSpPr>
             <a:spLocks noGrp="1"/>
           </p:cNvSpPr>
@@ -2795,8 +3456,8 @@
         </p:nvSpPr>
         <p:spPr>
           <a:xfrm>
-            <a:off x="6553200" y="6356350"/>
-            <a:ext cx="2133600" cy="365125"/>
+            <a:off x="7086600" y="274638"/>
+            <a:ext cx="2057400" cy="274637"/>
           </a:xfrm>
           <a:prstGeom prst="rect">
             <a:avLst/>
@@ -2808,19 +3469,18 @@
             <a:lvl1pPr algn="r">
               <a:defRPr sz="1200">
                 <a:solidFill>
-                  <a:schemeClr val="tx1">
-                    <a:tint val="75000"/>
-                  </a:schemeClr>
+                  <a:schemeClr val="bg1"/>
                 </a:solidFill>
               </a:defRPr>
             </a:lvl1pPr>
           </a:lstStyle>
           <a:p>
-            <a:fld id="{C1FF6DA9-008F-8B48-92A6-B652298478BF}" type="slidenum">
+            <a:fld id="{265F75E0-50D5-439F-A791-6B91EEBFFF53}" type="slidenum">
               <a:rPr lang="en-US" smtClean="0"/>
+              <a:pPr/>
               <a:t>‹#›</a:t>
             </a:fld>
-            <a:endParaRPr lang="en-US"/>
+            <a:endParaRPr lang="en-US" dirty="0"/>
           </a:p>
         </p:txBody>
       </p:sp>
@@ -2845,6 +3505,7 @@
     <p:sldLayoutId id="2147483658" r:id="rId10"/>
     <p:sldLayoutId id="2147483659" r:id="rId11"/>
   </p:sldLayoutIdLst>
+  <p:hf hdr="0" ftr="0" dt="0"/>
   <p:txStyles>
     <p:titleStyle>
       <a:lvl1pPr algn="ctr" defTabSz="457200" rtl="0" eaLnBrk="1" latinLnBrk="0" hangingPunct="1">
@@ -3237,15 +3898,183 @@
           <a:p>
             <a:pPr algn="l"/>
             <a:r>
-              <a:rPr sz="2700" b="1" i="0">
+              <a:rPr sz="2700" b="1" i="0" dirty="0" err="1">
                 <a:solidFill>
                   <a:srgbClr val="FFFFFF"/>
                 </a:solidFill>
                 <a:latin typeface="Trebuchet MS"/>
               </a:rPr>
-              <a:t>Розробка та програмна реалізація алгоритму
-оптимізації розподілу вантажів у транспортній мережі</a:t>
-            </a:r>
+              <a:t>Розробка</a:t>
+            </a:r>
+            <a:r>
+              <a:rPr sz="2700" b="1" i="0" dirty="0">
+                <a:solidFill>
+                  <a:srgbClr val="FFFFFF"/>
+                </a:solidFill>
+                <a:latin typeface="Trebuchet MS"/>
+              </a:rPr>
+              <a:t> </a:t>
+            </a:r>
+            <a:r>
+              <a:rPr sz="2700" b="1" i="0" dirty="0" err="1">
+                <a:solidFill>
+                  <a:srgbClr val="FFFFFF"/>
+                </a:solidFill>
+                <a:latin typeface="Trebuchet MS"/>
+              </a:rPr>
+              <a:t>та</a:t>
+            </a:r>
+            <a:r>
+              <a:rPr sz="2700" b="1" i="0" dirty="0">
+                <a:solidFill>
+                  <a:srgbClr val="FFFFFF"/>
+                </a:solidFill>
+                <a:latin typeface="Trebuchet MS"/>
+              </a:rPr>
+              <a:t> </a:t>
+            </a:r>
+            <a:r>
+              <a:rPr sz="2700" b="1" i="0" dirty="0" err="1">
+                <a:solidFill>
+                  <a:srgbClr val="FFFFFF"/>
+                </a:solidFill>
+                <a:latin typeface="Trebuchet MS"/>
+              </a:rPr>
+              <a:t>програмна</a:t>
+            </a:r>
+            <a:r>
+              <a:rPr sz="2700" b="1" i="0" dirty="0">
+                <a:solidFill>
+                  <a:srgbClr val="FFFFFF"/>
+                </a:solidFill>
+                <a:latin typeface="Trebuchet MS"/>
+              </a:rPr>
+              <a:t> </a:t>
+            </a:r>
+            <a:r>
+              <a:rPr sz="2700" b="1" i="0" dirty="0" err="1">
+                <a:solidFill>
+                  <a:srgbClr val="FFFFFF"/>
+                </a:solidFill>
+                <a:latin typeface="Trebuchet MS"/>
+              </a:rPr>
+              <a:t>реалізація</a:t>
+            </a:r>
+            <a:r>
+              <a:rPr sz="2700" b="1" i="0" dirty="0">
+                <a:solidFill>
+                  <a:srgbClr val="FFFFFF"/>
+                </a:solidFill>
+                <a:latin typeface="Trebuchet MS"/>
+              </a:rPr>
+              <a:t> </a:t>
+            </a:r>
+            <a:r>
+              <a:rPr sz="2700" b="1" i="0" dirty="0" err="1">
+                <a:solidFill>
+                  <a:srgbClr val="FFFFFF"/>
+                </a:solidFill>
+                <a:latin typeface="Trebuchet MS"/>
+              </a:rPr>
+              <a:t>алгоритму</a:t>
+            </a:r>
+            <a:r>
+              <a:rPr sz="2700" b="1" i="0" dirty="0">
+                <a:solidFill>
+                  <a:srgbClr val="FFFFFF"/>
+                </a:solidFill>
+                <a:latin typeface="Trebuchet MS"/>
+              </a:rPr>
+              <a:t>
+</a:t>
+            </a:r>
+            <a:r>
+              <a:rPr sz="2700" b="1" i="0" dirty="0" err="1">
+                <a:solidFill>
+                  <a:srgbClr val="FFFFFF"/>
+                </a:solidFill>
+                <a:latin typeface="Trebuchet MS"/>
+              </a:rPr>
+              <a:t>оптимізації</a:t>
+            </a:r>
+            <a:r>
+              <a:rPr sz="2700" b="1" i="0" dirty="0">
+                <a:solidFill>
+                  <a:srgbClr val="FFFFFF"/>
+                </a:solidFill>
+                <a:latin typeface="Trebuchet MS"/>
+              </a:rPr>
+              <a:t> </a:t>
+            </a:r>
+            <a:r>
+              <a:rPr sz="2700" b="1" i="0" dirty="0" err="1">
+                <a:solidFill>
+                  <a:srgbClr val="FFFFFF"/>
+                </a:solidFill>
+                <a:latin typeface="Trebuchet MS"/>
+              </a:rPr>
+              <a:t>розподілу</a:t>
+            </a:r>
+            <a:r>
+              <a:rPr sz="2700" b="1" i="0" dirty="0">
+                <a:solidFill>
+                  <a:srgbClr val="FFFFFF"/>
+                </a:solidFill>
+                <a:latin typeface="Trebuchet MS"/>
+              </a:rPr>
+              <a:t> </a:t>
+            </a:r>
+            <a:r>
+              <a:rPr sz="2700" b="1" i="0" dirty="0" err="1">
+                <a:solidFill>
+                  <a:srgbClr val="FFFFFF"/>
+                </a:solidFill>
+                <a:latin typeface="Trebuchet MS"/>
+              </a:rPr>
+              <a:t>вантажів</a:t>
+            </a:r>
+            <a:r>
+              <a:rPr sz="2700" b="1" i="0" dirty="0">
+                <a:solidFill>
+                  <a:srgbClr val="FFFFFF"/>
+                </a:solidFill>
+                <a:latin typeface="Trebuchet MS"/>
+              </a:rPr>
+              <a:t> у </a:t>
+            </a:r>
+            <a:r>
+              <a:rPr sz="2700" b="1" i="0" dirty="0" err="1">
+                <a:solidFill>
+                  <a:srgbClr val="FFFFFF"/>
+                </a:solidFill>
+                <a:latin typeface="Trebuchet MS"/>
+              </a:rPr>
+              <a:t>транспортній</a:t>
+            </a:r>
+            <a:r>
+              <a:rPr sz="2700" b="1" i="0" dirty="0">
+                <a:solidFill>
+                  <a:srgbClr val="FFFFFF"/>
+                </a:solidFill>
+                <a:latin typeface="Trebuchet MS"/>
+              </a:rPr>
+              <a:t> </a:t>
+            </a:r>
+            <a:r>
+              <a:rPr sz="2700" b="1" i="0" dirty="0" err="1">
+                <a:solidFill>
+                  <a:srgbClr val="FFFFFF"/>
+                </a:solidFill>
+                <a:latin typeface="Trebuchet MS"/>
+              </a:rPr>
+              <a:t>мережі</a:t>
+            </a:r>
+            <a:endParaRPr sz="2700" b="1" i="0" dirty="0">
+              <a:solidFill>
+                <a:srgbClr val="FFFFFF"/>
+              </a:solidFill>
+              <a:latin typeface="Trebuchet MS"/>
+            </a:endParaRPr>
           </a:p>
         </p:txBody>
       </p:sp>
@@ -3558,6 +4387,41 @@
           </a:solidFill>
         </p:spPr>
       </p:pic>
+      <p:sp>
+        <p:nvSpPr>
+          <p:cNvPr id="10" name="Slide Number Placeholder 9">
+            <a:extLst>
+              <a:ext uri="{FF2B5EF4-FFF2-40B4-BE49-F238E27FC236}">
+                <a16:creationId xmlns:a16="http://schemas.microsoft.com/office/drawing/2014/main" id="{179B7BEC-2536-D00D-33EC-0FA4E8488566}"/>
+              </a:ext>
+            </a:extLst>
+          </p:cNvPr>
+          <p:cNvSpPr>
+            <a:spLocks noGrp="1"/>
+          </p:cNvSpPr>
+          <p:nvPr>
+            <p:ph type="sldNum" sz="quarter" idx="12"/>
+          </p:nvPr>
+        </p:nvSpPr>
+        <p:spPr>
+          <a:xfrm>
+            <a:off x="8679180" y="290512"/>
+            <a:ext cx="375920" cy="365125"/>
+          </a:xfrm>
+        </p:spPr>
+        <p:txBody>
+          <a:bodyPr/>
+          <a:lstStyle/>
+          <a:p>
+            <a:fld id="{C1FF6DA9-008F-8B48-92A6-B652298478BF}" type="slidenum">
+              <a:rPr lang="en-US" smtClean="0"/>
+              <a:pPr/>
+              <a:t>10</a:t>
+            </a:fld>
+            <a:endParaRPr lang="en-US"/>
+          </a:p>
+        </p:txBody>
+      </p:sp>
     </p:spTree>
   </p:cSld>
   <p:clrMapOvr>
@@ -3693,6 +4557,41 @@
           </a:prstGeom>
         </p:spPr>
       </p:pic>
+      <p:sp>
+        <p:nvSpPr>
+          <p:cNvPr id="10" name="Slide Number Placeholder 9">
+            <a:extLst>
+              <a:ext uri="{FF2B5EF4-FFF2-40B4-BE49-F238E27FC236}">
+                <a16:creationId xmlns:a16="http://schemas.microsoft.com/office/drawing/2014/main" id="{F35B3A84-C5F2-FF41-7CA9-8EAC58D70E66}"/>
+              </a:ext>
+            </a:extLst>
+          </p:cNvPr>
+          <p:cNvSpPr>
+            <a:spLocks noGrp="1"/>
+          </p:cNvSpPr>
+          <p:nvPr>
+            <p:ph type="sldNum" sz="quarter" idx="12"/>
+          </p:nvPr>
+        </p:nvSpPr>
+        <p:spPr>
+          <a:xfrm>
+            <a:off x="8679180" y="290512"/>
+            <a:ext cx="375920" cy="365125"/>
+          </a:xfrm>
+        </p:spPr>
+        <p:txBody>
+          <a:bodyPr/>
+          <a:lstStyle/>
+          <a:p>
+            <a:fld id="{C1FF6DA9-008F-8B48-92A6-B652298478BF}" type="slidenum">
+              <a:rPr lang="en-US" smtClean="0"/>
+              <a:pPr/>
+              <a:t>11</a:t>
+            </a:fld>
+            <a:endParaRPr lang="en-US"/>
+          </a:p>
+        </p:txBody>
+      </p:sp>
     </p:spTree>
   </p:cSld>
   <p:clrMapOvr>
@@ -3828,6 +4727,41 @@
           </a:prstGeom>
         </p:spPr>
       </p:pic>
+      <p:sp>
+        <p:nvSpPr>
+          <p:cNvPr id="10" name="Slide Number Placeholder 9">
+            <a:extLst>
+              <a:ext uri="{FF2B5EF4-FFF2-40B4-BE49-F238E27FC236}">
+                <a16:creationId xmlns:a16="http://schemas.microsoft.com/office/drawing/2014/main" id="{E4E8BBFA-DF15-F550-A063-A3BD55C1BC61}"/>
+              </a:ext>
+            </a:extLst>
+          </p:cNvPr>
+          <p:cNvSpPr>
+            <a:spLocks noGrp="1"/>
+          </p:cNvSpPr>
+          <p:nvPr>
+            <p:ph type="sldNum" sz="quarter" idx="12"/>
+          </p:nvPr>
+        </p:nvSpPr>
+        <p:spPr>
+          <a:xfrm>
+            <a:off x="8679180" y="290512"/>
+            <a:ext cx="375920" cy="365125"/>
+          </a:xfrm>
+        </p:spPr>
+        <p:txBody>
+          <a:bodyPr/>
+          <a:lstStyle/>
+          <a:p>
+            <a:fld id="{C1FF6DA9-008F-8B48-92A6-B652298478BF}" type="slidenum">
+              <a:rPr lang="en-US" smtClean="0"/>
+              <a:pPr/>
+              <a:t>12</a:t>
+            </a:fld>
+            <a:endParaRPr lang="en-US"/>
+          </a:p>
+        </p:txBody>
+      </p:sp>
     </p:spTree>
   </p:cSld>
   <p:clrMapOvr>
@@ -5258,6 +6192,41 @@
           </a:p>
         </p:txBody>
       </p:sp>
+      <p:sp>
+        <p:nvSpPr>
+          <p:cNvPr id="40" name="Slide Number Placeholder 39">
+            <a:extLst>
+              <a:ext uri="{FF2B5EF4-FFF2-40B4-BE49-F238E27FC236}">
+                <a16:creationId xmlns:a16="http://schemas.microsoft.com/office/drawing/2014/main" id="{D1CA6BEA-11B2-E782-97F5-703C94C6BEC2}"/>
+              </a:ext>
+            </a:extLst>
+          </p:cNvPr>
+          <p:cNvSpPr>
+            <a:spLocks noGrp="1"/>
+          </p:cNvSpPr>
+          <p:nvPr>
+            <p:ph type="sldNum" sz="quarter" idx="12"/>
+          </p:nvPr>
+        </p:nvSpPr>
+        <p:spPr>
+          <a:xfrm>
+            <a:off x="8679180" y="290512"/>
+            <a:ext cx="375920" cy="365125"/>
+          </a:xfrm>
+        </p:spPr>
+        <p:txBody>
+          <a:bodyPr/>
+          <a:lstStyle/>
+          <a:p>
+            <a:fld id="{C1FF6DA9-008F-8B48-92A6-B652298478BF}" type="slidenum">
+              <a:rPr lang="en-US" smtClean="0"/>
+              <a:pPr/>
+              <a:t>13</a:t>
+            </a:fld>
+            <a:endParaRPr lang="en-US"/>
+          </a:p>
+        </p:txBody>
+      </p:sp>
     </p:spTree>
   </p:cSld>
   <p:clrMapOvr>
@@ -5394,6 +6363,41 @@
           </a:prstGeom>
         </p:spPr>
       </p:pic>
+      <p:sp>
+        <p:nvSpPr>
+          <p:cNvPr id="10" name="Slide Number Placeholder 9">
+            <a:extLst>
+              <a:ext uri="{FF2B5EF4-FFF2-40B4-BE49-F238E27FC236}">
+                <a16:creationId xmlns:a16="http://schemas.microsoft.com/office/drawing/2014/main" id="{FCB3A928-0F3A-4097-44B3-D4339935973B}"/>
+              </a:ext>
+            </a:extLst>
+          </p:cNvPr>
+          <p:cNvSpPr>
+            <a:spLocks noGrp="1"/>
+          </p:cNvSpPr>
+          <p:nvPr>
+            <p:ph type="sldNum" sz="quarter" idx="12"/>
+          </p:nvPr>
+        </p:nvSpPr>
+        <p:spPr>
+          <a:xfrm>
+            <a:off x="8679180" y="290512"/>
+            <a:ext cx="375920" cy="365125"/>
+          </a:xfrm>
+        </p:spPr>
+        <p:txBody>
+          <a:bodyPr/>
+          <a:lstStyle/>
+          <a:p>
+            <a:fld id="{C1FF6DA9-008F-8B48-92A6-B652298478BF}" type="slidenum">
+              <a:rPr lang="en-US" smtClean="0"/>
+              <a:pPr/>
+              <a:t>14</a:t>
+            </a:fld>
+            <a:endParaRPr lang="en-US" dirty="0"/>
+          </a:p>
+        </p:txBody>
+      </p:sp>
     </p:spTree>
   </p:cSld>
   <p:clrMapOvr>
@@ -6989,6 +7993,41 @@
           </a:p>
         </p:txBody>
       </p:sp>
+      <p:sp>
+        <p:nvSpPr>
+          <p:cNvPr id="42" name="Slide Number Placeholder 41">
+            <a:extLst>
+              <a:ext uri="{FF2B5EF4-FFF2-40B4-BE49-F238E27FC236}">
+                <a16:creationId xmlns:a16="http://schemas.microsoft.com/office/drawing/2014/main" id="{213391F4-A9D9-50FA-E06B-89DAD05669AE}"/>
+              </a:ext>
+            </a:extLst>
+          </p:cNvPr>
+          <p:cNvSpPr>
+            <a:spLocks noGrp="1"/>
+          </p:cNvSpPr>
+          <p:nvPr>
+            <p:ph type="sldNum" sz="quarter" idx="12"/>
+          </p:nvPr>
+        </p:nvSpPr>
+        <p:spPr>
+          <a:xfrm>
+            <a:off x="8679180" y="290512"/>
+            <a:ext cx="375920" cy="365125"/>
+          </a:xfrm>
+        </p:spPr>
+        <p:txBody>
+          <a:bodyPr/>
+          <a:lstStyle/>
+          <a:p>
+            <a:fld id="{C1FF6DA9-008F-8B48-92A6-B652298478BF}" type="slidenum">
+              <a:rPr lang="en-US" smtClean="0"/>
+              <a:pPr/>
+              <a:t>15</a:t>
+            </a:fld>
+            <a:endParaRPr lang="en-US"/>
+          </a:p>
+        </p:txBody>
+      </p:sp>
     </p:spTree>
   </p:cSld>
   <p:clrMapOvr>
@@ -8800,6 +9839,41 @@
           </a:p>
         </p:txBody>
       </p:sp>
+      <p:sp>
+        <p:nvSpPr>
+          <p:cNvPr id="49" name="Slide Number Placeholder 48">
+            <a:extLst>
+              <a:ext uri="{FF2B5EF4-FFF2-40B4-BE49-F238E27FC236}">
+                <a16:creationId xmlns:a16="http://schemas.microsoft.com/office/drawing/2014/main" id="{ACA049CF-F880-896E-4704-92F8DD781FFE}"/>
+              </a:ext>
+            </a:extLst>
+          </p:cNvPr>
+          <p:cNvSpPr>
+            <a:spLocks noGrp="1"/>
+          </p:cNvSpPr>
+          <p:nvPr>
+            <p:ph type="sldNum" sz="quarter" idx="12"/>
+          </p:nvPr>
+        </p:nvSpPr>
+        <p:spPr>
+          <a:xfrm>
+            <a:off x="8679180" y="290512"/>
+            <a:ext cx="375920" cy="365125"/>
+          </a:xfrm>
+        </p:spPr>
+        <p:txBody>
+          <a:bodyPr/>
+          <a:lstStyle/>
+          <a:p>
+            <a:fld id="{C1FF6DA9-008F-8B48-92A6-B652298478BF}" type="slidenum">
+              <a:rPr lang="en-US" smtClean="0"/>
+              <a:pPr/>
+              <a:t>16</a:t>
+            </a:fld>
+            <a:endParaRPr lang="en-US"/>
+          </a:p>
+        </p:txBody>
+      </p:sp>
     </p:spTree>
   </p:cSld>
   <p:clrMapOvr>
@@ -10070,6 +11144,41 @@
           </a:p>
         </p:txBody>
       </p:sp>
+      <p:sp>
+        <p:nvSpPr>
+          <p:cNvPr id="28" name="Slide Number Placeholder 27">
+            <a:extLst>
+              <a:ext uri="{FF2B5EF4-FFF2-40B4-BE49-F238E27FC236}">
+                <a16:creationId xmlns:a16="http://schemas.microsoft.com/office/drawing/2014/main" id="{6D5A1AAD-0391-2370-0C8A-2BFD97FD32A3}"/>
+              </a:ext>
+            </a:extLst>
+          </p:cNvPr>
+          <p:cNvSpPr>
+            <a:spLocks noGrp="1"/>
+          </p:cNvSpPr>
+          <p:nvPr>
+            <p:ph type="sldNum" sz="quarter" idx="12"/>
+          </p:nvPr>
+        </p:nvSpPr>
+        <p:spPr>
+          <a:xfrm>
+            <a:off x="8679180" y="290512"/>
+            <a:ext cx="375920" cy="365125"/>
+          </a:xfrm>
+        </p:spPr>
+        <p:txBody>
+          <a:bodyPr/>
+          <a:lstStyle/>
+          <a:p>
+            <a:fld id="{C1FF6DA9-008F-8B48-92A6-B652298478BF}" type="slidenum">
+              <a:rPr lang="en-US" smtClean="0"/>
+              <a:pPr/>
+              <a:t>17</a:t>
+            </a:fld>
+            <a:endParaRPr lang="en-US"/>
+          </a:p>
+        </p:txBody>
+      </p:sp>
     </p:spTree>
   </p:cSld>
   <p:clrMapOvr>
@@ -10206,6 +11315,41 @@
           </a:prstGeom>
         </p:spPr>
       </p:pic>
+      <p:sp>
+        <p:nvSpPr>
+          <p:cNvPr id="10" name="Slide Number Placeholder 9">
+            <a:extLst>
+              <a:ext uri="{FF2B5EF4-FFF2-40B4-BE49-F238E27FC236}">
+                <a16:creationId xmlns:a16="http://schemas.microsoft.com/office/drawing/2014/main" id="{31449448-7AC1-D11E-0DCE-CFE90D680AFD}"/>
+              </a:ext>
+            </a:extLst>
+          </p:cNvPr>
+          <p:cNvSpPr>
+            <a:spLocks noGrp="1"/>
+          </p:cNvSpPr>
+          <p:nvPr>
+            <p:ph type="sldNum" sz="quarter" idx="12"/>
+          </p:nvPr>
+        </p:nvSpPr>
+        <p:spPr>
+          <a:xfrm>
+            <a:off x="8679180" y="290512"/>
+            <a:ext cx="375920" cy="365125"/>
+          </a:xfrm>
+        </p:spPr>
+        <p:txBody>
+          <a:bodyPr/>
+          <a:lstStyle/>
+          <a:p>
+            <a:fld id="{C1FF6DA9-008F-8B48-92A6-B652298478BF}" type="slidenum">
+              <a:rPr lang="en-US" smtClean="0"/>
+              <a:pPr/>
+              <a:t>18</a:t>
+            </a:fld>
+            <a:endParaRPr lang="en-US"/>
+          </a:p>
+        </p:txBody>
+      </p:sp>
     </p:spTree>
   </p:cSld>
   <p:clrMapOvr>
@@ -10384,6 +11528,41 @@
           </a:prstGeom>
         </p:spPr>
       </p:pic>
+      <p:sp>
+        <p:nvSpPr>
+          <p:cNvPr id="10" name="Slide Number Placeholder 9">
+            <a:extLst>
+              <a:ext uri="{FF2B5EF4-FFF2-40B4-BE49-F238E27FC236}">
+                <a16:creationId xmlns:a16="http://schemas.microsoft.com/office/drawing/2014/main" id="{7F3EBBBE-405E-96B1-A5E6-5B9B2D36F3DD}"/>
+              </a:ext>
+            </a:extLst>
+          </p:cNvPr>
+          <p:cNvSpPr>
+            <a:spLocks noGrp="1"/>
+          </p:cNvSpPr>
+          <p:nvPr>
+            <p:ph type="sldNum" sz="quarter" idx="12"/>
+          </p:nvPr>
+        </p:nvSpPr>
+        <p:spPr>
+          <a:xfrm>
+            <a:off x="8679180" y="290512"/>
+            <a:ext cx="375920" cy="365125"/>
+          </a:xfrm>
+        </p:spPr>
+        <p:txBody>
+          <a:bodyPr/>
+          <a:lstStyle/>
+          <a:p>
+            <a:fld id="{C1FF6DA9-008F-8B48-92A6-B652298478BF}" type="slidenum">
+              <a:rPr lang="en-US" smtClean="0"/>
+              <a:pPr/>
+              <a:t>19</a:t>
+            </a:fld>
+            <a:endParaRPr lang="en-US"/>
+          </a:p>
+        </p:txBody>
+      </p:sp>
     </p:spTree>
   </p:cSld>
   <p:clrMapOvr>
@@ -11736,6 +12915,41 @@
           </a:p>
         </p:txBody>
       </p:sp>
+      <p:sp>
+        <p:nvSpPr>
+          <p:cNvPr id="28" name="Slide Number Placeholder 27">
+            <a:extLst>
+              <a:ext uri="{FF2B5EF4-FFF2-40B4-BE49-F238E27FC236}">
+                <a16:creationId xmlns:a16="http://schemas.microsoft.com/office/drawing/2014/main" id="{4546EAFD-3DB5-7075-39F7-ABBE3830A577}"/>
+              </a:ext>
+            </a:extLst>
+          </p:cNvPr>
+          <p:cNvSpPr>
+            <a:spLocks noGrp="1"/>
+          </p:cNvSpPr>
+          <p:nvPr>
+            <p:ph type="sldNum" sz="quarter" idx="12"/>
+          </p:nvPr>
+        </p:nvSpPr>
+        <p:spPr>
+          <a:xfrm>
+            <a:off x="8679180" y="290512"/>
+            <a:ext cx="375920" cy="365125"/>
+          </a:xfrm>
+        </p:spPr>
+        <p:txBody>
+          <a:bodyPr/>
+          <a:lstStyle/>
+          <a:p>
+            <a:fld id="{C1FF6DA9-008F-8B48-92A6-B652298478BF}" type="slidenum">
+              <a:rPr lang="en-US" smtClean="0"/>
+              <a:pPr/>
+              <a:t>2</a:t>
+            </a:fld>
+            <a:endParaRPr lang="en-US" dirty="0"/>
+          </a:p>
+        </p:txBody>
+      </p:sp>
     </p:spTree>
   </p:cSld>
   <p:clrMapOvr>
@@ -11872,6 +13086,41 @@
           </a:prstGeom>
         </p:spPr>
       </p:pic>
+      <p:sp>
+        <p:nvSpPr>
+          <p:cNvPr id="10" name="Slide Number Placeholder 9">
+            <a:extLst>
+              <a:ext uri="{FF2B5EF4-FFF2-40B4-BE49-F238E27FC236}">
+                <a16:creationId xmlns:a16="http://schemas.microsoft.com/office/drawing/2014/main" id="{7E400676-4412-6D3A-9DB1-7DB50F5F4C15}"/>
+              </a:ext>
+            </a:extLst>
+          </p:cNvPr>
+          <p:cNvSpPr>
+            <a:spLocks noGrp="1"/>
+          </p:cNvSpPr>
+          <p:nvPr>
+            <p:ph type="sldNum" sz="quarter" idx="12"/>
+          </p:nvPr>
+        </p:nvSpPr>
+        <p:spPr>
+          <a:xfrm>
+            <a:off x="8679180" y="290512"/>
+            <a:ext cx="375920" cy="365125"/>
+          </a:xfrm>
+        </p:spPr>
+        <p:txBody>
+          <a:bodyPr/>
+          <a:lstStyle/>
+          <a:p>
+            <a:fld id="{C1FF6DA9-008F-8B48-92A6-B652298478BF}" type="slidenum">
+              <a:rPr lang="en-US" smtClean="0"/>
+              <a:pPr/>
+              <a:t>20</a:t>
+            </a:fld>
+            <a:endParaRPr lang="en-US"/>
+          </a:p>
+        </p:txBody>
+      </p:sp>
     </p:spTree>
   </p:cSld>
   <p:clrMapOvr>
@@ -12050,6 +13299,41 @@
           </a:prstGeom>
         </p:spPr>
       </p:pic>
+      <p:sp>
+        <p:nvSpPr>
+          <p:cNvPr id="10" name="Slide Number Placeholder 9">
+            <a:extLst>
+              <a:ext uri="{FF2B5EF4-FFF2-40B4-BE49-F238E27FC236}">
+                <a16:creationId xmlns:a16="http://schemas.microsoft.com/office/drawing/2014/main" id="{491E16E8-CA24-6BD2-C994-CF5452E8084D}"/>
+              </a:ext>
+            </a:extLst>
+          </p:cNvPr>
+          <p:cNvSpPr>
+            <a:spLocks noGrp="1"/>
+          </p:cNvSpPr>
+          <p:nvPr>
+            <p:ph type="sldNum" sz="quarter" idx="12"/>
+          </p:nvPr>
+        </p:nvSpPr>
+        <p:spPr>
+          <a:xfrm>
+            <a:off x="8679180" y="290512"/>
+            <a:ext cx="375920" cy="365125"/>
+          </a:xfrm>
+        </p:spPr>
+        <p:txBody>
+          <a:bodyPr/>
+          <a:lstStyle/>
+          <a:p>
+            <a:fld id="{C1FF6DA9-008F-8B48-92A6-B652298478BF}" type="slidenum">
+              <a:rPr lang="en-US" smtClean="0"/>
+              <a:pPr/>
+              <a:t>21</a:t>
+            </a:fld>
+            <a:endParaRPr lang="en-US"/>
+          </a:p>
+        </p:txBody>
+      </p:sp>
     </p:spTree>
   </p:cSld>
   <p:clrMapOvr>
@@ -12186,6 +13470,41 @@
           </a:prstGeom>
         </p:spPr>
       </p:pic>
+      <p:sp>
+        <p:nvSpPr>
+          <p:cNvPr id="10" name="Slide Number Placeholder 9">
+            <a:extLst>
+              <a:ext uri="{FF2B5EF4-FFF2-40B4-BE49-F238E27FC236}">
+                <a16:creationId xmlns:a16="http://schemas.microsoft.com/office/drawing/2014/main" id="{03168C58-20F1-29C1-F56E-49A5D8835F86}"/>
+              </a:ext>
+            </a:extLst>
+          </p:cNvPr>
+          <p:cNvSpPr>
+            <a:spLocks noGrp="1"/>
+          </p:cNvSpPr>
+          <p:nvPr>
+            <p:ph type="sldNum" sz="quarter" idx="12"/>
+          </p:nvPr>
+        </p:nvSpPr>
+        <p:spPr>
+          <a:xfrm>
+            <a:off x="8679180" y="290512"/>
+            <a:ext cx="375920" cy="365125"/>
+          </a:xfrm>
+        </p:spPr>
+        <p:txBody>
+          <a:bodyPr/>
+          <a:lstStyle/>
+          <a:p>
+            <a:fld id="{C1FF6DA9-008F-8B48-92A6-B652298478BF}" type="slidenum">
+              <a:rPr lang="en-US" smtClean="0"/>
+              <a:pPr/>
+              <a:t>22</a:t>
+            </a:fld>
+            <a:endParaRPr lang="en-US"/>
+          </a:p>
+        </p:txBody>
+      </p:sp>
     </p:spTree>
   </p:cSld>
   <p:clrMapOvr>
@@ -12364,6 +13683,41 @@
           </a:prstGeom>
         </p:spPr>
       </p:pic>
+      <p:sp>
+        <p:nvSpPr>
+          <p:cNvPr id="10" name="Slide Number Placeholder 9">
+            <a:extLst>
+              <a:ext uri="{FF2B5EF4-FFF2-40B4-BE49-F238E27FC236}">
+                <a16:creationId xmlns:a16="http://schemas.microsoft.com/office/drawing/2014/main" id="{DC42EC64-AC8A-9CED-06E6-84D49370B863}"/>
+              </a:ext>
+            </a:extLst>
+          </p:cNvPr>
+          <p:cNvSpPr>
+            <a:spLocks noGrp="1"/>
+          </p:cNvSpPr>
+          <p:nvPr>
+            <p:ph type="sldNum" sz="quarter" idx="12"/>
+          </p:nvPr>
+        </p:nvSpPr>
+        <p:spPr>
+          <a:xfrm>
+            <a:off x="8679180" y="290512"/>
+            <a:ext cx="375920" cy="365125"/>
+          </a:xfrm>
+        </p:spPr>
+        <p:txBody>
+          <a:bodyPr/>
+          <a:lstStyle/>
+          <a:p>
+            <a:fld id="{C1FF6DA9-008F-8B48-92A6-B652298478BF}" type="slidenum">
+              <a:rPr lang="en-US" smtClean="0"/>
+              <a:pPr/>
+              <a:t>23</a:t>
+            </a:fld>
+            <a:endParaRPr lang="en-US"/>
+          </a:p>
+        </p:txBody>
+      </p:sp>
     </p:spTree>
   </p:cSld>
   <p:clrMapOvr>
@@ -12500,6 +13854,41 @@
           </a:prstGeom>
         </p:spPr>
       </p:pic>
+      <p:sp>
+        <p:nvSpPr>
+          <p:cNvPr id="10" name="Slide Number Placeholder 9">
+            <a:extLst>
+              <a:ext uri="{FF2B5EF4-FFF2-40B4-BE49-F238E27FC236}">
+                <a16:creationId xmlns:a16="http://schemas.microsoft.com/office/drawing/2014/main" id="{828939A3-570C-F3E8-36ED-762F4F55EF68}"/>
+              </a:ext>
+            </a:extLst>
+          </p:cNvPr>
+          <p:cNvSpPr>
+            <a:spLocks noGrp="1"/>
+          </p:cNvSpPr>
+          <p:nvPr>
+            <p:ph type="sldNum" sz="quarter" idx="12"/>
+          </p:nvPr>
+        </p:nvSpPr>
+        <p:spPr>
+          <a:xfrm>
+            <a:off x="8679180" y="290512"/>
+            <a:ext cx="375920" cy="365125"/>
+          </a:xfrm>
+        </p:spPr>
+        <p:txBody>
+          <a:bodyPr/>
+          <a:lstStyle/>
+          <a:p>
+            <a:fld id="{C1FF6DA9-008F-8B48-92A6-B652298478BF}" type="slidenum">
+              <a:rPr lang="en-US" smtClean="0"/>
+              <a:pPr/>
+              <a:t>24</a:t>
+            </a:fld>
+            <a:endParaRPr lang="en-US"/>
+          </a:p>
+        </p:txBody>
+      </p:sp>
     </p:spTree>
   </p:cSld>
   <p:clrMapOvr>
@@ -13968,6 +15357,41 @@
           </a:p>
         </p:txBody>
       </p:sp>
+      <p:sp>
+        <p:nvSpPr>
+          <p:cNvPr id="38" name="Slide Number Placeholder 37">
+            <a:extLst>
+              <a:ext uri="{FF2B5EF4-FFF2-40B4-BE49-F238E27FC236}">
+                <a16:creationId xmlns:a16="http://schemas.microsoft.com/office/drawing/2014/main" id="{3090CDBF-4835-F473-9EB6-9F8C6ACACD95}"/>
+              </a:ext>
+            </a:extLst>
+          </p:cNvPr>
+          <p:cNvSpPr>
+            <a:spLocks noGrp="1"/>
+          </p:cNvSpPr>
+          <p:nvPr>
+            <p:ph type="sldNum" sz="quarter" idx="12"/>
+          </p:nvPr>
+        </p:nvSpPr>
+        <p:spPr>
+          <a:xfrm>
+            <a:off x="8679180" y="290512"/>
+            <a:ext cx="375920" cy="365125"/>
+          </a:xfrm>
+        </p:spPr>
+        <p:txBody>
+          <a:bodyPr/>
+          <a:lstStyle/>
+          <a:p>
+            <a:fld id="{C1FF6DA9-008F-8B48-92A6-B652298478BF}" type="slidenum">
+              <a:rPr lang="en-US" smtClean="0"/>
+              <a:pPr/>
+              <a:t>25</a:t>
+            </a:fld>
+            <a:endParaRPr lang="en-US"/>
+          </a:p>
+        </p:txBody>
+      </p:sp>
     </p:spTree>
   </p:cSld>
   <p:clrMapOvr>
@@ -14826,6 +16250,41 @@
           </a:p>
         </p:txBody>
       </p:sp>
+      <p:sp>
+        <p:nvSpPr>
+          <p:cNvPr id="27" name="Slide Number Placeholder 26">
+            <a:extLst>
+              <a:ext uri="{FF2B5EF4-FFF2-40B4-BE49-F238E27FC236}">
+                <a16:creationId xmlns:a16="http://schemas.microsoft.com/office/drawing/2014/main" id="{BB269563-AC6F-0107-D199-F46A9E31F9DD}"/>
+              </a:ext>
+            </a:extLst>
+          </p:cNvPr>
+          <p:cNvSpPr>
+            <a:spLocks noGrp="1"/>
+          </p:cNvSpPr>
+          <p:nvPr>
+            <p:ph type="sldNum" sz="quarter" idx="12"/>
+          </p:nvPr>
+        </p:nvSpPr>
+        <p:spPr>
+          <a:xfrm>
+            <a:off x="8679180" y="290512"/>
+            <a:ext cx="375920" cy="365125"/>
+          </a:xfrm>
+        </p:spPr>
+        <p:txBody>
+          <a:bodyPr/>
+          <a:lstStyle/>
+          <a:p>
+            <a:fld id="{C1FF6DA9-008F-8B48-92A6-B652298478BF}" type="slidenum">
+              <a:rPr lang="en-US" smtClean="0"/>
+              <a:pPr/>
+              <a:t>26</a:t>
+            </a:fld>
+            <a:endParaRPr lang="en-US"/>
+          </a:p>
+        </p:txBody>
+      </p:sp>
     </p:spTree>
   </p:cSld>
   <p:clrMapOvr>
@@ -16134,6 +17593,41 @@
           </a:p>
         </p:txBody>
       </p:sp>
+      <p:sp>
+        <p:nvSpPr>
+          <p:cNvPr id="23" name="Slide Number Placeholder 22">
+            <a:extLst>
+              <a:ext uri="{FF2B5EF4-FFF2-40B4-BE49-F238E27FC236}">
+                <a16:creationId xmlns:a16="http://schemas.microsoft.com/office/drawing/2014/main" id="{B9E94B67-2D46-477B-B1A2-B1E7B4455151}"/>
+              </a:ext>
+            </a:extLst>
+          </p:cNvPr>
+          <p:cNvSpPr>
+            <a:spLocks noGrp="1"/>
+          </p:cNvSpPr>
+          <p:nvPr>
+            <p:ph type="sldNum" sz="quarter" idx="12"/>
+          </p:nvPr>
+        </p:nvSpPr>
+        <p:spPr>
+          <a:xfrm>
+            <a:off x="8679180" y="290512"/>
+            <a:ext cx="375920" cy="365125"/>
+          </a:xfrm>
+        </p:spPr>
+        <p:txBody>
+          <a:bodyPr/>
+          <a:lstStyle/>
+          <a:p>
+            <a:fld id="{C1FF6DA9-008F-8B48-92A6-B652298478BF}" type="slidenum">
+              <a:rPr lang="en-US" smtClean="0"/>
+              <a:pPr/>
+              <a:t>3</a:t>
+            </a:fld>
+            <a:endParaRPr lang="en-US"/>
+          </a:p>
+        </p:txBody>
+      </p:sp>
     </p:spTree>
   </p:cSld>
   <p:clrMapOvr>
@@ -16943,6 +18437,41 @@
           </a:p>
         </p:txBody>
       </p:sp>
+      <p:sp>
+        <p:nvSpPr>
+          <p:cNvPr id="27" name="Slide Number Placeholder 26">
+            <a:extLst>
+              <a:ext uri="{FF2B5EF4-FFF2-40B4-BE49-F238E27FC236}">
+                <a16:creationId xmlns:a16="http://schemas.microsoft.com/office/drawing/2014/main" id="{6B9AAE52-2782-A7D3-B38F-3EDB92E6371F}"/>
+              </a:ext>
+            </a:extLst>
+          </p:cNvPr>
+          <p:cNvSpPr>
+            <a:spLocks noGrp="1"/>
+          </p:cNvSpPr>
+          <p:nvPr>
+            <p:ph type="sldNum" sz="quarter" idx="12"/>
+          </p:nvPr>
+        </p:nvSpPr>
+        <p:spPr>
+          <a:xfrm>
+            <a:off x="8679180" y="290512"/>
+            <a:ext cx="375920" cy="365125"/>
+          </a:xfrm>
+        </p:spPr>
+        <p:txBody>
+          <a:bodyPr/>
+          <a:lstStyle/>
+          <a:p>
+            <a:fld id="{C1FF6DA9-008F-8B48-92A6-B652298478BF}" type="slidenum">
+              <a:rPr lang="en-US" smtClean="0"/>
+              <a:pPr/>
+              <a:t>4</a:t>
+            </a:fld>
+            <a:endParaRPr lang="en-US"/>
+          </a:p>
+        </p:txBody>
+      </p:sp>
     </p:spTree>
   </p:cSld>
   <p:clrMapOvr>
@@ -18074,6 +19603,41 @@
           </a:prstGeom>
         </p:spPr>
       </p:pic>
+      <p:sp>
+        <p:nvSpPr>
+          <p:cNvPr id="31" name="Slide Number Placeholder 30">
+            <a:extLst>
+              <a:ext uri="{FF2B5EF4-FFF2-40B4-BE49-F238E27FC236}">
+                <a16:creationId xmlns:a16="http://schemas.microsoft.com/office/drawing/2014/main" id="{3037E793-02AB-D55D-E557-4034FBE54388}"/>
+              </a:ext>
+            </a:extLst>
+          </p:cNvPr>
+          <p:cNvSpPr>
+            <a:spLocks noGrp="1"/>
+          </p:cNvSpPr>
+          <p:nvPr>
+            <p:ph type="sldNum" sz="quarter" idx="12"/>
+          </p:nvPr>
+        </p:nvSpPr>
+        <p:spPr>
+          <a:xfrm>
+            <a:off x="8679180" y="290512"/>
+            <a:ext cx="375920" cy="365125"/>
+          </a:xfrm>
+        </p:spPr>
+        <p:txBody>
+          <a:bodyPr/>
+          <a:lstStyle/>
+          <a:p>
+            <a:fld id="{C1FF6DA9-008F-8B48-92A6-B652298478BF}" type="slidenum">
+              <a:rPr lang="en-US" smtClean="0"/>
+              <a:pPr/>
+              <a:t>5</a:t>
+            </a:fld>
+            <a:endParaRPr lang="en-US"/>
+          </a:p>
+        </p:txBody>
+      </p:sp>
     </p:spTree>
   </p:cSld>
   <p:clrMapOvr>
@@ -19610,6 +21174,41 @@
           </a:p>
         </p:txBody>
       </p:sp>
+      <p:sp>
+        <p:nvSpPr>
+          <p:cNvPr id="45" name="Slide Number Placeholder 44">
+            <a:extLst>
+              <a:ext uri="{FF2B5EF4-FFF2-40B4-BE49-F238E27FC236}">
+                <a16:creationId xmlns:a16="http://schemas.microsoft.com/office/drawing/2014/main" id="{8BF66A4D-3A85-4C8E-C480-356C1B898414}"/>
+              </a:ext>
+            </a:extLst>
+          </p:cNvPr>
+          <p:cNvSpPr>
+            <a:spLocks noGrp="1"/>
+          </p:cNvSpPr>
+          <p:nvPr>
+            <p:ph type="sldNum" sz="quarter" idx="12"/>
+          </p:nvPr>
+        </p:nvSpPr>
+        <p:spPr>
+          <a:xfrm>
+            <a:off x="8679180" y="290512"/>
+            <a:ext cx="375920" cy="365125"/>
+          </a:xfrm>
+        </p:spPr>
+        <p:txBody>
+          <a:bodyPr/>
+          <a:lstStyle/>
+          <a:p>
+            <a:fld id="{C1FF6DA9-008F-8B48-92A6-B652298478BF}" type="slidenum">
+              <a:rPr lang="en-US" smtClean="0"/>
+              <a:pPr/>
+              <a:t>6</a:t>
+            </a:fld>
+            <a:endParaRPr lang="en-US"/>
+          </a:p>
+        </p:txBody>
+      </p:sp>
     </p:spTree>
   </p:cSld>
   <p:clrMapOvr>
@@ -19745,6 +21344,41 @@
           </a:prstGeom>
         </p:spPr>
       </p:pic>
+      <p:sp>
+        <p:nvSpPr>
+          <p:cNvPr id="10" name="Slide Number Placeholder 9">
+            <a:extLst>
+              <a:ext uri="{FF2B5EF4-FFF2-40B4-BE49-F238E27FC236}">
+                <a16:creationId xmlns:a16="http://schemas.microsoft.com/office/drawing/2014/main" id="{18BC23DB-1D2F-D6FD-8B4E-2844D67940AA}"/>
+              </a:ext>
+            </a:extLst>
+          </p:cNvPr>
+          <p:cNvSpPr>
+            <a:spLocks noGrp="1"/>
+          </p:cNvSpPr>
+          <p:nvPr>
+            <p:ph type="sldNum" sz="quarter" idx="12"/>
+          </p:nvPr>
+        </p:nvSpPr>
+        <p:spPr>
+          <a:xfrm>
+            <a:off x="8679180" y="290512"/>
+            <a:ext cx="375920" cy="365125"/>
+          </a:xfrm>
+        </p:spPr>
+        <p:txBody>
+          <a:bodyPr/>
+          <a:lstStyle/>
+          <a:p>
+            <a:fld id="{C1FF6DA9-008F-8B48-92A6-B652298478BF}" type="slidenum">
+              <a:rPr lang="en-US" smtClean="0"/>
+              <a:pPr/>
+              <a:t>7</a:t>
+            </a:fld>
+            <a:endParaRPr lang="en-US"/>
+          </a:p>
+        </p:txBody>
+      </p:sp>
     </p:spTree>
   </p:cSld>
   <p:clrMapOvr>
@@ -19880,6 +21514,41 @@
           </a:prstGeom>
         </p:spPr>
       </p:pic>
+      <p:sp>
+        <p:nvSpPr>
+          <p:cNvPr id="10" name="Slide Number Placeholder 9">
+            <a:extLst>
+              <a:ext uri="{FF2B5EF4-FFF2-40B4-BE49-F238E27FC236}">
+                <a16:creationId xmlns:a16="http://schemas.microsoft.com/office/drawing/2014/main" id="{E0EFC58F-2045-6B81-513D-7D1A6D7874A1}"/>
+              </a:ext>
+            </a:extLst>
+          </p:cNvPr>
+          <p:cNvSpPr>
+            <a:spLocks noGrp="1"/>
+          </p:cNvSpPr>
+          <p:nvPr>
+            <p:ph type="sldNum" sz="quarter" idx="12"/>
+          </p:nvPr>
+        </p:nvSpPr>
+        <p:spPr>
+          <a:xfrm>
+            <a:off x="8679180" y="290512"/>
+            <a:ext cx="375920" cy="365125"/>
+          </a:xfrm>
+        </p:spPr>
+        <p:txBody>
+          <a:bodyPr/>
+          <a:lstStyle/>
+          <a:p>
+            <a:fld id="{C1FF6DA9-008F-8B48-92A6-B652298478BF}" type="slidenum">
+              <a:rPr lang="en-US" smtClean="0"/>
+              <a:pPr/>
+              <a:t>8</a:t>
+            </a:fld>
+            <a:endParaRPr lang="en-US"/>
+          </a:p>
+        </p:txBody>
+      </p:sp>
     </p:spTree>
   </p:cSld>
   <p:clrMapOvr>
@@ -20024,6 +21693,41 @@
           </a:solidFill>
         </p:spPr>
       </p:pic>
+      <p:sp>
+        <p:nvSpPr>
+          <p:cNvPr id="10" name="Slide Number Placeholder 9">
+            <a:extLst>
+              <a:ext uri="{FF2B5EF4-FFF2-40B4-BE49-F238E27FC236}">
+                <a16:creationId xmlns:a16="http://schemas.microsoft.com/office/drawing/2014/main" id="{54078EF5-6A51-16A5-6CE5-D2F636649304}"/>
+              </a:ext>
+            </a:extLst>
+          </p:cNvPr>
+          <p:cNvSpPr>
+            <a:spLocks noGrp="1"/>
+          </p:cNvSpPr>
+          <p:nvPr>
+            <p:ph type="sldNum" sz="quarter" idx="12"/>
+          </p:nvPr>
+        </p:nvSpPr>
+        <p:spPr>
+          <a:xfrm>
+            <a:off x="8679180" y="290512"/>
+            <a:ext cx="375920" cy="365125"/>
+          </a:xfrm>
+        </p:spPr>
+        <p:txBody>
+          <a:bodyPr/>
+          <a:lstStyle/>
+          <a:p>
+            <a:fld id="{C1FF6DA9-008F-8B48-92A6-B652298478BF}" type="slidenum">
+              <a:rPr lang="en-US" smtClean="0"/>
+              <a:pPr/>
+              <a:t>9</a:t>
+            </a:fld>
+            <a:endParaRPr lang="en-US"/>
+          </a:p>
+        </p:txBody>
+      </p:sp>
     </p:spTree>
   </p:cSld>
   <p:clrMapOvr>
@@ -20350,4 +22054,634 @@
   </a:objectDefaults>
   <a:extraClrSchemeLst/>
 </a:theme>
+</file>
+
+<file path=ppt/theme/theme2.xml><?xml version="1.0" encoding="utf-8"?>
+<a:theme xmlns:a="http://schemas.openxmlformats.org/drawingml/2006/main" name="Office Theme">
+  <a:themeElements>
+    <a:clrScheme name="Office">
+      <a:dk1>
+        <a:sysClr val="windowText" lastClr="000000"/>
+      </a:dk1>
+      <a:lt1>
+        <a:sysClr val="window" lastClr="FFFFFF"/>
+      </a:lt1>
+      <a:dk2>
+        <a:srgbClr val="0E2841"/>
+      </a:dk2>
+      <a:lt2>
+        <a:srgbClr val="E8E8E8"/>
+      </a:lt2>
+      <a:accent1>
+        <a:srgbClr val="156082"/>
+      </a:accent1>
+      <a:accent2>
+        <a:srgbClr val="E97132"/>
+      </a:accent2>
+      <a:accent3>
+        <a:srgbClr val="196B24"/>
+      </a:accent3>
+      <a:accent4>
+        <a:srgbClr val="0F9ED5"/>
+      </a:accent4>
+      <a:accent5>
+        <a:srgbClr val="A02B93"/>
+      </a:accent5>
+      <a:accent6>
+        <a:srgbClr val="4EA72E"/>
+      </a:accent6>
+      <a:hlink>
+        <a:srgbClr val="467886"/>
+      </a:hlink>
+      <a:folHlink>
+        <a:srgbClr val="96607D"/>
+      </a:folHlink>
+    </a:clrScheme>
+    <a:fontScheme name="Office">
+      <a:majorFont>
+        <a:latin typeface="Aptos Display" panose="02110004020202020204"/>
+        <a:ea typeface=""/>
+        <a:cs typeface=""/>
+        <a:font script="Jpan" typeface="游ゴシック Light"/>
+        <a:font script="Hang" typeface="맑은 고딕"/>
+        <a:font script="Hans" typeface="等线 Light"/>
+        <a:font script="Hant" typeface="新細明體"/>
+        <a:font script="Arab" typeface="Times New Roman"/>
+        <a:font script="Hebr" typeface="Times New Roman"/>
+        <a:font script="Thai" typeface="Angsana New"/>
+        <a:font script="Ethi" typeface="Nyala"/>
+        <a:font script="Beng" typeface="Vrinda"/>
+        <a:font script="Gujr" typeface="Shruti"/>
+        <a:font script="Khmr" typeface="MoolBoran"/>
+        <a:font script="Knda" typeface="Tunga"/>
+        <a:font script="Guru" typeface="Raavi"/>
+        <a:font script="Cans" typeface="Euphemia"/>
+        <a:font script="Cher" typeface="Plantagenet Cherokee"/>
+        <a:font script="Yiii" typeface="Microsoft Yi Baiti"/>
+        <a:font script="Tibt" typeface="Microsoft Himalaya"/>
+        <a:font script="Thaa" typeface="MV Boli"/>
+        <a:font script="Deva" typeface="Mangal"/>
+        <a:font script="Telu" typeface="Gautami"/>
+        <a:font script="Taml" typeface="Latha"/>
+        <a:font script="Syrc" typeface="Estrangelo Edessa"/>
+        <a:font script="Orya" typeface="Kalinga"/>
+        <a:font script="Mlym" typeface="Kartika"/>
+        <a:font script="Laoo" typeface="DokChampa"/>
+        <a:font script="Sinh" typeface="Iskoola Pota"/>
+        <a:font script="Mong" typeface="Mongolian Baiti"/>
+        <a:font script="Viet" typeface="Times New Roman"/>
+        <a:font script="Uigh" typeface="Microsoft Uighur"/>
+        <a:font script="Geor" typeface="Sylfaen"/>
+        <a:font script="Armn" typeface="Arial"/>
+        <a:font script="Bugi" typeface="Leelawadee UI"/>
+        <a:font script="Bopo" typeface="Microsoft JhengHei"/>
+        <a:font script="Java" typeface="Javanese Text"/>
+        <a:font script="Lisu" typeface="Segoe UI"/>
+        <a:font script="Mymr" typeface="Myanmar Text"/>
+        <a:font script="Nkoo" typeface="Ebrima"/>
+        <a:font script="Olck" typeface="Nirmala UI"/>
+        <a:font script="Osma" typeface="Ebrima"/>
+        <a:font script="Phag" typeface="Phagspa"/>
+        <a:font script="Syrn" typeface="Estrangelo Edessa"/>
+        <a:font script="Syrj" typeface="Estrangelo Edessa"/>
+        <a:font script="Syre" typeface="Estrangelo Edessa"/>
+        <a:font script="Sora" typeface="Nirmala UI"/>
+        <a:font script="Tale" typeface="Microsoft Tai Le"/>
+        <a:font script="Talu" typeface="Microsoft New Tai Lue"/>
+        <a:font script="Tfng" typeface="Ebrima"/>
+      </a:majorFont>
+      <a:minorFont>
+        <a:latin typeface="Aptos" panose="02110004020202020204"/>
+        <a:ea typeface=""/>
+        <a:cs typeface=""/>
+        <a:font script="Jpan" typeface="游ゴシック"/>
+        <a:font script="Hang" typeface="맑은 고딕"/>
+        <a:font script="Hans" typeface="等线"/>
+        <a:font script="Hant" typeface="新細明體"/>
+        <a:font script="Arab" typeface="Arial"/>
+        <a:font script="Hebr" typeface="Arial"/>
+        <a:font script="Thai" typeface="Cordia New"/>
+        <a:font script="Ethi" typeface="Nyala"/>
+        <a:font script="Beng" typeface="Vrinda"/>
+        <a:font script="Gujr" typeface="Shruti"/>
+        <a:font script="Khmr" typeface="DaunPenh"/>
+        <a:font script="Knda" typeface="Tunga"/>
+        <a:font script="Guru" typeface="Raavi"/>
+        <a:font script="Cans" typeface="Euphemia"/>
+        <a:font script="Cher" typeface="Plantagenet Cherokee"/>
+        <a:font script="Yiii" typeface="Microsoft Yi Baiti"/>
+        <a:font script="Tibt" typeface="Microsoft Himalaya"/>
+        <a:font script="Thaa" typeface="MV Boli"/>
+        <a:font script="Deva" typeface="Mangal"/>
+        <a:font script="Telu" typeface="Gautami"/>
+        <a:font script="Taml" typeface="Latha"/>
+        <a:font script="Syrc" typeface="Estrangelo Edessa"/>
+        <a:font script="Orya" typeface="Kalinga"/>
+        <a:font script="Mlym" typeface="Kartika"/>
+        <a:font script="Laoo" typeface="DokChampa"/>
+        <a:font script="Sinh" typeface="Iskoola Pota"/>
+        <a:font script="Mong" typeface="Mongolian Baiti"/>
+        <a:font script="Viet" typeface="Arial"/>
+        <a:font script="Uigh" typeface="Microsoft Uighur"/>
+        <a:font script="Geor" typeface="Sylfaen"/>
+        <a:font script="Armn" typeface="Arial"/>
+        <a:font script="Bugi" typeface="Leelawadee UI"/>
+        <a:font script="Bopo" typeface="Microsoft JhengHei"/>
+        <a:font script="Java" typeface="Javanese Text"/>
+        <a:font script="Lisu" typeface="Segoe UI"/>
+        <a:font script="Mymr" typeface="Myanmar Text"/>
+        <a:font script="Nkoo" typeface="Ebrima"/>
+        <a:font script="Olck" typeface="Nirmala UI"/>
+        <a:font script="Osma" typeface="Ebrima"/>
+        <a:font script="Phag" typeface="Phagspa"/>
+        <a:font script="Syrn" typeface="Estrangelo Edessa"/>
+        <a:font script="Syrj" typeface="Estrangelo Edessa"/>
+        <a:font script="Syre" typeface="Estrangelo Edessa"/>
+        <a:font script="Sora" typeface="Nirmala UI"/>
+        <a:font script="Tale" typeface="Microsoft Tai Le"/>
+        <a:font script="Talu" typeface="Microsoft New Tai Lue"/>
+        <a:font script="Tfng" typeface="Ebrima"/>
+      </a:minorFont>
+    </a:fontScheme>
+    <a:fmtScheme name="Office">
+      <a:fillStyleLst>
+        <a:solidFill>
+          <a:schemeClr val="phClr"/>
+        </a:solidFill>
+        <a:gradFill rotWithShape="1">
+          <a:gsLst>
+            <a:gs pos="0">
+              <a:schemeClr val="phClr">
+                <a:lumMod val="110000"/>
+                <a:satMod val="105000"/>
+                <a:tint val="67000"/>
+              </a:schemeClr>
+            </a:gs>
+            <a:gs pos="50000">
+              <a:schemeClr val="phClr">
+                <a:lumMod val="105000"/>
+                <a:satMod val="103000"/>
+                <a:tint val="73000"/>
+              </a:schemeClr>
+            </a:gs>
+            <a:gs pos="100000">
+              <a:schemeClr val="phClr">
+                <a:lumMod val="105000"/>
+                <a:satMod val="109000"/>
+                <a:tint val="81000"/>
+              </a:schemeClr>
+            </a:gs>
+          </a:gsLst>
+          <a:lin ang="5400000" scaled="0"/>
+        </a:gradFill>
+        <a:gradFill rotWithShape="1">
+          <a:gsLst>
+            <a:gs pos="0">
+              <a:schemeClr val="phClr">
+                <a:satMod val="103000"/>
+                <a:lumMod val="102000"/>
+                <a:tint val="94000"/>
+              </a:schemeClr>
+            </a:gs>
+            <a:gs pos="50000">
+              <a:schemeClr val="phClr">
+                <a:satMod val="110000"/>
+                <a:lumMod val="100000"/>
+                <a:shade val="100000"/>
+              </a:schemeClr>
+            </a:gs>
+            <a:gs pos="100000">
+              <a:schemeClr val="phClr">
+                <a:lumMod val="99000"/>
+                <a:satMod val="120000"/>
+                <a:shade val="78000"/>
+              </a:schemeClr>
+            </a:gs>
+          </a:gsLst>
+          <a:lin ang="5400000" scaled="0"/>
+        </a:gradFill>
+      </a:fillStyleLst>
+      <a:lnStyleLst>
+        <a:ln w="12700" cap="flat" cmpd="sng" algn="ctr">
+          <a:solidFill>
+            <a:schemeClr val="phClr"/>
+          </a:solidFill>
+          <a:prstDash val="solid"/>
+          <a:miter lim="800000"/>
+        </a:ln>
+        <a:ln w="19050" cap="flat" cmpd="sng" algn="ctr">
+          <a:solidFill>
+            <a:schemeClr val="phClr"/>
+          </a:solidFill>
+          <a:prstDash val="solid"/>
+          <a:miter lim="800000"/>
+        </a:ln>
+        <a:ln w="25400" cap="flat" cmpd="sng" algn="ctr">
+          <a:solidFill>
+            <a:schemeClr val="phClr"/>
+          </a:solidFill>
+          <a:prstDash val="solid"/>
+          <a:miter lim="800000"/>
+        </a:ln>
+      </a:lnStyleLst>
+      <a:effectStyleLst>
+        <a:effectStyle>
+          <a:effectLst/>
+        </a:effectStyle>
+        <a:effectStyle>
+          <a:effectLst/>
+        </a:effectStyle>
+        <a:effectStyle>
+          <a:effectLst>
+            <a:outerShdw blurRad="57150" dist="19050" dir="5400000" algn="ctr" rotWithShape="0">
+              <a:srgbClr val="000000">
+                <a:alpha val="63000"/>
+              </a:srgbClr>
+            </a:outerShdw>
+          </a:effectLst>
+        </a:effectStyle>
+      </a:effectStyleLst>
+      <a:bgFillStyleLst>
+        <a:solidFill>
+          <a:schemeClr val="phClr"/>
+        </a:solidFill>
+        <a:solidFill>
+          <a:schemeClr val="phClr">
+            <a:tint val="95000"/>
+            <a:satMod val="170000"/>
+          </a:schemeClr>
+        </a:solidFill>
+        <a:gradFill rotWithShape="1">
+          <a:gsLst>
+            <a:gs pos="0">
+              <a:schemeClr val="phClr">
+                <a:tint val="93000"/>
+                <a:satMod val="150000"/>
+                <a:shade val="98000"/>
+                <a:lumMod val="102000"/>
+              </a:schemeClr>
+            </a:gs>
+            <a:gs pos="50000">
+              <a:schemeClr val="phClr">
+                <a:tint val="98000"/>
+                <a:satMod val="130000"/>
+                <a:shade val="90000"/>
+                <a:lumMod val="103000"/>
+              </a:schemeClr>
+            </a:gs>
+            <a:gs pos="100000">
+              <a:schemeClr val="phClr">
+                <a:shade val="63000"/>
+                <a:satMod val="120000"/>
+              </a:schemeClr>
+            </a:gs>
+          </a:gsLst>
+          <a:lin ang="5400000" scaled="0"/>
+        </a:gradFill>
+      </a:bgFillStyleLst>
+    </a:fmtScheme>
+  </a:themeElements>
+  <a:objectDefaults>
+    <a:lnDef>
+      <a:spPr/>
+      <a:bodyPr/>
+      <a:lstStyle/>
+      <a:style>
+        <a:lnRef idx="2">
+          <a:schemeClr val="accent1"/>
+        </a:lnRef>
+        <a:fillRef idx="0">
+          <a:schemeClr val="accent1"/>
+        </a:fillRef>
+        <a:effectRef idx="1">
+          <a:schemeClr val="accent1"/>
+        </a:effectRef>
+        <a:fontRef idx="minor">
+          <a:schemeClr val="tx1"/>
+        </a:fontRef>
+      </a:style>
+    </a:lnDef>
+  </a:objectDefaults>
+  <a:extraClrSchemeLst/>
+  <a:extLst>
+    <a:ext uri="{05A4C25C-085E-4340-85A3-A5531E510DB2}">
+      <thm15:themeFamily xmlns:thm15="http://schemas.microsoft.com/office/thememl/2012/main" name="Office Theme" id="{2E142A2C-CD16-42D6-873A-C26D2A0506FA}" vid="{1BDDFF52-6CD6-40A5-AB3C-68EB2F1E4D0A}"/>
+    </a:ext>
+  </a:extLst>
+</a:theme>
+</file>
+
+<file path=ppt/theme/theme3.xml><?xml version="1.0" encoding="utf-8"?>
+<a:theme xmlns:a="http://schemas.openxmlformats.org/drawingml/2006/main" name="Office Theme">
+  <a:themeElements>
+    <a:clrScheme name="Office">
+      <a:dk1>
+        <a:sysClr val="windowText" lastClr="000000"/>
+      </a:dk1>
+      <a:lt1>
+        <a:sysClr val="window" lastClr="FFFFFF"/>
+      </a:lt1>
+      <a:dk2>
+        <a:srgbClr val="0E2841"/>
+      </a:dk2>
+      <a:lt2>
+        <a:srgbClr val="E8E8E8"/>
+      </a:lt2>
+      <a:accent1>
+        <a:srgbClr val="156082"/>
+      </a:accent1>
+      <a:accent2>
+        <a:srgbClr val="E97132"/>
+      </a:accent2>
+      <a:accent3>
+        <a:srgbClr val="196B24"/>
+      </a:accent3>
+      <a:accent4>
+        <a:srgbClr val="0F9ED5"/>
+      </a:accent4>
+      <a:accent5>
+        <a:srgbClr val="A02B93"/>
+      </a:accent5>
+      <a:accent6>
+        <a:srgbClr val="4EA72E"/>
+      </a:accent6>
+      <a:hlink>
+        <a:srgbClr val="467886"/>
+      </a:hlink>
+      <a:folHlink>
+        <a:srgbClr val="96607D"/>
+      </a:folHlink>
+    </a:clrScheme>
+    <a:fontScheme name="Office">
+      <a:majorFont>
+        <a:latin typeface="Aptos Display" panose="02110004020202020204"/>
+        <a:ea typeface=""/>
+        <a:cs typeface=""/>
+        <a:font script="Jpan" typeface="游ゴシック Light"/>
+        <a:font script="Hang" typeface="맑은 고딕"/>
+        <a:font script="Hans" typeface="等线 Light"/>
+        <a:font script="Hant" typeface="新細明體"/>
+        <a:font script="Arab" typeface="Times New Roman"/>
+        <a:font script="Hebr" typeface="Times New Roman"/>
+        <a:font script="Thai" typeface="Angsana New"/>
+        <a:font script="Ethi" typeface="Nyala"/>
+        <a:font script="Beng" typeface="Vrinda"/>
+        <a:font script="Gujr" typeface="Shruti"/>
+        <a:font script="Khmr" typeface="MoolBoran"/>
+        <a:font script="Knda" typeface="Tunga"/>
+        <a:font script="Guru" typeface="Raavi"/>
+        <a:font script="Cans" typeface="Euphemia"/>
+        <a:font script="Cher" typeface="Plantagenet Cherokee"/>
+        <a:font script="Yiii" typeface="Microsoft Yi Baiti"/>
+        <a:font script="Tibt" typeface="Microsoft Himalaya"/>
+        <a:font script="Thaa" typeface="MV Boli"/>
+        <a:font script="Deva" typeface="Mangal"/>
+        <a:font script="Telu" typeface="Gautami"/>
+        <a:font script="Taml" typeface="Latha"/>
+        <a:font script="Syrc" typeface="Estrangelo Edessa"/>
+        <a:font script="Orya" typeface="Kalinga"/>
+        <a:font script="Mlym" typeface="Kartika"/>
+        <a:font script="Laoo" typeface="DokChampa"/>
+        <a:font script="Sinh" typeface="Iskoola Pota"/>
+        <a:font script="Mong" typeface="Mongolian Baiti"/>
+        <a:font script="Viet" typeface="Times New Roman"/>
+        <a:font script="Uigh" typeface="Microsoft Uighur"/>
+        <a:font script="Geor" typeface="Sylfaen"/>
+        <a:font script="Armn" typeface="Arial"/>
+        <a:font script="Bugi" typeface="Leelawadee UI"/>
+        <a:font script="Bopo" typeface="Microsoft JhengHei"/>
+        <a:font script="Java" typeface="Javanese Text"/>
+        <a:font script="Lisu" typeface="Segoe UI"/>
+        <a:font script="Mymr" typeface="Myanmar Text"/>
+        <a:font script="Nkoo" typeface="Ebrima"/>
+        <a:font script="Olck" typeface="Nirmala UI"/>
+        <a:font script="Osma" typeface="Ebrima"/>
+        <a:font script="Phag" typeface="Phagspa"/>
+        <a:font script="Syrn" typeface="Estrangelo Edessa"/>
+        <a:font script="Syrj" typeface="Estrangelo Edessa"/>
+        <a:font script="Syre" typeface="Estrangelo Edessa"/>
+        <a:font script="Sora" typeface="Nirmala UI"/>
+        <a:font script="Tale" typeface="Microsoft Tai Le"/>
+        <a:font script="Talu" typeface="Microsoft New Tai Lue"/>
+        <a:font script="Tfng" typeface="Ebrima"/>
+      </a:majorFont>
+      <a:minorFont>
+        <a:latin typeface="Aptos" panose="02110004020202020204"/>
+        <a:ea typeface=""/>
+        <a:cs typeface=""/>
+        <a:font script="Jpan" typeface="游ゴシック"/>
+        <a:font script="Hang" typeface="맑은 고딕"/>
+        <a:font script="Hans" typeface="等线"/>
+        <a:font script="Hant" typeface="新細明體"/>
+        <a:font script="Arab" typeface="Arial"/>
+        <a:font script="Hebr" typeface="Arial"/>
+        <a:font script="Thai" typeface="Cordia New"/>
+        <a:font script="Ethi" typeface="Nyala"/>
+        <a:font script="Beng" typeface="Vrinda"/>
+        <a:font script="Gujr" typeface="Shruti"/>
+        <a:font script="Khmr" typeface="DaunPenh"/>
+        <a:font script="Knda" typeface="Tunga"/>
+        <a:font script="Guru" typeface="Raavi"/>
+        <a:font script="Cans" typeface="Euphemia"/>
+        <a:font script="Cher" typeface="Plantagenet Cherokee"/>
+        <a:font script="Yiii" typeface="Microsoft Yi Baiti"/>
+        <a:font script="Tibt" typeface="Microsoft Himalaya"/>
+        <a:font script="Thaa" typeface="MV Boli"/>
+        <a:font script="Deva" typeface="Mangal"/>
+        <a:font script="Telu" typeface="Gautami"/>
+        <a:font script="Taml" typeface="Latha"/>
+        <a:font script="Syrc" typeface="Estrangelo Edessa"/>
+        <a:font script="Orya" typeface="Kalinga"/>
+        <a:font script="Mlym" typeface="Kartika"/>
+        <a:font script="Laoo" typeface="DokChampa"/>
+        <a:font script="Sinh" typeface="Iskoola Pota"/>
+        <a:font script="Mong" typeface="Mongolian Baiti"/>
+        <a:font script="Viet" typeface="Arial"/>
+        <a:font script="Uigh" typeface="Microsoft Uighur"/>
+        <a:font script="Geor" typeface="Sylfaen"/>
+        <a:font script="Armn" typeface="Arial"/>
+        <a:font script="Bugi" typeface="Leelawadee UI"/>
+        <a:font script="Bopo" typeface="Microsoft JhengHei"/>
+        <a:font script="Java" typeface="Javanese Text"/>
+        <a:font script="Lisu" typeface="Segoe UI"/>
+        <a:font script="Mymr" typeface="Myanmar Text"/>
+        <a:font script="Nkoo" typeface="Ebrima"/>
+        <a:font script="Olck" typeface="Nirmala UI"/>
+        <a:font script="Osma" typeface="Ebrima"/>
+        <a:font script="Phag" typeface="Phagspa"/>
+        <a:font script="Syrn" typeface="Estrangelo Edessa"/>
+        <a:font script="Syrj" typeface="Estrangelo Edessa"/>
+        <a:font script="Syre" typeface="Estrangelo Edessa"/>
+        <a:font script="Sora" typeface="Nirmala UI"/>
+        <a:font script="Tale" typeface="Microsoft Tai Le"/>
+        <a:font script="Talu" typeface="Microsoft New Tai Lue"/>
+        <a:font script="Tfng" typeface="Ebrima"/>
+      </a:minorFont>
+    </a:fontScheme>
+    <a:fmtScheme name="Office">
+      <a:fillStyleLst>
+        <a:solidFill>
+          <a:schemeClr val="phClr"/>
+        </a:solidFill>
+        <a:gradFill rotWithShape="1">
+          <a:gsLst>
+            <a:gs pos="0">
+              <a:schemeClr val="phClr">
+                <a:lumMod val="110000"/>
+                <a:satMod val="105000"/>
+                <a:tint val="67000"/>
+              </a:schemeClr>
+            </a:gs>
+            <a:gs pos="50000">
+              <a:schemeClr val="phClr">
+                <a:lumMod val="105000"/>
+                <a:satMod val="103000"/>
+                <a:tint val="73000"/>
+              </a:schemeClr>
+            </a:gs>
+            <a:gs pos="100000">
+              <a:schemeClr val="phClr">
+                <a:lumMod val="105000"/>
+                <a:satMod val="109000"/>
+                <a:tint val="81000"/>
+              </a:schemeClr>
+            </a:gs>
+          </a:gsLst>
+          <a:lin ang="5400000" scaled="0"/>
+        </a:gradFill>
+        <a:gradFill rotWithShape="1">
+          <a:gsLst>
+            <a:gs pos="0">
+              <a:schemeClr val="phClr">
+                <a:satMod val="103000"/>
+                <a:lumMod val="102000"/>
+                <a:tint val="94000"/>
+              </a:schemeClr>
+            </a:gs>
+            <a:gs pos="50000">
+              <a:schemeClr val="phClr">
+                <a:satMod val="110000"/>
+                <a:lumMod val="100000"/>
+                <a:shade val="100000"/>
+              </a:schemeClr>
+            </a:gs>
+            <a:gs pos="100000">
+              <a:schemeClr val="phClr">
+                <a:lumMod val="99000"/>
+                <a:satMod val="120000"/>
+                <a:shade val="78000"/>
+              </a:schemeClr>
+            </a:gs>
+          </a:gsLst>
+          <a:lin ang="5400000" scaled="0"/>
+        </a:gradFill>
+      </a:fillStyleLst>
+      <a:lnStyleLst>
+        <a:ln w="12700" cap="flat" cmpd="sng" algn="ctr">
+          <a:solidFill>
+            <a:schemeClr val="phClr"/>
+          </a:solidFill>
+          <a:prstDash val="solid"/>
+          <a:miter lim="800000"/>
+        </a:ln>
+        <a:ln w="19050" cap="flat" cmpd="sng" algn="ctr">
+          <a:solidFill>
+            <a:schemeClr val="phClr"/>
+          </a:solidFill>
+          <a:prstDash val="solid"/>
+          <a:miter lim="800000"/>
+        </a:ln>
+        <a:ln w="25400" cap="flat" cmpd="sng" algn="ctr">
+          <a:solidFill>
+            <a:schemeClr val="phClr"/>
+          </a:solidFill>
+          <a:prstDash val="solid"/>
+          <a:miter lim="800000"/>
+        </a:ln>
+      </a:lnStyleLst>
+      <a:effectStyleLst>
+        <a:effectStyle>
+          <a:effectLst/>
+        </a:effectStyle>
+        <a:effectStyle>
+          <a:effectLst/>
+        </a:effectStyle>
+        <a:effectStyle>
+          <a:effectLst>
+            <a:outerShdw blurRad="57150" dist="19050" dir="5400000" algn="ctr" rotWithShape="0">
+              <a:srgbClr val="000000">
+                <a:alpha val="63000"/>
+              </a:srgbClr>
+            </a:outerShdw>
+          </a:effectLst>
+        </a:effectStyle>
+      </a:effectStyleLst>
+      <a:bgFillStyleLst>
+        <a:solidFill>
+          <a:schemeClr val="phClr"/>
+        </a:solidFill>
+        <a:solidFill>
+          <a:schemeClr val="phClr">
+            <a:tint val="95000"/>
+            <a:satMod val="170000"/>
+          </a:schemeClr>
+        </a:solidFill>
+        <a:gradFill rotWithShape="1">
+          <a:gsLst>
+            <a:gs pos="0">
+              <a:schemeClr val="phClr">
+                <a:tint val="93000"/>
+                <a:satMod val="150000"/>
+                <a:shade val="98000"/>
+                <a:lumMod val="102000"/>
+              </a:schemeClr>
+            </a:gs>
+            <a:gs pos="50000">
+              <a:schemeClr val="phClr">
+                <a:tint val="98000"/>
+                <a:satMod val="130000"/>
+                <a:shade val="90000"/>
+                <a:lumMod val="103000"/>
+              </a:schemeClr>
+            </a:gs>
+            <a:gs pos="100000">
+              <a:schemeClr val="phClr">
+                <a:shade val="63000"/>
+                <a:satMod val="120000"/>
+              </a:schemeClr>
+            </a:gs>
+          </a:gsLst>
+          <a:lin ang="5400000" scaled="0"/>
+        </a:gradFill>
+      </a:bgFillStyleLst>
+    </a:fmtScheme>
+  </a:themeElements>
+  <a:objectDefaults>
+    <a:lnDef>
+      <a:spPr/>
+      <a:bodyPr/>
+      <a:lstStyle/>
+      <a:style>
+        <a:lnRef idx="2">
+          <a:schemeClr val="accent1"/>
+        </a:lnRef>
+        <a:fillRef idx="0">
+          <a:schemeClr val="accent1"/>
+        </a:fillRef>
+        <a:effectRef idx="1">
+          <a:schemeClr val="accent1"/>
+        </a:effectRef>
+        <a:fontRef idx="minor">
+          <a:schemeClr val="tx1"/>
+        </a:fontRef>
+      </a:style>
+    </a:lnDef>
+  </a:objectDefaults>
+  <a:extraClrSchemeLst/>
+  <a:extLst>
+    <a:ext uri="{05A4C25C-085E-4340-85A3-A5531E510DB2}">
+      <thm15:themeFamily xmlns:thm15="http://schemas.microsoft.com/office/thememl/2012/main" name="Office Theme" id="{2E142A2C-CD16-42D6-873A-C26D2A0506FA}" vid="{1BDDFF52-6CD6-40A5-AB3C-68EB2F1E4D0A}"/>
+    </a:ext>
+  </a:extLst>
+</a:theme>
 </file>
--- a/Звіт/Диплом/Презентація/Презентація_диплом_Ніколаєв.pptx
+++ b/Звіт/Диплом/Презентація/Презентація_диплом_Ніколаєв.pptx
@@ -150,6 +150,9 @@
         </p15:guide>
       </p15:sldGuideLst>
     </p:ext>
+    <p:ext uri="{2D200454-40CA-4A62-9FC3-DE9A4176ACB9}">
+      <p15:notesGuideLst xmlns:p15="http://schemas.microsoft.com/office/powerpoint/2012/main"/>
+    </p:ext>
   </p:extLst>
 </p:presentation>
 </file>
@@ -248,7 +251,7 @@
           <a:p>
             <a:fld id="{86538AE5-C6A3-47E9-8146-192446ACA407}" type="datetime1">
               <a:rPr lang="en-US" smtClean="0"/>
-              <a:t>6/2/2026</a:t>
+              <a:t>6/6/2026</a:t>
             </a:fld>
             <a:endParaRPr lang="en-US"/>
           </a:p>
@@ -426,7 +429,7 @@
           <a:p>
             <a:fld id="{91E602C1-FD39-474B-8E9E-3C82FC4D49CF}" type="datetime1">
               <a:rPr lang="en-US" smtClean="0"/>
-              <a:t>6/2/2026</a:t>
+              <a:t>6/6/2026</a:t>
             </a:fld>
             <a:endParaRPr lang="en-US"/>
           </a:p>
@@ -873,7 +876,7 @@
           <a:p>
             <a:fld id="{DBBAC57F-4FCA-491A-82FB-556EC55060BC}" type="datetime1">
               <a:rPr lang="en-US" smtClean="0"/>
-              <a:t>6/2/2026</a:t>
+              <a:t>6/6/2026</a:t>
             </a:fld>
             <a:endParaRPr lang="en-US"/>
           </a:p>
@@ -1049,7 +1052,7 @@
           <a:p>
             <a:fld id="{B322F70C-7C27-44A3-A6D7-82F017C5F749}" type="datetime1">
               <a:rPr lang="en-US" smtClean="0"/>
-              <a:t>6/2/2026</a:t>
+              <a:t>6/6/2026</a:t>
             </a:fld>
             <a:endParaRPr lang="en-US"/>
           </a:p>
@@ -1235,7 +1238,7 @@
           <a:p>
             <a:fld id="{13FFD299-4B9E-416E-9560-408B60443B50}" type="datetime1">
               <a:rPr lang="en-US" smtClean="0"/>
-              <a:t>6/2/2026</a:t>
+              <a:t>6/6/2026</a:t>
             </a:fld>
             <a:endParaRPr lang="en-US"/>
           </a:p>
@@ -1411,7 +1414,7 @@
           <a:p>
             <a:fld id="{5496A48F-2C65-4B23-BCFE-03C0E5AD78F3}" type="datetime1">
               <a:rPr lang="en-US" smtClean="0"/>
-              <a:t>6/2/2026</a:t>
+              <a:t>6/6/2026</a:t>
             </a:fld>
             <a:endParaRPr lang="en-US"/>
           </a:p>
@@ -1664,7 +1667,7 @@
           <a:p>
             <a:fld id="{92E9A1EC-4414-4954-8B8E-79607052AB91}" type="datetime1">
               <a:rPr lang="en-US" smtClean="0"/>
-              <a:t>6/2/2026</a:t>
+              <a:t>6/6/2026</a:t>
             </a:fld>
             <a:endParaRPr lang="en-US"/>
           </a:p>
@@ -1957,7 +1960,7 @@
           <a:p>
             <a:fld id="{57C53034-A422-490F-87BB-C1B26810D76C}" type="datetime1">
               <a:rPr lang="en-US" smtClean="0"/>
-              <a:t>6/2/2026</a:t>
+              <a:t>6/6/2026</a:t>
             </a:fld>
             <a:endParaRPr lang="en-US"/>
           </a:p>
@@ -2384,7 +2387,7 @@
           <a:p>
             <a:fld id="{26C1EA4C-E199-4B03-ADEB-24B992B8EA05}" type="datetime1">
               <a:rPr lang="en-US" smtClean="0"/>
-              <a:t>6/2/2026</a:t>
+              <a:t>6/6/2026</a:t>
             </a:fld>
             <a:endParaRPr lang="en-US"/>
           </a:p>
@@ -2509,7 +2512,7 @@
           <a:p>
             <a:fld id="{6A5E25AB-CC8A-4B57-8557-C3DD5219E309}" type="datetime1">
               <a:rPr lang="en-US" smtClean="0"/>
-              <a:t>6/2/2026</a:t>
+              <a:t>6/6/2026</a:t>
             </a:fld>
             <a:endParaRPr lang="en-US"/>
           </a:p>
@@ -2628,7 +2631,7 @@
           <a:p>
             <a:fld id="{AEB9A11C-4C4D-443A-9EDE-122E473CB155}" type="datetime1">
               <a:rPr lang="en-US" smtClean="0"/>
-              <a:t>6/2/2026</a:t>
+              <a:t>6/6/2026</a:t>
             </a:fld>
             <a:endParaRPr lang="en-US"/>
           </a:p>
@@ -2916,7 +2919,7 @@
           <a:p>
             <a:fld id="{6B0074C2-2F64-4AC7-B94D-579EE27CEDBB}" type="datetime1">
               <a:rPr lang="en-US" smtClean="0"/>
-              <a:t>6/2/2026</a:t>
+              <a:t>6/6/2026</a:t>
             </a:fld>
             <a:endParaRPr lang="en-US"/>
           </a:p>
@@ -3176,7 +3179,7 @@
           <a:p>
             <a:fld id="{9248E289-03AF-4763-A847-3AE97CFA1361}" type="datetime1">
               <a:rPr lang="en-US" smtClean="0"/>
-              <a:t>6/2/2026</a:t>
+              <a:t>6/6/2026</a:t>
             </a:fld>
             <a:endParaRPr lang="en-US"/>
           </a:p>
@@ -3395,7 +3398,7 @@
           <a:p>
             <a:fld id="{ADADDC00-00A2-4CD0-9FF4-A62C33463821}" type="datetime1">
               <a:rPr lang="en-US" smtClean="0"/>
-              <a:t>6/2/2026</a:t>
+              <a:t>6/6/2026</a:t>
             </a:fld>
             <a:endParaRPr lang="en-US"/>
           </a:p>
@@ -4137,13 +4140,94 @@
           <a:p>
             <a:pPr algn="l"/>
             <a:r>
-              <a:rPr sz="1200" b="0" i="0">
+              <a:rPr sz="1200" b="0" i="0" dirty="0" err="1">
                 <a:solidFill>
                   <a:srgbClr val="64748B"/>
                 </a:solidFill>
                 <a:latin typeface="Calibri"/>
               </a:rPr>
-              <a:t>Студент: Ніколаєв Т. О.  |  Керівник: Зеленцов Д. Г.  |  Група: 4-КН-22</a:t>
+              <a:t>Студент</a:t>
+            </a:r>
+            <a:r>
+              <a:rPr sz="1200" b="0" i="0" dirty="0">
+                <a:solidFill>
+                  <a:srgbClr val="64748B"/>
+                </a:solidFill>
+                <a:latin typeface="Calibri"/>
+              </a:rPr>
+              <a:t>: </a:t>
+            </a:r>
+            <a:r>
+              <a:rPr sz="1200" b="0" i="0" dirty="0" err="1">
+                <a:solidFill>
+                  <a:srgbClr val="64748B"/>
+                </a:solidFill>
+                <a:latin typeface="Calibri"/>
+              </a:rPr>
+              <a:t>Ніколаєв</a:t>
+            </a:r>
+            <a:r>
+              <a:rPr sz="1200" b="0" i="0" dirty="0">
+                <a:solidFill>
+                  <a:srgbClr val="64748B"/>
+                </a:solidFill>
+                <a:latin typeface="Calibri"/>
+              </a:rPr>
+              <a:t> Т. О.  |  </a:t>
+            </a:r>
+            <a:r>
+              <a:rPr sz="1200" b="0" i="0" dirty="0" err="1">
+                <a:solidFill>
+                  <a:srgbClr val="64748B"/>
+                </a:solidFill>
+                <a:latin typeface="Calibri"/>
+              </a:rPr>
+              <a:t>Керівник</a:t>
+            </a:r>
+            <a:r>
+              <a:rPr sz="1200" b="0" i="0" dirty="0">
+                <a:solidFill>
+                  <a:srgbClr val="64748B"/>
+                </a:solidFill>
+                <a:latin typeface="Calibri"/>
+              </a:rPr>
+              <a:t>: </a:t>
+            </a:r>
+            <a:r>
+              <a:rPr sz="1200" b="0" i="0" dirty="0" err="1">
+                <a:solidFill>
+                  <a:srgbClr val="64748B"/>
+                </a:solidFill>
+                <a:latin typeface="Calibri"/>
+              </a:rPr>
+              <a:t>Зеленцов</a:t>
+            </a:r>
+            <a:r>
+              <a:rPr sz="1200" b="0" i="0" dirty="0">
+                <a:solidFill>
+                  <a:srgbClr val="64748B"/>
+                </a:solidFill>
+                <a:latin typeface="Calibri"/>
+              </a:rPr>
+              <a:t> Д. Г.  |  </a:t>
+            </a:r>
+            <a:r>
+              <a:rPr sz="1200" b="0" i="0" dirty="0" err="1">
+                <a:solidFill>
+                  <a:srgbClr val="64748B"/>
+                </a:solidFill>
+                <a:latin typeface="Calibri"/>
+              </a:rPr>
+              <a:t>Група</a:t>
+            </a:r>
+            <a:r>
+              <a:rPr sz="1200" b="0" i="0" dirty="0">
+                <a:solidFill>
+                  <a:srgbClr val="64748B"/>
+                </a:solidFill>
+                <a:latin typeface="Calibri"/>
+              </a:rPr>
+              <a:t>: 4-КН-22</a:t>
             </a:r>
           </a:p>
         </p:txBody>
